--- a/Auto_Financial_Pack_2025.pptx
+++ b/Auto_Financial_Pack_2025.pptx
@@ -15,6 +15,29 @@
     <p:sldId id="263" r:id="rId14"/>
     <p:sldId id="264" r:id="rId15"/>
     <p:sldId id="265" r:id="rId16"/>
+    <p:sldId id="266" r:id="rId17"/>
+    <p:sldId id="267" r:id="rId18"/>
+    <p:sldId id="268" r:id="rId19"/>
+    <p:sldId id="269" r:id="rId20"/>
+    <p:sldId id="270" r:id="rId21"/>
+    <p:sldId id="271" r:id="rId22"/>
+    <p:sldId id="272" r:id="rId23"/>
+    <p:sldId id="273" r:id="rId24"/>
+    <p:sldId id="274" r:id="rId25"/>
+    <p:sldId id="275" r:id="rId26"/>
+    <p:sldId id="276" r:id="rId27"/>
+    <p:sldId id="277" r:id="rId28"/>
+    <p:sldId id="278" r:id="rId29"/>
+    <p:sldId id="279" r:id="rId30"/>
+    <p:sldId id="280" r:id="rId31"/>
+    <p:sldId id="281" r:id="rId32"/>
+    <p:sldId id="282" r:id="rId33"/>
+    <p:sldId id="283" r:id="rId34"/>
+    <p:sldId id="284" r:id="rId35"/>
+    <p:sldId id="285" r:id="rId36"/>
+    <p:sldId id="286" r:id="rId37"/>
+    <p:sldId id="287" r:id="rId38"/>
+    <p:sldId id="288" r:id="rId39"/>
   </p:sldIdLst>
   <p:sldSz cx="9144000" cy="6858000" type="screen4x3"/>
   <p:notesSz cx="6858000" cy="9144000"/>
@@ -365,7 +388,256 @@
 </c:chartSpace>
 </file>
 
-<file path=ppt/charts/chart2.xml><?xml version="1.0" encoding="utf-8"?>
+<file path=ppt/charts/chart10.xml><?xml version="1.0" encoding="utf-8"?>
+<c:chartSpace xmlns:c="http://schemas.openxmlformats.org/drawingml/2006/chart" xmlns:a="http://schemas.openxmlformats.org/drawingml/2006/main" xmlns:r="http://schemas.openxmlformats.org/officeDocument/2006/relationships">
+  <c:date1904 val="0"/>
+  <c:chart>
+    <c:autoTitleDeleted val="0"/>
+    <c:plotArea>
+      <c:lineChart>
+        <c:grouping val="standard"/>
+        <c:varyColors val="0"/>
+        <c:ser>
+          <c:idx val="0"/>
+          <c:order val="0"/>
+          <c:tx>
+            <c:strRef>
+              <c:f>Sheet1!$B$1</c:f>
+              <c:strCache>
+                <c:ptCount val="1"/>
+                <c:pt idx="0">
+                  <c:v>Monthly Spend</c:v>
+                </c:pt>
+              </c:strCache>
+            </c:strRef>
+          </c:tx>
+          <c:marker>
+            <c:symbol val="none"/>
+          </c:marker>
+          <c:cat>
+            <c:strRef>
+              <c:f>Sheet1!$A$2:$A$25</c:f>
+              <c:strCache>
+                <c:ptCount val="24"/>
+                <c:pt idx="0">
+                  <c:v>2020-03</c:v>
+                </c:pt>
+                <c:pt idx="1">
+                  <c:v>2020-05</c:v>
+                </c:pt>
+                <c:pt idx="2">
+                  <c:v>2020-06</c:v>
+                </c:pt>
+                <c:pt idx="3">
+                  <c:v>2020-07</c:v>
+                </c:pt>
+                <c:pt idx="4">
+                  <c:v>2020-09</c:v>
+                </c:pt>
+                <c:pt idx="5">
+                  <c:v>2021-03</c:v>
+                </c:pt>
+                <c:pt idx="6">
+                  <c:v>2021-04</c:v>
+                </c:pt>
+                <c:pt idx="7">
+                  <c:v>2021-05</c:v>
+                </c:pt>
+                <c:pt idx="8">
+                  <c:v>2021-06</c:v>
+                </c:pt>
+                <c:pt idx="9">
+                  <c:v>2021-08</c:v>
+                </c:pt>
+                <c:pt idx="10">
+                  <c:v>2022-09</c:v>
+                </c:pt>
+                <c:pt idx="11">
+                  <c:v>2022-10</c:v>
+                </c:pt>
+                <c:pt idx="12">
+                  <c:v>2022-11</c:v>
+                </c:pt>
+                <c:pt idx="13">
+                  <c:v>2022-12</c:v>
+                </c:pt>
+                <c:pt idx="14">
+                  <c:v>2023-06</c:v>
+                </c:pt>
+                <c:pt idx="15">
+                  <c:v>2023-07</c:v>
+                </c:pt>
+                <c:pt idx="16">
+                  <c:v>2023-08</c:v>
+                </c:pt>
+                <c:pt idx="17">
+                  <c:v>2023-11</c:v>
+                </c:pt>
+                <c:pt idx="18">
+                  <c:v>2023-12</c:v>
+                </c:pt>
+                <c:pt idx="19">
+                  <c:v>2024-01</c:v>
+                </c:pt>
+                <c:pt idx="20">
+                  <c:v>2024-02</c:v>
+                </c:pt>
+                <c:pt idx="21">
+                  <c:v>2024-03</c:v>
+                </c:pt>
+                <c:pt idx="22">
+                  <c:v>2024-04</c:v>
+                </c:pt>
+                <c:pt idx="23">
+                  <c:v>2024-05</c:v>
+                </c:pt>
+              </c:strCache>
+            </c:strRef>
+          </c:cat>
+          <c:val>
+            <c:numRef>
+              <c:f>Sheet1!$B$2:$B$25</c:f>
+              <c:numCache>
+                <c:formatCode>General</c:formatCode>
+                <c:ptCount val="24"/>
+                <c:pt idx="0">
+                  <c:v>19000</c:v>
+                </c:pt>
+                <c:pt idx="1">
+                  <c:v>18000</c:v>
+                </c:pt>
+                <c:pt idx="2">
+                  <c:v>18000</c:v>
+                </c:pt>
+                <c:pt idx="3">
+                  <c:v>13000</c:v>
+                </c:pt>
+                <c:pt idx="4">
+                  <c:v>14000</c:v>
+                </c:pt>
+                <c:pt idx="5">
+                  <c:v>19000</c:v>
+                </c:pt>
+                <c:pt idx="6">
+                  <c:v>14000</c:v>
+                </c:pt>
+                <c:pt idx="7">
+                  <c:v>15000</c:v>
+                </c:pt>
+                <c:pt idx="8">
+                  <c:v>21000</c:v>
+                </c:pt>
+                <c:pt idx="9">
+                  <c:v>22000</c:v>
+                </c:pt>
+                <c:pt idx="10">
+                  <c:v>16000</c:v>
+                </c:pt>
+                <c:pt idx="11">
+                  <c:v>17000</c:v>
+                </c:pt>
+                <c:pt idx="12">
+                  <c:v>38000</c:v>
+                </c:pt>
+                <c:pt idx="13">
+                  <c:v>21000</c:v>
+                </c:pt>
+                <c:pt idx="14">
+                  <c:v>30000</c:v>
+                </c:pt>
+                <c:pt idx="15">
+                  <c:v>16000</c:v>
+                </c:pt>
+                <c:pt idx="16">
+                  <c:v>17000</c:v>
+                </c:pt>
+                <c:pt idx="17">
+                  <c:v>22000</c:v>
+                </c:pt>
+                <c:pt idx="18">
+                  <c:v>22000</c:v>
+                </c:pt>
+                <c:pt idx="19">
+                  <c:v>20000</c:v>
+                </c:pt>
+                <c:pt idx="20">
+                  <c:v>15000</c:v>
+                </c:pt>
+                <c:pt idx="21">
+                  <c:v>25000</c:v>
+                </c:pt>
+                <c:pt idx="22">
+                  <c:v>18000</c:v>
+                </c:pt>
+                <c:pt idx="23">
+                  <c:v>20000</c:v>
+                </c:pt>
+              </c:numCache>
+            </c:numRef>
+          </c:val>
+          <c:smooth val="0"/>
+        </c:ser>
+        <c:marker val="1"/>
+        <c:smooth val="0"/>
+        <c:axId val="2118791784"/>
+        <c:axId val="2140495176"/>
+      </c:lineChart>
+      <c:catAx>
+        <c:axId val="2118791784"/>
+        <c:scaling>
+          <c:orientation val="minMax"/>
+        </c:scaling>
+        <c:delete val="0"/>
+        <c:axPos val="b"/>
+        <c:majorTickMark val="out"/>
+        <c:minorTickMark val="none"/>
+        <c:tickLblPos val="nextTo"/>
+        <c:crossAx val="2140495176"/>
+        <c:crosses val="autoZero"/>
+        <c:auto val="1"/>
+        <c:lblAlgn val="ctr"/>
+        <c:lblOffset val="100"/>
+        <c:noMultiLvlLbl val="0"/>
+      </c:catAx>
+      <c:valAx>
+        <c:axId val="2140495176"/>
+        <c:scaling/>
+        <c:delete val="0"/>
+        <c:axPos val="l"/>
+        <c:majorGridlines/>
+        <c:majorTickMark val="out"/>
+        <c:minorTickMark val="none"/>
+        <c:tickLblPos val="nextTo"/>
+        <c:crossAx val="2118791784"/>
+        <c:crosses val="autoZero"/>
+      </c:valAx>
+    </c:plotArea>
+    <c:legend>
+      <c:legendPos val="r"/>
+      <c:layout/>
+      <c:overlay val="0"/>
+    </c:legend>
+    <c:plotVisOnly val="1"/>
+    <c:dispBlanksAs val="gap"/>
+    <c:showDLblsOverMax val="0"/>
+  </c:chart>
+  <c:txPr>
+    <a:bodyPr/>
+    <a:lstStyle/>
+    <a:p>
+      <a:pPr>
+        <a:defRPr sz="1800"/>
+      </a:pPr>
+      <a:endParaRPr lang="en-US"/>
+    </a:p>
+  </c:txPr>
+  <c:externalData r:id="rId1">
+    <c:autoUpdate val="0"/>
+  </c:externalData>
+</c:chartSpace>
+</file>
+
+<file path=ppt/charts/chart11.xml><?xml version="1.0" encoding="utf-8"?>
 <c:chartSpace xmlns:c="http://schemas.openxmlformats.org/drawingml/2006/chart" xmlns:a="http://schemas.openxmlformats.org/drawingml/2006/main" xmlns:r="http://schemas.openxmlformats.org/officeDocument/2006/relationships">
   <c:date1904 val="0"/>
   <c:chart>
@@ -383,48 +655,102 @@
               <c:strCache>
                 <c:ptCount val="1"/>
                 <c:pt idx="0">
-                  <c:v>YOY Growth %</c:v>
+                  <c:v>Quarterly Spend</c:v>
                 </c:pt>
               </c:strCache>
             </c:strRef>
           </c:tx>
           <c:cat>
             <c:strRef>
-              <c:f>Sheet1!$A$2:$A$5</c:f>
+              <c:f>Sheet1!$A$2:$A$14</c:f>
               <c:strCache>
-                <c:ptCount val="4"/>
-                <c:pt idx="0">
-                  <c:v>Q1</c:v>
+                <c:ptCount val="13"/>
+                <c:pt idx="0">
+                  <c:v>2020-Q1</c:v>
                 </c:pt>
                 <c:pt idx="1">
-                  <c:v>Q2</c:v>
+                  <c:v>2020-Q2</c:v>
                 </c:pt>
                 <c:pt idx="2">
-                  <c:v>Q1</c:v>
+                  <c:v>2020-Q3</c:v>
                 </c:pt>
                 <c:pt idx="3">
-                  <c:v>Q2</c:v>
+                  <c:v>2021-Q1</c:v>
+                </c:pt>
+                <c:pt idx="4">
+                  <c:v>2021-Q2</c:v>
+                </c:pt>
+                <c:pt idx="5">
+                  <c:v>2021-Q3</c:v>
+                </c:pt>
+                <c:pt idx="6">
+                  <c:v>2022-Q3</c:v>
+                </c:pt>
+                <c:pt idx="7">
+                  <c:v>2022-Q4</c:v>
+                </c:pt>
+                <c:pt idx="8">
+                  <c:v>2023-Q2</c:v>
+                </c:pt>
+                <c:pt idx="9">
+                  <c:v>2023-Q3</c:v>
+                </c:pt>
+                <c:pt idx="10">
+                  <c:v>2023-Q4</c:v>
+                </c:pt>
+                <c:pt idx="11">
+                  <c:v>2024-Q1</c:v>
+                </c:pt>
+                <c:pt idx="12">
+                  <c:v>2024-Q2</c:v>
                 </c:pt>
               </c:strCache>
             </c:strRef>
           </c:cat>
           <c:val>
             <c:numRef>
-              <c:f>Sheet1!$B$2:$B$5</c:f>
+              <c:f>Sheet1!$B$2:$B$14</c:f>
               <c:numCache>
                 <c:formatCode>General</c:formatCode>
-                <c:ptCount val="4"/>
-                <c:pt idx="0">
-                  <c:v>0.0</c:v>
+                <c:ptCount val="13"/>
+                <c:pt idx="0">
+                  <c:v>19000</c:v>
                 </c:pt>
                 <c:pt idx="1">
-                  <c:v>0.0</c:v>
+                  <c:v>36000</c:v>
                 </c:pt>
                 <c:pt idx="2">
-                  <c:v>30.0</c:v>
+                  <c:v>27000</c:v>
                 </c:pt>
                 <c:pt idx="3">
-                  <c:v>27.27</c:v>
+                  <c:v>19000</c:v>
+                </c:pt>
+                <c:pt idx="4">
+                  <c:v>50000</c:v>
+                </c:pt>
+                <c:pt idx="5">
+                  <c:v>22000</c:v>
+                </c:pt>
+                <c:pt idx="6">
+                  <c:v>16000</c:v>
+                </c:pt>
+                <c:pt idx="7">
+                  <c:v>76000</c:v>
+                </c:pt>
+                <c:pt idx="8">
+                  <c:v>30000</c:v>
+                </c:pt>
+                <c:pt idx="9">
+                  <c:v>33000</c:v>
+                </c:pt>
+                <c:pt idx="10">
+                  <c:v>44000</c:v>
+                </c:pt>
+                <c:pt idx="11">
+                  <c:v>60000</c:v>
+                </c:pt>
+                <c:pt idx="12">
+                  <c:v>38000</c:v>
                 </c:pt>
               </c:numCache>
             </c:numRef>
@@ -481,7 +807,96 @@
 </c:chartSpace>
 </file>
 
-<file path=ppt/charts/chart3.xml><?xml version="1.0" encoding="utf-8"?>
+<file path=ppt/charts/chart12.xml><?xml version="1.0" encoding="utf-8"?>
+<c:chartSpace xmlns:c="http://schemas.openxmlformats.org/drawingml/2006/chart" xmlns:a="http://schemas.openxmlformats.org/drawingml/2006/main" xmlns:r="http://schemas.openxmlformats.org/officeDocument/2006/relationships">
+  <c:chart>
+    <c:autoTitleDeleted val="0"/>
+    <c:plotArea>
+      <c:pieChart>
+        <c:varyColors val="1"/>
+        <c:ser>
+          <c:idx val="0"/>
+          <c:order val="0"/>
+          <c:tx>
+            <c:strRef>
+              <c:f>Sheet1!$B$1</c:f>
+              <c:strCache>
+                <c:ptCount val="1"/>
+                <c:pt idx="0">
+                  <c:v>Contribution %</c:v>
+                </c:pt>
+              </c:strCache>
+            </c:strRef>
+          </c:tx>
+          <c:cat>
+            <c:strRef>
+              <c:f>Sheet1!$A$2:$A$6</c:f>
+              <c:strCache>
+                <c:ptCount val="5"/>
+                <c:pt idx="0">
+                  <c:v>Supplier A</c:v>
+                </c:pt>
+                <c:pt idx="1">
+                  <c:v>Supplier B</c:v>
+                </c:pt>
+                <c:pt idx="2">
+                  <c:v>Supplier C</c:v>
+                </c:pt>
+                <c:pt idx="3">
+                  <c:v>Supplier D</c:v>
+                </c:pt>
+                <c:pt idx="4">
+                  <c:v>Supplier E</c:v>
+                </c:pt>
+              </c:strCache>
+            </c:strRef>
+          </c:cat>
+          <c:val>
+            <c:numRef>
+              <c:f>Sheet1!$B$2:$B$6</c:f>
+              <c:numCache>
+                <c:formatCode>General</c:formatCode>
+                <c:ptCount val="5"/>
+                <c:pt idx="0">
+                  <c:v>21.27659574468085</c:v>
+                </c:pt>
+                <c:pt idx="1">
+                  <c:v>15.957446808510639</c:v>
+                </c:pt>
+                <c:pt idx="2">
+                  <c:v>24.46808510638298</c:v>
+                </c:pt>
+                <c:pt idx="3">
+                  <c:v>17.02127659574468</c:v>
+                </c:pt>
+                <c:pt idx="4">
+                  <c:v>21.27659574468085</c:v>
+                </c:pt>
+              </c:numCache>
+            </c:numRef>
+          </c:val>
+        </c:ser>
+      </c:pieChart>
+    </c:plotArea>
+    <c:dispBlanksAs val="gap"/>
+  </c:chart>
+  <c:txPr>
+    <a:bodyPr/>
+    <a:lstStyle/>
+    <a:p>
+      <a:pPr>
+        <a:defRPr sz="1800"/>
+      </a:pPr>
+      <a:endParaRPr lang="en-US"/>
+    </a:p>
+  </c:txPr>
+  <c:externalData r:id="rId1">
+    <c:autoUpdate val="0"/>
+  </c:externalData>
+</c:chartSpace>
+</file>
+
+<file path=ppt/charts/chart13.xml><?xml version="1.0" encoding="utf-8"?>
 <c:chartSpace xmlns:c="http://schemas.openxmlformats.org/drawingml/2006/chart" xmlns:a="http://schemas.openxmlformats.org/drawingml/2006/main" xmlns:r="http://schemas.openxmlformats.org/officeDocument/2006/relationships">
   <c:date1904 val="0"/>
   <c:chart>
@@ -499,62 +914,26 @@
               <c:strCache>
                 <c:ptCount val="1"/>
                 <c:pt idx="0">
-                  <c:v>Actual</c:v>
+                  <c:v>Variance Amount</c:v>
                 </c:pt>
               </c:strCache>
             </c:strRef>
           </c:tx>
           <c:cat>
             <c:strRef>
-              <c:f>Sheet1!$A$2:$A$17</c:f>
+              <c:f>Sheet1!$A$2:$A$5</c:f>
               <c:strCache>
-                <c:ptCount val="16"/>
-                <c:pt idx="0">
+                <c:ptCount val="4"/>
+                <c:pt idx="0">
+                  <c:v>Depreciation</c:v>
+                </c:pt>
+                <c:pt idx="1">
+                  <c:v>Opex</c:v>
+                </c:pt>
+                <c:pt idx="2">
                   <c:v>Revenue</c:v>
                 </c:pt>
-                <c:pt idx="1">
-                  <c:v>Tax</c:v>
-                </c:pt>
-                <c:pt idx="2">
-                  <c:v>Opex</c:v>
-                </c:pt>
                 <c:pt idx="3">
-                  <c:v>Depreciation</c:v>
-                </c:pt>
-                <c:pt idx="4">
-                  <c:v>Depreciation</c:v>
-                </c:pt>
-                <c:pt idx="5">
-                  <c:v>Tax</c:v>
-                </c:pt>
-                <c:pt idx="6">
-                  <c:v>Revenue</c:v>
-                </c:pt>
-                <c:pt idx="7">
-                  <c:v>Opex</c:v>
-                </c:pt>
-                <c:pt idx="8">
-                  <c:v>Opex</c:v>
-                </c:pt>
-                <c:pt idx="9">
-                  <c:v>Depreciation</c:v>
-                </c:pt>
-                <c:pt idx="10">
-                  <c:v>Tax</c:v>
-                </c:pt>
-                <c:pt idx="11">
-                  <c:v>Revenue</c:v>
-                </c:pt>
-                <c:pt idx="12">
-                  <c:v>Depreciation</c:v>
-                </c:pt>
-                <c:pt idx="13">
-                  <c:v>Opex</c:v>
-                </c:pt>
-                <c:pt idx="14">
-                  <c:v>Revenue</c:v>
-                </c:pt>
-                <c:pt idx="15">
                   <c:v>Tax</c:v>
                 </c:pt>
               </c:strCache>
@@ -562,185 +941,21 @@
           </c:cat>
           <c:val>
             <c:numRef>
-              <c:f>Sheet1!$B$2:$B$17</c:f>
+              <c:f>Sheet1!$B$2:$B$5</c:f>
               <c:numCache>
                 <c:formatCode>General</c:formatCode>
-                <c:ptCount val="16"/>
-                <c:pt idx="0">
-                  <c:v>1000000</c:v>
+                <c:ptCount val="4"/>
+                <c:pt idx="0">
+                  <c:v>-67000</c:v>
                 </c:pt>
                 <c:pt idx="1">
-                  <c:v>-90000</c:v>
+                  <c:v>-650000</c:v>
                 </c:pt>
                 <c:pt idx="2">
-                  <c:v>-500000</c:v>
+                  <c:v>1450000</c:v>
                 </c:pt>
                 <c:pt idx="3">
-                  <c:v>-50000</c:v>
-                </c:pt>
-                <c:pt idx="4">
-                  <c:v>-52000</c:v>
-                </c:pt>
-                <c:pt idx="5">
-                  <c:v>-95000</c:v>
-                </c:pt>
-                <c:pt idx="6">
-                  <c:v>1100000</c:v>
-                </c:pt>
-                <c:pt idx="7">
-                  <c:v>-535000</c:v>
-                </c:pt>
-                <c:pt idx="8">
-                  <c:v>-590000</c:v>
-                </c:pt>
-                <c:pt idx="9">
-                  <c:v>-60000</c:v>
-                </c:pt>
-                <c:pt idx="10">
-                  <c:v>-110000</c:v>
-                </c:pt>
-                <c:pt idx="11">
-                  <c:v>1300000</c:v>
-                </c:pt>
-                <c:pt idx="12">
-                  <c:v>-65000</c:v>
-                </c:pt>
-                <c:pt idx="13">
-                  <c:v>-625000</c:v>
-                </c:pt>
-                <c:pt idx="14">
-                  <c:v>1400000</c:v>
-                </c:pt>
-                <c:pt idx="15">
-                  <c:v>-120000</c:v>
-                </c:pt>
-              </c:numCache>
-            </c:numRef>
-          </c:val>
-        </c:ser>
-        <c:ser>
-          <c:idx val="1"/>
-          <c:order val="1"/>
-          <c:tx>
-            <c:strRef>
-              <c:f>Sheet1!$C$1</c:f>
-              <c:strCache>
-                <c:ptCount val="1"/>
-                <c:pt idx="0">
-                  <c:v>Budget</c:v>
-                </c:pt>
-              </c:strCache>
-            </c:strRef>
-          </c:tx>
-          <c:cat>
-            <c:strRef>
-              <c:f>Sheet1!$A$2:$A$17</c:f>
-              <c:strCache>
-                <c:ptCount val="16"/>
-                <c:pt idx="0">
-                  <c:v>Revenue</c:v>
-                </c:pt>
-                <c:pt idx="1">
-                  <c:v>Tax</c:v>
-                </c:pt>
-                <c:pt idx="2">
-                  <c:v>Opex</c:v>
-                </c:pt>
-                <c:pt idx="3">
-                  <c:v>Depreciation</c:v>
-                </c:pt>
-                <c:pt idx="4">
-                  <c:v>Depreciation</c:v>
-                </c:pt>
-                <c:pt idx="5">
-                  <c:v>Tax</c:v>
-                </c:pt>
-                <c:pt idx="6">
-                  <c:v>Revenue</c:v>
-                </c:pt>
-                <c:pt idx="7">
-                  <c:v>Opex</c:v>
-                </c:pt>
-                <c:pt idx="8">
-                  <c:v>Opex</c:v>
-                </c:pt>
-                <c:pt idx="9">
-                  <c:v>Depreciation</c:v>
-                </c:pt>
-                <c:pt idx="10">
-                  <c:v>Tax</c:v>
-                </c:pt>
-                <c:pt idx="11">
-                  <c:v>Revenue</c:v>
-                </c:pt>
-                <c:pt idx="12">
-                  <c:v>Depreciation</c:v>
-                </c:pt>
-                <c:pt idx="13">
-                  <c:v>Opex</c:v>
-                </c:pt>
-                <c:pt idx="14">
-                  <c:v>Revenue</c:v>
-                </c:pt>
-                <c:pt idx="15">
-                  <c:v>Tax</c:v>
-                </c:pt>
-              </c:strCache>
-            </c:strRef>
-          </c:cat>
-          <c:val>
-            <c:numRef>
-              <c:f>Sheet1!$C$2:$C$17</c:f>
-              <c:numCache>
-                <c:formatCode>General</c:formatCode>
-                <c:ptCount val="16"/>
-                <c:pt idx="0">
-                  <c:v>0.0</c:v>
-                </c:pt>
-                <c:pt idx="1">
-                  <c:v>0.0</c:v>
-                </c:pt>
-                <c:pt idx="2">
-                  <c:v>0.0</c:v>
-                </c:pt>
-                <c:pt idx="3">
-                  <c:v>0.0</c:v>
-                </c:pt>
-                <c:pt idx="4">
-                  <c:v>0.0</c:v>
-                </c:pt>
-                <c:pt idx="5">
-                  <c:v>0.0</c:v>
-                </c:pt>
-                <c:pt idx="6">
-                  <c:v>0.0</c:v>
-                </c:pt>
-                <c:pt idx="7">
-                  <c:v>0.0</c:v>
-                </c:pt>
-                <c:pt idx="8">
-                  <c:v>-565000.0</c:v>
-                </c:pt>
-                <c:pt idx="9">
-                  <c:v>-58000.0</c:v>
-                </c:pt>
-                <c:pt idx="10">
-                  <c:v>-105000.0</c:v>
-                </c:pt>
-                <c:pt idx="11">
-                  <c:v>1250000.0</c:v>
-                </c:pt>
-                <c:pt idx="12">
-                  <c:v>0.0</c:v>
-                </c:pt>
-                <c:pt idx="13">
-                  <c:v>0.0</c:v>
-                </c:pt>
-                <c:pt idx="14">
-                  <c:v>0.0</c:v>
-                </c:pt>
-                <c:pt idx="15">
-                  <c:v>0.0</c:v>
+                  <c:v>-125000</c:v>
                 </c:pt>
               </c:numCache>
             </c:numRef>
@@ -779,6 +994,3960 @@
         <c:crosses val="autoZero"/>
       </c:valAx>
     </c:plotArea>
+    <c:dispBlanksAs val="gap"/>
+  </c:chart>
+  <c:txPr>
+    <a:bodyPr/>
+    <a:lstStyle/>
+    <a:p>
+      <a:pPr>
+        <a:defRPr sz="1800"/>
+      </a:pPr>
+      <a:endParaRPr lang="en-US"/>
+    </a:p>
+  </c:txPr>
+  <c:externalData r:id="rId1">
+    <c:autoUpdate val="0"/>
+  </c:externalData>
+</c:chartSpace>
+</file>
+
+<file path=ppt/charts/chart14.xml><?xml version="1.0" encoding="utf-8"?>
+<c:chartSpace xmlns:c="http://schemas.openxmlformats.org/drawingml/2006/chart" xmlns:a="http://schemas.openxmlformats.org/drawingml/2006/main" xmlns:r="http://schemas.openxmlformats.org/officeDocument/2006/relationships">
+  <c:date1904 val="0"/>
+  <c:chart>
+    <c:autoTitleDeleted val="0"/>
+    <c:plotArea>
+      <c:barChart>
+        <c:barDir val="col"/>
+        <c:grouping val="clustered"/>
+        <c:ser>
+          <c:idx val="0"/>
+          <c:order val="0"/>
+          <c:tx>
+            <c:strRef>
+              <c:f>Sheet1!$B$1</c:f>
+              <c:strCache>
+                <c:ptCount val="1"/>
+                <c:pt idx="0">
+                  <c:v>Variance</c:v>
+                </c:pt>
+              </c:strCache>
+            </c:strRef>
+          </c:tx>
+          <c:cat>
+            <c:strRef>
+              <c:f>Sheet1!$A$2:$A$5</c:f>
+              <c:strCache>
+                <c:ptCount val="4"/>
+                <c:pt idx="0">
+                  <c:v>Revenue Variance</c:v>
+                </c:pt>
+                <c:pt idx="1">
+                  <c:v>Opex Variance</c:v>
+                </c:pt>
+                <c:pt idx="2">
+                  <c:v>Depreciation Variance</c:v>
+                </c:pt>
+                <c:pt idx="3">
+                  <c:v>Tax Variance</c:v>
+                </c:pt>
+              </c:strCache>
+            </c:strRef>
+          </c:cat>
+          <c:val>
+            <c:numRef>
+              <c:f>Sheet1!$B$2:$B$5</c:f>
+              <c:numCache>
+                <c:formatCode>General</c:formatCode>
+                <c:ptCount val="4"/>
+                <c:pt idx="0">
+                  <c:v>50000</c:v>
+                </c:pt>
+                <c:pt idx="1">
+                  <c:v>-25000</c:v>
+                </c:pt>
+                <c:pt idx="2">
+                  <c:v>-2000</c:v>
+                </c:pt>
+                <c:pt idx="3">
+                  <c:v>-5000</c:v>
+                </c:pt>
+              </c:numCache>
+            </c:numRef>
+          </c:val>
+        </c:ser>
+        <c:axId val="-2068027336"/>
+        <c:axId val="-2113994440"/>
+      </c:barChart>
+      <c:catAx>
+        <c:axId val="-2068027336"/>
+        <c:scaling>
+          <c:orientation val="minMax"/>
+        </c:scaling>
+        <c:delete val="0"/>
+        <c:axPos val="b"/>
+        <c:majorTickMark val="out"/>
+        <c:minorTickMark val="none"/>
+        <c:tickLblPos val="nextTo"/>
+        <c:crossAx val="-2113994440"/>
+        <c:crosses val="autoZero"/>
+        <c:auto val="1"/>
+        <c:lblAlgn val="ctr"/>
+        <c:lblOffset val="100"/>
+        <c:noMultiLvlLbl val="0"/>
+      </c:catAx>
+      <c:valAx>
+        <c:axId val="-2113994440"/>
+        <c:scaling/>
+        <c:delete val="0"/>
+        <c:axPos val="l"/>
+        <c:majorGridlines/>
+        <c:majorTickMark val="out"/>
+        <c:minorTickMark val="none"/>
+        <c:tickLblPos val="nextTo"/>
+        <c:crossAx val="-2068027336"/>
+        <c:crosses val="autoZero"/>
+      </c:valAx>
+    </c:plotArea>
+    <c:dispBlanksAs val="gap"/>
+  </c:chart>
+  <c:txPr>
+    <a:bodyPr/>
+    <a:lstStyle/>
+    <a:p>
+      <a:pPr>
+        <a:defRPr sz="1800"/>
+      </a:pPr>
+      <a:endParaRPr lang="en-US"/>
+    </a:p>
+  </c:txPr>
+  <c:externalData r:id="rId1">
+    <c:autoUpdate val="0"/>
+  </c:externalData>
+</c:chartSpace>
+</file>
+
+<file path=ppt/charts/chart15.xml><?xml version="1.0" encoding="utf-8"?>
+<c:chartSpace xmlns:c="http://schemas.openxmlformats.org/drawingml/2006/chart" xmlns:a="http://schemas.openxmlformats.org/drawingml/2006/main" xmlns:r="http://schemas.openxmlformats.org/officeDocument/2006/relationships">
+  <c:date1904 val="0"/>
+  <c:chart>
+    <c:autoTitleDeleted val="0"/>
+    <c:plotArea>
+      <c:barChart>
+        <c:barDir val="col"/>
+        <c:grouping val="clustered"/>
+        <c:ser>
+          <c:idx val="0"/>
+          <c:order val="0"/>
+          <c:tx>
+            <c:strRef>
+              <c:f>Sheet1!$B$1</c:f>
+              <c:strCache>
+                <c:ptCount val="1"/>
+                <c:pt idx="0">
+                  <c:v>Accrual Amount</c:v>
+                </c:pt>
+              </c:strCache>
+            </c:strRef>
+          </c:tx>
+          <c:cat>
+            <c:numRef>
+              <c:f>Sheet1!$A$2:$A$4</c:f>
+              <c:numCache>
+                <c:formatCode>General</c:formatCode>
+                <c:ptCount val="3"/>
+                <c:pt idx="0">
+                  <c:v>5001</c:v>
+                </c:pt>
+                <c:pt idx="1">
+                  <c:v>5002</c:v>
+                </c:pt>
+                <c:pt idx="2">
+                  <c:v>5003</c:v>
+                </c:pt>
+              </c:numCache>
+            </c:numRef>
+          </c:cat>
+          <c:val>
+            <c:numRef>
+              <c:f>Sheet1!$B$2:$B$4</c:f>
+              <c:numCache>
+                <c:formatCode>General</c:formatCode>
+                <c:ptCount val="3"/>
+                <c:pt idx="0">
+                  <c:v>23000</c:v>
+                </c:pt>
+                <c:pt idx="1">
+                  <c:v>30000</c:v>
+                </c:pt>
+                <c:pt idx="2">
+                  <c:v>12000</c:v>
+                </c:pt>
+              </c:numCache>
+            </c:numRef>
+          </c:val>
+        </c:ser>
+        <c:axId val="-2068027336"/>
+        <c:axId val="-2113994440"/>
+      </c:barChart>
+      <c:catAx>
+        <c:axId val="-2068027336"/>
+        <c:scaling>
+          <c:orientation val="minMax"/>
+        </c:scaling>
+        <c:delete val="0"/>
+        <c:axPos val="b"/>
+        <c:majorTickMark val="out"/>
+        <c:minorTickMark val="none"/>
+        <c:tickLblPos val="nextTo"/>
+        <c:crossAx val="-2113994440"/>
+        <c:crosses val="autoZero"/>
+        <c:auto val="1"/>
+        <c:lblAlgn val="ctr"/>
+        <c:lblOffset val="100"/>
+        <c:noMultiLvlLbl val="0"/>
+      </c:catAx>
+      <c:valAx>
+        <c:axId val="-2113994440"/>
+        <c:scaling/>
+        <c:delete val="0"/>
+        <c:axPos val="l"/>
+        <c:majorGridlines/>
+        <c:majorTickMark val="out"/>
+        <c:minorTickMark val="none"/>
+        <c:tickLblPos val="nextTo"/>
+        <c:crossAx val="-2068027336"/>
+        <c:crosses val="autoZero"/>
+      </c:valAx>
+    </c:plotArea>
+    <c:dispBlanksAs val="gap"/>
+  </c:chart>
+  <c:txPr>
+    <a:bodyPr/>
+    <a:lstStyle/>
+    <a:p>
+      <a:pPr>
+        <a:defRPr sz="1800"/>
+      </a:pPr>
+      <a:endParaRPr lang="en-US"/>
+    </a:p>
+  </c:txPr>
+  <c:externalData r:id="rId1">
+    <c:autoUpdate val="0"/>
+  </c:externalData>
+</c:chartSpace>
+</file>
+
+<file path=ppt/charts/chart16.xml><?xml version="1.0" encoding="utf-8"?>
+<c:chartSpace xmlns:c="http://schemas.openxmlformats.org/drawingml/2006/chart" xmlns:a="http://schemas.openxmlformats.org/drawingml/2006/main" xmlns:r="http://schemas.openxmlformats.org/officeDocument/2006/relationships">
+  <c:date1904 val="0"/>
+  <c:chart>
+    <c:autoTitleDeleted val="0"/>
+    <c:plotArea>
+      <c:barChart>
+        <c:barDir val="col"/>
+        <c:grouping val="clustered"/>
+        <c:ser>
+          <c:idx val="0"/>
+          <c:order val="0"/>
+          <c:tx>
+            <c:strRef>
+              <c:f>Sheet1!$B$1</c:f>
+              <c:strCache>
+                <c:ptCount val="1"/>
+                <c:pt idx="0">
+                  <c:v>Circuit Amount</c:v>
+                </c:pt>
+              </c:strCache>
+            </c:strRef>
+          </c:tx>
+          <c:cat>
+            <c:strRef>
+              <c:f>Sheet1!$A$2:$A$6</c:f>
+              <c:strCache>
+                <c:ptCount val="5"/>
+                <c:pt idx="0">
+                  <c:v>Dialog Telecom</c:v>
+                </c:pt>
+                <c:pt idx="1">
+                  <c:v>Etisalat</c:v>
+                </c:pt>
+                <c:pt idx="2">
+                  <c:v>Hutch Telecom</c:v>
+                </c:pt>
+                <c:pt idx="3">
+                  <c:v>Mobitel</c:v>
+                </c:pt>
+                <c:pt idx="4">
+                  <c:v>SLT Broadband</c:v>
+                </c:pt>
+              </c:strCache>
+            </c:strRef>
+          </c:cat>
+          <c:val>
+            <c:numRef>
+              <c:f>Sheet1!$B$2:$B$6</c:f>
+              <c:numCache>
+                <c:formatCode>General</c:formatCode>
+                <c:ptCount val="5"/>
+                <c:pt idx="0">
+                  <c:v>15000</c:v>
+                </c:pt>
+                <c:pt idx="1">
+                  <c:v>8000</c:v>
+                </c:pt>
+                <c:pt idx="2">
+                  <c:v>12000</c:v>
+                </c:pt>
+                <c:pt idx="3">
+                  <c:v>20000</c:v>
+                </c:pt>
+                <c:pt idx="4">
+                  <c:v>10000</c:v>
+                </c:pt>
+              </c:numCache>
+            </c:numRef>
+          </c:val>
+        </c:ser>
+        <c:axId val="-2068027336"/>
+        <c:axId val="-2113994440"/>
+      </c:barChart>
+      <c:catAx>
+        <c:axId val="-2068027336"/>
+        <c:scaling>
+          <c:orientation val="minMax"/>
+        </c:scaling>
+        <c:delete val="0"/>
+        <c:axPos val="b"/>
+        <c:majorTickMark val="out"/>
+        <c:minorTickMark val="none"/>
+        <c:tickLblPos val="nextTo"/>
+        <c:crossAx val="-2113994440"/>
+        <c:crosses val="autoZero"/>
+        <c:auto val="1"/>
+        <c:lblAlgn val="ctr"/>
+        <c:lblOffset val="100"/>
+        <c:noMultiLvlLbl val="0"/>
+      </c:catAx>
+      <c:valAx>
+        <c:axId val="-2113994440"/>
+        <c:scaling/>
+        <c:delete val="0"/>
+        <c:axPos val="l"/>
+        <c:majorGridlines/>
+        <c:majorTickMark val="out"/>
+        <c:minorTickMark val="none"/>
+        <c:tickLblPos val="nextTo"/>
+        <c:crossAx val="-2068027336"/>
+        <c:crosses val="autoZero"/>
+      </c:valAx>
+    </c:plotArea>
+    <c:dispBlanksAs val="gap"/>
+  </c:chart>
+  <c:txPr>
+    <a:bodyPr/>
+    <a:lstStyle/>
+    <a:p>
+      <a:pPr>
+        <a:defRPr sz="1800"/>
+      </a:pPr>
+      <a:endParaRPr lang="en-US"/>
+    </a:p>
+  </c:txPr>
+  <c:externalData r:id="rId1">
+    <c:autoUpdate val="0"/>
+  </c:externalData>
+</c:chartSpace>
+</file>
+
+<file path=ppt/charts/chart17.xml><?xml version="1.0" encoding="utf-8"?>
+<c:chartSpace xmlns:c="http://schemas.openxmlformats.org/drawingml/2006/chart" xmlns:a="http://schemas.openxmlformats.org/drawingml/2006/main" xmlns:r="http://schemas.openxmlformats.org/officeDocument/2006/relationships">
+  <c:date1904 val="0"/>
+  <c:chart>
+    <c:autoTitleDeleted val="0"/>
+    <c:plotArea>
+      <c:barChart>
+        <c:barDir val="col"/>
+        <c:grouping val="clustered"/>
+        <c:ser>
+          <c:idx val="0"/>
+          <c:order val="0"/>
+          <c:tx>
+            <c:strRef>
+              <c:f>Sheet1!$B$1</c:f>
+              <c:strCache>
+                <c:ptCount val="1"/>
+                <c:pt idx="0">
+                  <c:v>FX Gain/Loss</c:v>
+                </c:pt>
+              </c:strCache>
+            </c:strRef>
+          </c:tx>
+          <c:cat>
+            <c:strRef>
+              <c:f>Sheet1!$A$2:$A$6</c:f>
+              <c:strCache>
+                <c:ptCount val="5"/>
+                <c:pt idx="0">
+                  <c:v>Supplier A</c:v>
+                </c:pt>
+                <c:pt idx="1">
+                  <c:v>Supplier B</c:v>
+                </c:pt>
+                <c:pt idx="2">
+                  <c:v>Supplier C</c:v>
+                </c:pt>
+                <c:pt idx="3">
+                  <c:v>Supplier D</c:v>
+                </c:pt>
+                <c:pt idx="4">
+                  <c:v>Supplier E</c:v>
+                </c:pt>
+              </c:strCache>
+            </c:strRef>
+          </c:cat>
+          <c:val>
+            <c:numRef>
+              <c:f>Sheet1!$B$2:$B$6</c:f>
+              <c:numCache>
+                <c:formatCode>General</c:formatCode>
+                <c:ptCount val="5"/>
+                <c:pt idx="0">
+                  <c:v>4317250.0</c:v>
+                </c:pt>
+                <c:pt idx="1">
+                  <c:v>3467600.0</c:v>
+                </c:pt>
+                <c:pt idx="2">
+                  <c:v>6726150.0</c:v>
+                </c:pt>
+                <c:pt idx="3">
+                  <c:v>4360800.0</c:v>
+                </c:pt>
+                <c:pt idx="4">
+                  <c:v>4844000.0</c:v>
+                </c:pt>
+              </c:numCache>
+            </c:numRef>
+          </c:val>
+        </c:ser>
+        <c:axId val="-2068027336"/>
+        <c:axId val="-2113994440"/>
+      </c:barChart>
+      <c:catAx>
+        <c:axId val="-2068027336"/>
+        <c:scaling>
+          <c:orientation val="minMax"/>
+        </c:scaling>
+        <c:delete val="0"/>
+        <c:axPos val="b"/>
+        <c:majorTickMark val="out"/>
+        <c:minorTickMark val="none"/>
+        <c:tickLblPos val="nextTo"/>
+        <c:crossAx val="-2113994440"/>
+        <c:crosses val="autoZero"/>
+        <c:auto val="1"/>
+        <c:lblAlgn val="ctr"/>
+        <c:lblOffset val="100"/>
+        <c:noMultiLvlLbl val="0"/>
+      </c:catAx>
+      <c:valAx>
+        <c:axId val="-2113994440"/>
+        <c:scaling/>
+        <c:delete val="0"/>
+        <c:axPos val="l"/>
+        <c:majorGridlines/>
+        <c:majorTickMark val="out"/>
+        <c:minorTickMark val="none"/>
+        <c:tickLblPos val="nextTo"/>
+        <c:crossAx val="-2068027336"/>
+        <c:crosses val="autoZero"/>
+      </c:valAx>
+    </c:plotArea>
+    <c:dispBlanksAs val="gap"/>
+  </c:chart>
+  <c:txPr>
+    <a:bodyPr/>
+    <a:lstStyle/>
+    <a:p>
+      <a:pPr>
+        <a:defRPr sz="1800"/>
+      </a:pPr>
+      <a:endParaRPr lang="en-US"/>
+    </a:p>
+  </c:txPr>
+  <c:externalData r:id="rId1">
+    <c:autoUpdate val="0"/>
+  </c:externalData>
+</c:chartSpace>
+</file>
+
+<file path=ppt/charts/chart18.xml><?xml version="1.0" encoding="utf-8"?>
+<c:chartSpace xmlns:c="http://schemas.openxmlformats.org/drawingml/2006/chart" xmlns:a="http://schemas.openxmlformats.org/drawingml/2006/main" xmlns:r="http://schemas.openxmlformats.org/officeDocument/2006/relationships">
+  <c:date1904 val="0"/>
+  <c:chart>
+    <c:autoTitleDeleted val="0"/>
+    <c:plotArea>
+      <c:lineChart>
+        <c:grouping val="standard"/>
+        <c:varyColors val="0"/>
+        <c:ser>
+          <c:idx val="0"/>
+          <c:order val="0"/>
+          <c:tx>
+            <c:strRef>
+              <c:f>Sheet1!$B$1</c:f>
+              <c:strCache>
+                <c:ptCount val="1"/>
+                <c:pt idx="0">
+                  <c:v>Monthly FX Gain/Loss</c:v>
+                </c:pt>
+              </c:strCache>
+            </c:strRef>
+          </c:tx>
+          <c:marker>
+            <c:symbol val="none"/>
+          </c:marker>
+          <c:cat>
+            <c:strRef>
+              <c:f>Sheet1!$A$2:$A$30</c:f>
+              <c:strCache>
+                <c:ptCount val="29"/>
+                <c:pt idx="0">
+                  <c:v>2020-03</c:v>
+                </c:pt>
+                <c:pt idx="1">
+                  <c:v>2020-05</c:v>
+                </c:pt>
+                <c:pt idx="2">
+                  <c:v>2020-06</c:v>
+                </c:pt>
+                <c:pt idx="3">
+                  <c:v>2020-07</c:v>
+                </c:pt>
+                <c:pt idx="4">
+                  <c:v>2020-09</c:v>
+                </c:pt>
+                <c:pt idx="5">
+                  <c:v>2021-03</c:v>
+                </c:pt>
+                <c:pt idx="6">
+                  <c:v>2021-04</c:v>
+                </c:pt>
+                <c:pt idx="7">
+                  <c:v>2021-05</c:v>
+                </c:pt>
+                <c:pt idx="8">
+                  <c:v>2021-06</c:v>
+                </c:pt>
+                <c:pt idx="9">
+                  <c:v>2021-08</c:v>
+                </c:pt>
+                <c:pt idx="10">
+                  <c:v>2022-09</c:v>
+                </c:pt>
+                <c:pt idx="11">
+                  <c:v>2022-10</c:v>
+                </c:pt>
+                <c:pt idx="12">
+                  <c:v>2022-11</c:v>
+                </c:pt>
+                <c:pt idx="13">
+                  <c:v>2022-12</c:v>
+                </c:pt>
+                <c:pt idx="14">
+                  <c:v>2023-06</c:v>
+                </c:pt>
+                <c:pt idx="15">
+                  <c:v>2023-07</c:v>
+                </c:pt>
+                <c:pt idx="16">
+                  <c:v>2023-08</c:v>
+                </c:pt>
+                <c:pt idx="17">
+                  <c:v>2023-11</c:v>
+                </c:pt>
+                <c:pt idx="18">
+                  <c:v>2023-12</c:v>
+                </c:pt>
+                <c:pt idx="19">
+                  <c:v>2024-01</c:v>
+                </c:pt>
+                <c:pt idx="20">
+                  <c:v>2024-02</c:v>
+                </c:pt>
+                <c:pt idx="21">
+                  <c:v>2024-03</c:v>
+                </c:pt>
+                <c:pt idx="22">
+                  <c:v>2024-04</c:v>
+                </c:pt>
+                <c:pt idx="23">
+                  <c:v>2024-05</c:v>
+                </c:pt>
+                <c:pt idx="24">
+                  <c:v>2025-01</c:v>
+                </c:pt>
+                <c:pt idx="25">
+                  <c:v>2025-02</c:v>
+                </c:pt>
+                <c:pt idx="26">
+                  <c:v>2025-03</c:v>
+                </c:pt>
+                <c:pt idx="27">
+                  <c:v>2025-04</c:v>
+                </c:pt>
+                <c:pt idx="28">
+                  <c:v>2025-05</c:v>
+                </c:pt>
+              </c:strCache>
+            </c:strRef>
+          </c:cat>
+          <c:val>
+            <c:numRef>
+              <c:f>Sheet1!$B$2:$B$30</c:f>
+              <c:numCache>
+                <c:formatCode>General</c:formatCode>
+                <c:ptCount val="29"/>
+                <c:pt idx="0">
+                  <c:v>0.0</c:v>
+                </c:pt>
+                <c:pt idx="1">
+                  <c:v>0.0</c:v>
+                </c:pt>
+                <c:pt idx="2">
+                  <c:v>0.0</c:v>
+                </c:pt>
+                <c:pt idx="3">
+                  <c:v>0.0</c:v>
+                </c:pt>
+                <c:pt idx="4">
+                  <c:v>0.0</c:v>
+                </c:pt>
+                <c:pt idx="5">
+                  <c:v>416000.0</c:v>
+                </c:pt>
+                <c:pt idx="6">
+                  <c:v>358000.0</c:v>
+                </c:pt>
+                <c:pt idx="7">
+                  <c:v>315000.0</c:v>
+                </c:pt>
+                <c:pt idx="8">
+                  <c:v>847000.0</c:v>
+                </c:pt>
+                <c:pt idx="9">
+                  <c:v>1246000.0</c:v>
+                </c:pt>
+                <c:pt idx="10">
+                  <c:v>2932000.0</c:v>
+                </c:pt>
+                <c:pt idx="11">
+                  <c:v>3160000.0</c:v>
+                </c:pt>
+                <c:pt idx="12">
+                  <c:v>5179000.0</c:v>
+                </c:pt>
+                <c:pt idx="13">
+                  <c:v>4075000.0</c:v>
+                </c:pt>
+                <c:pt idx="14">
+                  <c:v>2200000.0</c:v>
+                </c:pt>
+                <c:pt idx="15">
+                  <c:v>-1005000.0</c:v>
+                </c:pt>
+                <c:pt idx="16">
+                  <c:v>-150000.0</c:v>
+                </c:pt>
+                <c:pt idx="17">
+                  <c:v>-175000.0</c:v>
+                </c:pt>
+                <c:pt idx="18">
+                  <c:v>1260000.0</c:v>
+                </c:pt>
+                <c:pt idx="19">
+                  <c:v>-610000.0</c:v>
+                </c:pt>
+                <c:pt idx="20">
+                  <c:v>-120000.0</c:v>
+                </c:pt>
+                <c:pt idx="21">
+                  <c:v>-420000.0</c:v>
+                </c:pt>
+                <c:pt idx="22">
+                  <c:v>1424000.0</c:v>
+                </c:pt>
+                <c:pt idx="23">
+                  <c:v>-320000.0</c:v>
+                </c:pt>
+                <c:pt idx="24">
+                  <c:v>465250.0</c:v>
+                </c:pt>
+                <c:pt idx="25">
+                  <c:v>447600.0</c:v>
+                </c:pt>
+                <c:pt idx="26">
+                  <c:v>876150.0</c:v>
+                </c:pt>
+                <c:pt idx="27">
+                  <c:v>466800.0</c:v>
+                </c:pt>
+                <c:pt idx="28">
+                  <c:v>848000.0</c:v>
+                </c:pt>
+              </c:numCache>
+            </c:numRef>
+          </c:val>
+          <c:smooth val="0"/>
+        </c:ser>
+        <c:marker val="1"/>
+        <c:smooth val="0"/>
+        <c:axId val="2118791784"/>
+        <c:axId val="2140495176"/>
+      </c:lineChart>
+      <c:catAx>
+        <c:axId val="2118791784"/>
+        <c:scaling>
+          <c:orientation val="minMax"/>
+        </c:scaling>
+        <c:delete val="0"/>
+        <c:axPos val="b"/>
+        <c:majorTickMark val="out"/>
+        <c:minorTickMark val="none"/>
+        <c:tickLblPos val="nextTo"/>
+        <c:crossAx val="2140495176"/>
+        <c:crosses val="autoZero"/>
+        <c:auto val="1"/>
+        <c:lblAlgn val="ctr"/>
+        <c:lblOffset val="100"/>
+        <c:noMultiLvlLbl val="0"/>
+      </c:catAx>
+      <c:valAx>
+        <c:axId val="2140495176"/>
+        <c:scaling/>
+        <c:delete val="0"/>
+        <c:axPos val="l"/>
+        <c:majorGridlines/>
+        <c:majorTickMark val="out"/>
+        <c:minorTickMark val="none"/>
+        <c:tickLblPos val="nextTo"/>
+        <c:crossAx val="2118791784"/>
+        <c:crosses val="autoZero"/>
+      </c:valAx>
+    </c:plotArea>
+    <c:legend>
+      <c:legendPos val="r"/>
+      <c:layout/>
+      <c:overlay val="0"/>
+    </c:legend>
+    <c:plotVisOnly val="1"/>
+    <c:dispBlanksAs val="gap"/>
+    <c:showDLblsOverMax val="0"/>
+  </c:chart>
+  <c:txPr>
+    <a:bodyPr/>
+    <a:lstStyle/>
+    <a:p>
+      <a:pPr>
+        <a:defRPr sz="1800"/>
+      </a:pPr>
+      <a:endParaRPr lang="en-US"/>
+    </a:p>
+  </c:txPr>
+  <c:externalData r:id="rId1">
+    <c:autoUpdate val="0"/>
+  </c:externalData>
+</c:chartSpace>
+</file>
+
+<file path=ppt/charts/chart19.xml><?xml version="1.0" encoding="utf-8"?>
+<c:chartSpace xmlns:c="http://schemas.openxmlformats.org/drawingml/2006/chart" xmlns:a="http://schemas.openxmlformats.org/drawingml/2006/main" xmlns:r="http://schemas.openxmlformats.org/officeDocument/2006/relationships">
+  <c:date1904 val="0"/>
+  <c:chart>
+    <c:autoTitleDeleted val="0"/>
+    <c:plotArea>
+      <c:barChart>
+        <c:barDir val="col"/>
+        <c:grouping val="stacked"/>
+        <c:ser>
+          <c:idx val="0"/>
+          <c:order val="0"/>
+          <c:tx>
+            <c:strRef>
+              <c:f>Sheet1!$B$1</c:f>
+              <c:strCache>
+                <c:ptCount val="1"/>
+                <c:pt idx="0">
+                  <c:v>0-30 Days</c:v>
+                </c:pt>
+              </c:strCache>
+            </c:strRef>
+          </c:tx>
+          <c:spPr>
+            <a:solidFill>
+              <a:srgbClr val="5B9BD5"/>
+            </a:solidFill>
+          </c:spPr>
+          <c:cat>
+            <c:strRef>
+              <c:f>Sheet1!$A$2:$A$4</c:f>
+              <c:strCache>
+                <c:ptCount val="3"/>
+                <c:pt idx="0">
+                  <c:v>Airtel</c:v>
+                </c:pt>
+                <c:pt idx="1">
+                  <c:v>Dialog</c:v>
+                </c:pt>
+                <c:pt idx="2">
+                  <c:v>Mobitel</c:v>
+                </c:pt>
+              </c:strCache>
+            </c:strRef>
+          </c:cat>
+          <c:val>
+            <c:numRef>
+              <c:f>Sheet1!$B$2:$B$4</c:f>
+              <c:numCache>
+                <c:formatCode>General</c:formatCode>
+                <c:ptCount val="3"/>
+                <c:pt idx="0">
+                  <c:v>0</c:v>
+                </c:pt>
+                <c:pt idx="1">
+                  <c:v>0</c:v>
+                </c:pt>
+                <c:pt idx="2">
+                  <c:v>0</c:v>
+                </c:pt>
+              </c:numCache>
+            </c:numRef>
+          </c:val>
+        </c:ser>
+        <c:ser>
+          <c:idx val="1"/>
+          <c:order val="1"/>
+          <c:tx>
+            <c:strRef>
+              <c:f>Sheet1!$C$1</c:f>
+              <c:strCache>
+                <c:ptCount val="1"/>
+                <c:pt idx="0">
+                  <c:v>31-60 Days</c:v>
+                </c:pt>
+              </c:strCache>
+            </c:strRef>
+          </c:tx>
+          <c:spPr>
+            <a:solidFill>
+              <a:srgbClr val="ED7D31"/>
+            </a:solidFill>
+          </c:spPr>
+          <c:cat>
+            <c:strRef>
+              <c:f>Sheet1!$A$2:$A$4</c:f>
+              <c:strCache>
+                <c:ptCount val="3"/>
+                <c:pt idx="0">
+                  <c:v>Airtel</c:v>
+                </c:pt>
+                <c:pt idx="1">
+                  <c:v>Dialog</c:v>
+                </c:pt>
+                <c:pt idx="2">
+                  <c:v>Mobitel</c:v>
+                </c:pt>
+              </c:strCache>
+            </c:strRef>
+          </c:cat>
+          <c:val>
+            <c:numRef>
+              <c:f>Sheet1!$C$2:$C$4</c:f>
+              <c:numCache>
+                <c:formatCode>General</c:formatCode>
+                <c:ptCount val="3"/>
+                <c:pt idx="0">
+                  <c:v>0</c:v>
+                </c:pt>
+                <c:pt idx="1">
+                  <c:v>0</c:v>
+                </c:pt>
+                <c:pt idx="2">
+                  <c:v>0</c:v>
+                </c:pt>
+              </c:numCache>
+            </c:numRef>
+          </c:val>
+        </c:ser>
+        <c:ser>
+          <c:idx val="2"/>
+          <c:order val="2"/>
+          <c:tx>
+            <c:strRef>
+              <c:f>Sheet1!$D$1</c:f>
+              <c:strCache>
+                <c:ptCount val="1"/>
+                <c:pt idx="0">
+                  <c:v>61-90 Days</c:v>
+                </c:pt>
+              </c:strCache>
+            </c:strRef>
+          </c:tx>
+          <c:spPr>
+            <a:solidFill>
+              <a:srgbClr val="A5A5A5"/>
+            </a:solidFill>
+          </c:spPr>
+          <c:cat>
+            <c:strRef>
+              <c:f>Sheet1!$A$2:$A$4</c:f>
+              <c:strCache>
+                <c:ptCount val="3"/>
+                <c:pt idx="0">
+                  <c:v>Airtel</c:v>
+                </c:pt>
+                <c:pt idx="1">
+                  <c:v>Dialog</c:v>
+                </c:pt>
+                <c:pt idx="2">
+                  <c:v>Mobitel</c:v>
+                </c:pt>
+              </c:strCache>
+            </c:strRef>
+          </c:cat>
+          <c:val>
+            <c:numRef>
+              <c:f>Sheet1!$D$2:$D$4</c:f>
+              <c:numCache>
+                <c:formatCode>General</c:formatCode>
+                <c:ptCount val="3"/>
+                <c:pt idx="0">
+                  <c:v>0</c:v>
+                </c:pt>
+                <c:pt idx="1">
+                  <c:v>0</c:v>
+                </c:pt>
+                <c:pt idx="2">
+                  <c:v>0</c:v>
+                </c:pt>
+              </c:numCache>
+            </c:numRef>
+          </c:val>
+        </c:ser>
+        <c:ser>
+          <c:idx val="3"/>
+          <c:order val="3"/>
+          <c:tx>
+            <c:strRef>
+              <c:f>Sheet1!$E$1</c:f>
+              <c:strCache>
+                <c:ptCount val="1"/>
+                <c:pt idx="0">
+                  <c:v>90+ Days</c:v>
+                </c:pt>
+              </c:strCache>
+            </c:strRef>
+          </c:tx>
+          <c:spPr>
+            <a:solidFill>
+              <a:srgbClr val="FFC000"/>
+            </a:solidFill>
+          </c:spPr>
+          <c:cat>
+            <c:strRef>
+              <c:f>Sheet1!$A$2:$A$4</c:f>
+              <c:strCache>
+                <c:ptCount val="3"/>
+                <c:pt idx="0">
+                  <c:v>Airtel</c:v>
+                </c:pt>
+                <c:pt idx="1">
+                  <c:v>Dialog</c:v>
+                </c:pt>
+                <c:pt idx="2">
+                  <c:v>Mobitel</c:v>
+                </c:pt>
+              </c:strCache>
+            </c:strRef>
+          </c:cat>
+          <c:val>
+            <c:numRef>
+              <c:f>Sheet1!$E$2:$E$4</c:f>
+              <c:numCache>
+                <c:formatCode>General</c:formatCode>
+                <c:ptCount val="3"/>
+                <c:pt idx="0">
+                  <c:v>-2000</c:v>
+                </c:pt>
+                <c:pt idx="1">
+                  <c:v>7000</c:v>
+                </c:pt>
+                <c:pt idx="2">
+                  <c:v>10000</c:v>
+                </c:pt>
+              </c:numCache>
+            </c:numRef>
+          </c:val>
+        </c:ser>
+        <c:overlap val="100"/>
+        <c:axId val="-2068027336"/>
+        <c:axId val="-2113994440"/>
+      </c:barChart>
+      <c:catAx>
+        <c:axId val="-2068027336"/>
+        <c:scaling>
+          <c:orientation val="minMax"/>
+        </c:scaling>
+        <c:delete val="0"/>
+        <c:axPos val="b"/>
+        <c:majorTickMark val="out"/>
+        <c:minorTickMark val="none"/>
+        <c:tickLblPos val="nextTo"/>
+        <c:crossAx val="-2113994440"/>
+        <c:crosses val="autoZero"/>
+        <c:auto val="1"/>
+        <c:lblAlgn val="ctr"/>
+        <c:lblOffset val="100"/>
+        <c:noMultiLvlLbl val="0"/>
+      </c:catAx>
+      <c:valAx>
+        <c:axId val="-2113994440"/>
+        <c:scaling/>
+        <c:delete val="0"/>
+        <c:axPos val="l"/>
+        <c:majorGridlines/>
+        <c:majorTickMark val="out"/>
+        <c:minorTickMark val="none"/>
+        <c:tickLblPos val="nextTo"/>
+        <c:crossAx val="-2068027336"/>
+        <c:crosses val="autoZero"/>
+      </c:valAx>
+    </c:plotArea>
+    <c:dispBlanksAs val="gap"/>
+  </c:chart>
+  <c:txPr>
+    <a:bodyPr/>
+    <a:lstStyle/>
+    <a:p>
+      <a:pPr>
+        <a:defRPr sz="1800"/>
+      </a:pPr>
+      <a:endParaRPr lang="en-US"/>
+    </a:p>
+  </c:txPr>
+  <c:externalData r:id="rId1">
+    <c:autoUpdate val="0"/>
+  </c:externalData>
+</c:chartSpace>
+</file>
+
+<file path=ppt/charts/chart2.xml><?xml version="1.0" encoding="utf-8"?>
+<c:chartSpace xmlns:c="http://schemas.openxmlformats.org/drawingml/2006/chart" xmlns:a="http://schemas.openxmlformats.org/drawingml/2006/main" xmlns:r="http://schemas.openxmlformats.org/officeDocument/2006/relationships">
+  <c:date1904 val="0"/>
+  <c:chart>
+    <c:autoTitleDeleted val="0"/>
+    <c:plotArea>
+      <c:barChart>
+        <c:barDir val="col"/>
+        <c:grouping val="clustered"/>
+        <c:ser>
+          <c:idx val="0"/>
+          <c:order val="0"/>
+          <c:tx>
+            <c:strRef>
+              <c:f>Sheet1!$B$1</c:f>
+              <c:strCache>
+                <c:ptCount val="1"/>
+                <c:pt idx="0">
+                  <c:v>YOY Growth %</c:v>
+                </c:pt>
+              </c:strCache>
+            </c:strRef>
+          </c:tx>
+          <c:cat>
+            <c:strRef>
+              <c:f>Sheet1!$A$2:$A$5</c:f>
+              <c:strCache>
+                <c:ptCount val="4"/>
+                <c:pt idx="0">
+                  <c:v>Q1</c:v>
+                </c:pt>
+                <c:pt idx="1">
+                  <c:v>Q2</c:v>
+                </c:pt>
+                <c:pt idx="2">
+                  <c:v>Q1</c:v>
+                </c:pt>
+                <c:pt idx="3">
+                  <c:v>Q2</c:v>
+                </c:pt>
+              </c:strCache>
+            </c:strRef>
+          </c:cat>
+          <c:val>
+            <c:numRef>
+              <c:f>Sheet1!$B$2:$B$5</c:f>
+              <c:numCache>
+                <c:formatCode>General</c:formatCode>
+                <c:ptCount val="4"/>
+                <c:pt idx="0">
+                  <c:v>0.0</c:v>
+                </c:pt>
+                <c:pt idx="1">
+                  <c:v>0.0</c:v>
+                </c:pt>
+                <c:pt idx="2">
+                  <c:v>30.0</c:v>
+                </c:pt>
+                <c:pt idx="3">
+                  <c:v>27.27</c:v>
+                </c:pt>
+              </c:numCache>
+            </c:numRef>
+          </c:val>
+        </c:ser>
+        <c:axId val="-2068027336"/>
+        <c:axId val="-2113994440"/>
+      </c:barChart>
+      <c:catAx>
+        <c:axId val="-2068027336"/>
+        <c:scaling>
+          <c:orientation val="minMax"/>
+        </c:scaling>
+        <c:delete val="0"/>
+        <c:axPos val="b"/>
+        <c:majorTickMark val="out"/>
+        <c:minorTickMark val="none"/>
+        <c:tickLblPos val="nextTo"/>
+        <c:crossAx val="-2113994440"/>
+        <c:crosses val="autoZero"/>
+        <c:auto val="1"/>
+        <c:lblAlgn val="ctr"/>
+        <c:lblOffset val="100"/>
+        <c:noMultiLvlLbl val="0"/>
+      </c:catAx>
+      <c:valAx>
+        <c:axId val="-2113994440"/>
+        <c:scaling/>
+        <c:delete val="0"/>
+        <c:axPos val="l"/>
+        <c:majorGridlines/>
+        <c:majorTickMark val="out"/>
+        <c:minorTickMark val="none"/>
+        <c:tickLblPos val="nextTo"/>
+        <c:crossAx val="-2068027336"/>
+        <c:crosses val="autoZero"/>
+      </c:valAx>
+    </c:plotArea>
+    <c:dispBlanksAs val="gap"/>
+  </c:chart>
+  <c:txPr>
+    <a:bodyPr/>
+    <a:lstStyle/>
+    <a:p>
+      <a:pPr>
+        <a:defRPr sz="1800"/>
+      </a:pPr>
+      <a:endParaRPr lang="en-US"/>
+    </a:p>
+  </c:txPr>
+  <c:externalData r:id="rId1">
+    <c:autoUpdate val="0"/>
+  </c:externalData>
+</c:chartSpace>
+</file>
+
+<file path=ppt/charts/chart20.xml><?xml version="1.0" encoding="utf-8"?>
+<c:chartSpace xmlns:c="http://schemas.openxmlformats.org/drawingml/2006/chart" xmlns:a="http://schemas.openxmlformats.org/drawingml/2006/main" xmlns:r="http://schemas.openxmlformats.org/officeDocument/2006/relationships">
+  <c:date1904 val="0"/>
+  <c:chart>
+    <c:autoTitleDeleted val="0"/>
+    <c:plotArea>
+      <c:barChart>
+        <c:barDir val="col"/>
+        <c:grouping val="clustered"/>
+        <c:ser>
+          <c:idx val="0"/>
+          <c:order val="0"/>
+          <c:tx>
+            <c:strRef>
+              <c:f>Sheet1!$B$1</c:f>
+              <c:strCache>
+                <c:ptCount val="1"/>
+                <c:pt idx="0">
+                  <c:v>Total Capitalized Value</c:v>
+                </c:pt>
+              </c:strCache>
+            </c:strRef>
+          </c:tx>
+          <c:dPt>
+            <c:idx val="0"/>
+            <c:spPr>
+              <a:solidFill>
+                <a:srgbClr val="5B9BD5"/>
+              </a:solidFill>
+            </c:spPr>
+          </c:dPt>
+          <c:dPt>
+            <c:idx val="1"/>
+            <c:spPr>
+              <a:solidFill>
+                <a:srgbClr val="ED7D31"/>
+              </a:solidFill>
+            </c:spPr>
+          </c:dPt>
+          <c:dPt>
+            <c:idx val="2"/>
+            <c:spPr>
+              <a:solidFill>
+                <a:srgbClr val="A5A5A5"/>
+              </a:solidFill>
+            </c:spPr>
+          </c:dPt>
+          <c:cat>
+            <c:strRef>
+              <c:f>Sheet1!$A$2:$A$4</c:f>
+              <c:strCache>
+                <c:ptCount val="3"/>
+                <c:pt idx="0">
+                  <c:v>Laptop</c:v>
+                </c:pt>
+                <c:pt idx="1">
+                  <c:v>Router</c:v>
+                </c:pt>
+                <c:pt idx="2">
+                  <c:v>Printer</c:v>
+                </c:pt>
+              </c:strCache>
+            </c:strRef>
+          </c:cat>
+          <c:val>
+            <c:numRef>
+              <c:f>Sheet1!$B$2:$B$4</c:f>
+              <c:numCache>
+                <c:formatCode>General</c:formatCode>
+                <c:ptCount val="3"/>
+                <c:pt idx="0">
+                  <c:v>750000.0</c:v>
+                </c:pt>
+                <c:pt idx="1">
+                  <c:v>150000.0</c:v>
+                </c:pt>
+                <c:pt idx="2">
+                  <c:v>160000.0</c:v>
+                </c:pt>
+              </c:numCache>
+            </c:numRef>
+          </c:val>
+        </c:ser>
+        <c:axId val="-2068027336"/>
+        <c:axId val="-2113994440"/>
+      </c:barChart>
+      <c:catAx>
+        <c:axId val="-2068027336"/>
+        <c:scaling>
+          <c:orientation val="minMax"/>
+        </c:scaling>
+        <c:delete val="0"/>
+        <c:axPos val="b"/>
+        <c:majorTickMark val="out"/>
+        <c:minorTickMark val="none"/>
+        <c:tickLblPos val="nextTo"/>
+        <c:crossAx val="-2113994440"/>
+        <c:crosses val="autoZero"/>
+        <c:auto val="1"/>
+        <c:lblAlgn val="ctr"/>
+        <c:lblOffset val="100"/>
+        <c:noMultiLvlLbl val="0"/>
+      </c:catAx>
+      <c:valAx>
+        <c:axId val="-2113994440"/>
+        <c:scaling/>
+        <c:delete val="0"/>
+        <c:axPos val="l"/>
+        <c:majorGridlines/>
+        <c:majorTickMark val="out"/>
+        <c:minorTickMark val="none"/>
+        <c:tickLblPos val="nextTo"/>
+        <c:crossAx val="-2068027336"/>
+        <c:crosses val="autoZero"/>
+      </c:valAx>
+    </c:plotArea>
+    <c:dispBlanksAs val="gap"/>
+  </c:chart>
+  <c:txPr>
+    <a:bodyPr/>
+    <a:lstStyle/>
+    <a:p>
+      <a:pPr>
+        <a:defRPr sz="1800"/>
+      </a:pPr>
+      <a:endParaRPr lang="en-US"/>
+    </a:p>
+  </c:txPr>
+  <c:externalData r:id="rId1">
+    <c:autoUpdate val="0"/>
+  </c:externalData>
+</c:chartSpace>
+</file>
+
+<file path=ppt/charts/chart21.xml><?xml version="1.0" encoding="utf-8"?>
+<c:chartSpace xmlns:c="http://schemas.openxmlformats.org/drawingml/2006/chart" xmlns:a="http://schemas.openxmlformats.org/drawingml/2006/main" xmlns:r="http://schemas.openxmlformats.org/officeDocument/2006/relationships">
+  <c:date1904 val="0"/>
+  <c:chart>
+    <c:autoTitleDeleted val="0"/>
+    <c:plotArea>
+      <c:barChart>
+        <c:barDir val="col"/>
+        <c:grouping val="clustered"/>
+        <c:ser>
+          <c:idx val="0"/>
+          <c:order val="0"/>
+          <c:tx>
+            <c:strRef>
+              <c:f>Sheet1!$B$1</c:f>
+              <c:strCache>
+                <c:ptCount val="1"/>
+                <c:pt idx="0">
+                  <c:v>Quantity</c:v>
+                </c:pt>
+              </c:strCache>
+            </c:strRef>
+          </c:tx>
+          <c:dPt>
+            <c:idx val="0"/>
+            <c:spPr>
+              <a:solidFill>
+                <a:srgbClr val="5B9BD5"/>
+              </a:solidFill>
+            </c:spPr>
+          </c:dPt>
+          <c:dPt>
+            <c:idx val="1"/>
+            <c:spPr>
+              <a:solidFill>
+                <a:srgbClr val="ED7D31"/>
+              </a:solidFill>
+            </c:spPr>
+          </c:dPt>
+          <c:dPt>
+            <c:idx val="2"/>
+            <c:spPr>
+              <a:solidFill>
+                <a:srgbClr val="A5A5A5"/>
+              </a:solidFill>
+            </c:spPr>
+          </c:dPt>
+          <c:cat>
+            <c:strRef>
+              <c:f>Sheet1!$A$2:$A$4</c:f>
+              <c:strCache>
+                <c:ptCount val="3"/>
+                <c:pt idx="0">
+                  <c:v>Laptop</c:v>
+                </c:pt>
+                <c:pt idx="1">
+                  <c:v>Router</c:v>
+                </c:pt>
+                <c:pt idx="2">
+                  <c:v>Printer</c:v>
+                </c:pt>
+              </c:strCache>
+            </c:strRef>
+          </c:cat>
+          <c:val>
+            <c:numRef>
+              <c:f>Sheet1!$B$2:$B$4</c:f>
+              <c:numCache>
+                <c:formatCode>General</c:formatCode>
+                <c:ptCount val="3"/>
+                <c:pt idx="0">
+                  <c:v>5</c:v>
+                </c:pt>
+                <c:pt idx="1">
+                  <c:v>3</c:v>
+                </c:pt>
+                <c:pt idx="2">
+                  <c:v>2</c:v>
+                </c:pt>
+              </c:numCache>
+            </c:numRef>
+          </c:val>
+        </c:ser>
+        <c:axId val="-2068027336"/>
+        <c:axId val="-2113994440"/>
+      </c:barChart>
+      <c:catAx>
+        <c:axId val="-2068027336"/>
+        <c:scaling>
+          <c:orientation val="minMax"/>
+        </c:scaling>
+        <c:delete val="0"/>
+        <c:axPos val="b"/>
+        <c:majorTickMark val="out"/>
+        <c:minorTickMark val="none"/>
+        <c:tickLblPos val="nextTo"/>
+        <c:crossAx val="-2113994440"/>
+        <c:crosses val="autoZero"/>
+        <c:auto val="1"/>
+        <c:lblAlgn val="ctr"/>
+        <c:lblOffset val="100"/>
+        <c:noMultiLvlLbl val="0"/>
+      </c:catAx>
+      <c:valAx>
+        <c:axId val="-2113994440"/>
+        <c:scaling/>
+        <c:delete val="0"/>
+        <c:axPos val="l"/>
+        <c:majorGridlines/>
+        <c:majorTickMark val="out"/>
+        <c:minorTickMark val="none"/>
+        <c:tickLblPos val="nextTo"/>
+        <c:crossAx val="-2068027336"/>
+        <c:crosses val="autoZero"/>
+      </c:valAx>
+    </c:plotArea>
+    <c:dispBlanksAs val="gap"/>
+  </c:chart>
+  <c:txPr>
+    <a:bodyPr/>
+    <a:lstStyle/>
+    <a:p>
+      <a:pPr>
+        <a:defRPr sz="1800"/>
+      </a:pPr>
+      <a:endParaRPr lang="en-US"/>
+    </a:p>
+  </c:txPr>
+  <c:externalData r:id="rId1">
+    <c:autoUpdate val="0"/>
+  </c:externalData>
+</c:chartSpace>
+</file>
+
+<file path=ppt/charts/chart22.xml><?xml version="1.0" encoding="utf-8"?>
+<c:chartSpace xmlns:c="http://schemas.openxmlformats.org/drawingml/2006/chart" xmlns:a="http://schemas.openxmlformats.org/drawingml/2006/main" xmlns:r="http://schemas.openxmlformats.org/officeDocument/2006/relationships">
+  <c:date1904 val="0"/>
+  <c:chart>
+    <c:autoTitleDeleted val="0"/>
+    <c:plotArea>
+      <c:barChart>
+        <c:barDir val="col"/>
+        <c:grouping val="clustered"/>
+        <c:ser>
+          <c:idx val="0"/>
+          <c:order val="0"/>
+          <c:tx>
+            <c:strRef>
+              <c:f>Sheet1!$B$1</c:f>
+              <c:strCache>
+                <c:ptCount val="1"/>
+                <c:pt idx="0">
+                  <c:v>Annual Depreciation</c:v>
+                </c:pt>
+              </c:strCache>
+            </c:strRef>
+          </c:tx>
+          <c:dPt>
+            <c:idx val="0"/>
+            <c:spPr>
+              <a:solidFill>
+                <a:srgbClr val="5B9BD5"/>
+              </a:solidFill>
+            </c:spPr>
+          </c:dPt>
+          <c:dPt>
+            <c:idx val="1"/>
+            <c:spPr>
+              <a:solidFill>
+                <a:srgbClr val="5B9BD5"/>
+              </a:solidFill>
+            </c:spPr>
+          </c:dPt>
+          <c:dPt>
+            <c:idx val="2"/>
+            <c:spPr>
+              <a:solidFill>
+                <a:srgbClr val="5B9BD5"/>
+              </a:solidFill>
+            </c:spPr>
+          </c:dPt>
+          <c:dPt>
+            <c:idx val="3"/>
+            <c:spPr>
+              <a:solidFill>
+                <a:srgbClr val="5B9BD5"/>
+              </a:solidFill>
+            </c:spPr>
+          </c:dPt>
+          <c:dPt>
+            <c:idx val="4"/>
+            <c:spPr>
+              <a:solidFill>
+                <a:srgbClr val="5B9BD5"/>
+              </a:solidFill>
+            </c:spPr>
+          </c:dPt>
+          <c:dPt>
+            <c:idx val="5"/>
+            <c:spPr>
+              <a:solidFill>
+                <a:srgbClr val="5B9BD5"/>
+              </a:solidFill>
+            </c:spPr>
+          </c:dPt>
+          <c:dPt>
+            <c:idx val="6"/>
+            <c:spPr>
+              <a:solidFill>
+                <a:srgbClr val="5B9BD5"/>
+              </a:solidFill>
+            </c:spPr>
+          </c:dPt>
+          <c:dPt>
+            <c:idx val="7"/>
+            <c:spPr>
+              <a:solidFill>
+                <a:srgbClr val="5B9BD5"/>
+              </a:solidFill>
+            </c:spPr>
+          </c:dPt>
+          <c:dPt>
+            <c:idx val="8"/>
+            <c:spPr>
+              <a:solidFill>
+                <a:srgbClr val="5B9BD5"/>
+              </a:solidFill>
+            </c:spPr>
+          </c:dPt>
+          <c:dPt>
+            <c:idx val="9"/>
+            <c:spPr>
+              <a:solidFill>
+                <a:srgbClr val="5B9BD5"/>
+              </a:solidFill>
+            </c:spPr>
+          </c:dPt>
+          <c:cat>
+            <c:strRef>
+              <c:f>Sheet1!$A$2:$A$11</c:f>
+              <c:strCache>
+                <c:ptCount val="10"/>
+                <c:pt idx="0">
+                  <c:v>Laptop-1</c:v>
+                </c:pt>
+                <c:pt idx="1">
+                  <c:v>Laptop-2</c:v>
+                </c:pt>
+                <c:pt idx="2">
+                  <c:v>Laptop-3</c:v>
+                </c:pt>
+                <c:pt idx="3">
+                  <c:v>Laptop-4</c:v>
+                </c:pt>
+                <c:pt idx="4">
+                  <c:v>Laptop-5</c:v>
+                </c:pt>
+                <c:pt idx="5">
+                  <c:v>Router-1</c:v>
+                </c:pt>
+                <c:pt idx="6">
+                  <c:v>Router-2</c:v>
+                </c:pt>
+                <c:pt idx="7">
+                  <c:v>Router-3</c:v>
+                </c:pt>
+                <c:pt idx="8">
+                  <c:v>Printer-1</c:v>
+                </c:pt>
+                <c:pt idx="9">
+                  <c:v>Printer-2</c:v>
+                </c:pt>
+              </c:strCache>
+            </c:strRef>
+          </c:cat>
+          <c:val>
+            <c:numRef>
+              <c:f>Sheet1!$B$2:$B$11</c:f>
+              <c:numCache>
+                <c:formatCode>General</c:formatCode>
+                <c:ptCount val="10"/>
+                <c:pt idx="0">
+                  <c:v>50000.0</c:v>
+                </c:pt>
+                <c:pt idx="1">
+                  <c:v>50000.0</c:v>
+                </c:pt>
+                <c:pt idx="2">
+                  <c:v>50000.0</c:v>
+                </c:pt>
+                <c:pt idx="3">
+                  <c:v>50000.0</c:v>
+                </c:pt>
+                <c:pt idx="4">
+                  <c:v>50000.0</c:v>
+                </c:pt>
+                <c:pt idx="5">
+                  <c:v>10000.0</c:v>
+                </c:pt>
+                <c:pt idx="6">
+                  <c:v>10000.0</c:v>
+                </c:pt>
+                <c:pt idx="7">
+                  <c:v>10000.0</c:v>
+                </c:pt>
+                <c:pt idx="8">
+                  <c:v>20000.0</c:v>
+                </c:pt>
+                <c:pt idx="9">
+                  <c:v>20000.0</c:v>
+                </c:pt>
+              </c:numCache>
+            </c:numRef>
+          </c:val>
+        </c:ser>
+        <c:axId val="-2068027336"/>
+        <c:axId val="-2113994440"/>
+      </c:barChart>
+      <c:catAx>
+        <c:axId val="-2068027336"/>
+        <c:scaling>
+          <c:orientation val="minMax"/>
+        </c:scaling>
+        <c:delete val="0"/>
+        <c:axPos val="b"/>
+        <c:majorTickMark val="out"/>
+        <c:minorTickMark val="none"/>
+        <c:tickLblPos val="nextTo"/>
+        <c:crossAx val="-2113994440"/>
+        <c:crosses val="autoZero"/>
+        <c:auto val="1"/>
+        <c:lblAlgn val="ctr"/>
+        <c:lblOffset val="100"/>
+        <c:noMultiLvlLbl val="0"/>
+      </c:catAx>
+      <c:valAx>
+        <c:axId val="-2113994440"/>
+        <c:scaling/>
+        <c:delete val="0"/>
+        <c:axPos val="l"/>
+        <c:majorGridlines/>
+        <c:majorTickMark val="out"/>
+        <c:minorTickMark val="none"/>
+        <c:tickLblPos val="nextTo"/>
+        <c:crossAx val="-2068027336"/>
+        <c:crosses val="autoZero"/>
+      </c:valAx>
+    </c:plotArea>
+    <c:dispBlanksAs val="gap"/>
+  </c:chart>
+  <c:txPr>
+    <a:bodyPr/>
+    <a:lstStyle/>
+    <a:p>
+      <a:pPr>
+        <a:defRPr sz="1800"/>
+      </a:pPr>
+      <a:endParaRPr lang="en-US"/>
+    </a:p>
+  </c:txPr>
+  <c:externalData r:id="rId1">
+    <c:autoUpdate val="0"/>
+  </c:externalData>
+</c:chartSpace>
+</file>
+
+<file path=ppt/charts/chart23.xml><?xml version="1.0" encoding="utf-8"?>
+<c:chartSpace xmlns:c="http://schemas.openxmlformats.org/drawingml/2006/chart" xmlns:a="http://schemas.openxmlformats.org/drawingml/2006/main" xmlns:r="http://schemas.openxmlformats.org/officeDocument/2006/relationships">
+  <c:date1904 val="0"/>
+  <c:chart>
+    <c:autoTitleDeleted val="0"/>
+    <c:plotArea>
+      <c:barChart>
+        <c:barDir val="col"/>
+        <c:grouping val="clustered"/>
+        <c:ser>
+          <c:idx val="0"/>
+          <c:order val="0"/>
+          <c:tx>
+            <c:strRef>
+              <c:f>Sheet1!$B$1</c:f>
+              <c:strCache>
+                <c:ptCount val="1"/>
+                <c:pt idx="0">
+                  <c:v>2025 Actual</c:v>
+                </c:pt>
+              </c:strCache>
+            </c:strRef>
+          </c:tx>
+          <c:cat>
+            <c:strRef>
+              <c:f>Sheet1!$A$2:$A$7</c:f>
+              <c:strCache>
+                <c:ptCount val="6"/>
+                <c:pt idx="0">
+                  <c:v>Sales Revenue</c:v>
+                </c:pt>
+                <c:pt idx="1">
+                  <c:v>Salaries</c:v>
+                </c:pt>
+                <c:pt idx="2">
+                  <c:v>Marketing</c:v>
+                </c:pt>
+                <c:pt idx="3">
+                  <c:v>Rent</c:v>
+                </c:pt>
+                <c:pt idx="4">
+                  <c:v>Depreciation</c:v>
+                </c:pt>
+                <c:pt idx="5">
+                  <c:v>Tax</c:v>
+                </c:pt>
+              </c:strCache>
+            </c:strRef>
+          </c:cat>
+          <c:val>
+            <c:numRef>
+              <c:f>Sheet1!$B$2:$B$7</c:f>
+              <c:numCache>
+                <c:formatCode>General</c:formatCode>
+                <c:ptCount val="6"/>
+                <c:pt idx="0">
+                  <c:v>2700000</c:v>
+                </c:pt>
+                <c:pt idx="1">
+                  <c:v>-720000</c:v>
+                </c:pt>
+                <c:pt idx="2">
+                  <c:v>-310000</c:v>
+                </c:pt>
+                <c:pt idx="3">
+                  <c:v>-185000</c:v>
+                </c:pt>
+                <c:pt idx="4">
+                  <c:v>-125000</c:v>
+                </c:pt>
+                <c:pt idx="5">
+                  <c:v>-230000</c:v>
+                </c:pt>
+              </c:numCache>
+            </c:numRef>
+          </c:val>
+        </c:ser>
+        <c:ser>
+          <c:idx val="1"/>
+          <c:order val="1"/>
+          <c:tx>
+            <c:strRef>
+              <c:f>Sheet1!$C$1</c:f>
+              <c:strCache>
+                <c:ptCount val="1"/>
+                <c:pt idx="0">
+                  <c:v>2026 Actual</c:v>
+                </c:pt>
+              </c:strCache>
+            </c:strRef>
+          </c:tx>
+          <c:cat>
+            <c:strRef>
+              <c:f>Sheet1!$A$2:$A$7</c:f>
+              <c:strCache>
+                <c:ptCount val="6"/>
+                <c:pt idx="0">
+                  <c:v>Sales Revenue</c:v>
+                </c:pt>
+                <c:pt idx="1">
+                  <c:v>Salaries</c:v>
+                </c:pt>
+                <c:pt idx="2">
+                  <c:v>Marketing</c:v>
+                </c:pt>
+                <c:pt idx="3">
+                  <c:v>Rent</c:v>
+                </c:pt>
+                <c:pt idx="4">
+                  <c:v>Depreciation</c:v>
+                </c:pt>
+                <c:pt idx="5">
+                  <c:v>Tax</c:v>
+                </c:pt>
+              </c:strCache>
+            </c:strRef>
+          </c:cat>
+          <c:val>
+            <c:numRef>
+              <c:f>Sheet1!$C$2:$C$7</c:f>
+              <c:numCache>
+                <c:formatCode>General</c:formatCode>
+                <c:ptCount val="6"/>
+                <c:pt idx="0">
+                  <c:v>0</c:v>
+                </c:pt>
+                <c:pt idx="1">
+                  <c:v>0</c:v>
+                </c:pt>
+                <c:pt idx="2">
+                  <c:v>0</c:v>
+                </c:pt>
+                <c:pt idx="3">
+                  <c:v>0</c:v>
+                </c:pt>
+                <c:pt idx="4">
+                  <c:v>0</c:v>
+                </c:pt>
+                <c:pt idx="5">
+                  <c:v>0</c:v>
+                </c:pt>
+              </c:numCache>
+            </c:numRef>
+          </c:val>
+        </c:ser>
+        <c:axId val="-2068027336"/>
+        <c:axId val="-2113994440"/>
+      </c:barChart>
+      <c:catAx>
+        <c:axId val="-2068027336"/>
+        <c:scaling>
+          <c:orientation val="minMax"/>
+        </c:scaling>
+        <c:delete val="0"/>
+        <c:axPos val="b"/>
+        <c:majorTickMark val="out"/>
+        <c:minorTickMark val="none"/>
+        <c:tickLblPos val="nextTo"/>
+        <c:crossAx val="-2113994440"/>
+        <c:crosses val="autoZero"/>
+        <c:auto val="1"/>
+        <c:lblAlgn val="ctr"/>
+        <c:lblOffset val="100"/>
+        <c:noMultiLvlLbl val="0"/>
+      </c:catAx>
+      <c:valAx>
+        <c:axId val="-2113994440"/>
+        <c:scaling/>
+        <c:delete val="0"/>
+        <c:axPos val="l"/>
+        <c:majorGridlines/>
+        <c:majorTickMark val="out"/>
+        <c:minorTickMark val="none"/>
+        <c:tickLblPos val="nextTo"/>
+        <c:crossAx val="-2068027336"/>
+        <c:crosses val="autoZero"/>
+      </c:valAx>
+    </c:plotArea>
+    <c:dispBlanksAs val="gap"/>
+  </c:chart>
+  <c:txPr>
+    <a:bodyPr/>
+    <a:lstStyle/>
+    <a:p>
+      <a:pPr>
+        <a:defRPr sz="1800"/>
+      </a:pPr>
+      <a:endParaRPr lang="en-US"/>
+    </a:p>
+  </c:txPr>
+  <c:externalData r:id="rId1">
+    <c:autoUpdate val="0"/>
+  </c:externalData>
+</c:chartSpace>
+</file>
+
+<file path=ppt/charts/chart24.xml><?xml version="1.0" encoding="utf-8"?>
+<c:chartSpace xmlns:c="http://schemas.openxmlformats.org/drawingml/2006/chart" xmlns:a="http://schemas.openxmlformats.org/drawingml/2006/main" xmlns:r="http://schemas.openxmlformats.org/officeDocument/2006/relationships">
+  <c:date1904 val="0"/>
+  <c:chart>
+    <c:autoTitleDeleted val="0"/>
+    <c:plotArea>
+      <c:barChart>
+        <c:barDir val="col"/>
+        <c:grouping val="clustered"/>
+        <c:ser>
+          <c:idx val="0"/>
+          <c:order val="0"/>
+          <c:tx>
+            <c:strRef>
+              <c:f>Sheet1!$B$1</c:f>
+              <c:strCache>
+                <c:ptCount val="1"/>
+                <c:pt idx="0">
+                  <c:v>Growth Rate</c:v>
+                </c:pt>
+              </c:strCache>
+            </c:strRef>
+          </c:tx>
+          <c:cat>
+            <c:strRef>
+              <c:f>Sheet1!$A$2:$A$7</c:f>
+              <c:strCache>
+                <c:ptCount val="6"/>
+                <c:pt idx="0">
+                  <c:v>Sales Revenue</c:v>
+                </c:pt>
+                <c:pt idx="1">
+                  <c:v>Salaries</c:v>
+                </c:pt>
+                <c:pt idx="2">
+                  <c:v>Marketing</c:v>
+                </c:pt>
+                <c:pt idx="3">
+                  <c:v>Rent</c:v>
+                </c:pt>
+                <c:pt idx="4">
+                  <c:v>Depreciation</c:v>
+                </c:pt>
+                <c:pt idx="5">
+                  <c:v>Tax</c:v>
+                </c:pt>
+              </c:strCache>
+            </c:strRef>
+          </c:cat>
+          <c:val>
+            <c:numRef>
+              <c:f>Sheet1!$B$2:$B$7</c:f>
+              <c:numCache>
+                <c:formatCode>General</c:formatCode>
+                <c:ptCount val="6"/>
+                <c:pt idx="0">
+                  <c:v>0.1</c:v>
+                </c:pt>
+                <c:pt idx="1">
+                  <c:v>0.04</c:v>
+                </c:pt>
+                <c:pt idx="2">
+                  <c:v>0.06</c:v>
+                </c:pt>
+                <c:pt idx="3">
+                  <c:v>0.02</c:v>
+                </c:pt>
+                <c:pt idx="4">
+                  <c:v>0.03</c:v>
+                </c:pt>
+                <c:pt idx="5">
+                  <c:v>0.05</c:v>
+                </c:pt>
+              </c:numCache>
+            </c:numRef>
+          </c:val>
+        </c:ser>
+        <c:axId val="-2068027336"/>
+        <c:axId val="-2113994440"/>
+      </c:barChart>
+      <c:catAx>
+        <c:axId val="-2068027336"/>
+        <c:scaling>
+          <c:orientation val="minMax"/>
+        </c:scaling>
+        <c:delete val="0"/>
+        <c:axPos val="b"/>
+        <c:majorTickMark val="out"/>
+        <c:minorTickMark val="none"/>
+        <c:tickLblPos val="nextTo"/>
+        <c:crossAx val="-2113994440"/>
+        <c:crosses val="autoZero"/>
+        <c:auto val="1"/>
+        <c:lblAlgn val="ctr"/>
+        <c:lblOffset val="100"/>
+        <c:noMultiLvlLbl val="0"/>
+      </c:catAx>
+      <c:valAx>
+        <c:axId val="-2113994440"/>
+        <c:scaling/>
+        <c:delete val="0"/>
+        <c:axPos val="l"/>
+        <c:majorGridlines/>
+        <c:majorTickMark val="out"/>
+        <c:minorTickMark val="none"/>
+        <c:tickLblPos val="nextTo"/>
+        <c:crossAx val="-2068027336"/>
+        <c:crosses val="autoZero"/>
+      </c:valAx>
+    </c:plotArea>
+    <c:dispBlanksAs val="gap"/>
+  </c:chart>
+  <c:txPr>
+    <a:bodyPr/>
+    <a:lstStyle/>
+    <a:p>
+      <a:pPr>
+        <a:defRPr sz="1800"/>
+      </a:pPr>
+      <a:endParaRPr lang="en-US"/>
+    </a:p>
+  </c:txPr>
+  <c:externalData r:id="rId1">
+    <c:autoUpdate val="0"/>
+  </c:externalData>
+</c:chartSpace>
+</file>
+
+<file path=ppt/charts/chart25.xml><?xml version="1.0" encoding="utf-8"?>
+<c:chartSpace xmlns:c="http://schemas.openxmlformats.org/drawingml/2006/chart" xmlns:a="http://schemas.openxmlformats.org/drawingml/2006/main" xmlns:r="http://schemas.openxmlformats.org/officeDocument/2006/relationships">
+  <c:date1904 val="0"/>
+  <c:chart>
+    <c:autoTitleDeleted val="0"/>
+    <c:plotArea>
+      <c:barChart>
+        <c:barDir val="col"/>
+        <c:grouping val="clustered"/>
+        <c:ser>
+          <c:idx val="0"/>
+          <c:order val="0"/>
+          <c:tx>
+            <c:strRef>
+              <c:f>Sheet1!$B$1</c:f>
+              <c:strCache>
+                <c:ptCount val="1"/>
+                <c:pt idx="0">
+                  <c:v>Forecast 2027</c:v>
+                </c:pt>
+              </c:strCache>
+            </c:strRef>
+          </c:tx>
+          <c:cat>
+            <c:strRef>
+              <c:f>Sheet1!$A$2:$A$7</c:f>
+              <c:strCache>
+                <c:ptCount val="6"/>
+                <c:pt idx="0">
+                  <c:v>Sales Revenue</c:v>
+                </c:pt>
+                <c:pt idx="1">
+                  <c:v>Salaries</c:v>
+                </c:pt>
+                <c:pt idx="2">
+                  <c:v>Marketing</c:v>
+                </c:pt>
+                <c:pt idx="3">
+                  <c:v>Rent</c:v>
+                </c:pt>
+                <c:pt idx="4">
+                  <c:v>Depreciation</c:v>
+                </c:pt>
+                <c:pt idx="5">
+                  <c:v>Tax</c:v>
+                </c:pt>
+              </c:strCache>
+            </c:strRef>
+          </c:cat>
+          <c:val>
+            <c:numRef>
+              <c:f>Sheet1!$B$2:$B$7</c:f>
+              <c:numCache>
+                <c:formatCode>General</c:formatCode>
+                <c:ptCount val="6"/>
+                <c:pt idx="0">
+                  <c:v>2835000</c:v>
+                </c:pt>
+                <c:pt idx="1">
+                  <c:v>-756000</c:v>
+                </c:pt>
+                <c:pt idx="2">
+                  <c:v>-325500</c:v>
+                </c:pt>
+                <c:pt idx="3">
+                  <c:v>-194250</c:v>
+                </c:pt>
+                <c:pt idx="4">
+                  <c:v>-131250</c:v>
+                </c:pt>
+                <c:pt idx="5">
+                  <c:v>-241500</c:v>
+                </c:pt>
+              </c:numCache>
+            </c:numRef>
+          </c:val>
+        </c:ser>
+        <c:axId val="-2068027336"/>
+        <c:axId val="-2113994440"/>
+      </c:barChart>
+      <c:catAx>
+        <c:axId val="-2068027336"/>
+        <c:scaling>
+          <c:orientation val="minMax"/>
+        </c:scaling>
+        <c:delete val="0"/>
+        <c:axPos val="b"/>
+        <c:majorTickMark val="out"/>
+        <c:minorTickMark val="none"/>
+        <c:tickLblPos val="nextTo"/>
+        <c:crossAx val="-2113994440"/>
+        <c:crosses val="autoZero"/>
+        <c:auto val="1"/>
+        <c:lblAlgn val="ctr"/>
+        <c:lblOffset val="100"/>
+        <c:noMultiLvlLbl val="0"/>
+      </c:catAx>
+      <c:valAx>
+        <c:axId val="-2113994440"/>
+        <c:scaling/>
+        <c:delete val="0"/>
+        <c:axPos val="l"/>
+        <c:majorGridlines/>
+        <c:majorTickMark val="out"/>
+        <c:minorTickMark val="none"/>
+        <c:tickLblPos val="nextTo"/>
+        <c:crossAx val="-2068027336"/>
+        <c:crosses val="autoZero"/>
+      </c:valAx>
+    </c:plotArea>
+    <c:dispBlanksAs val="gap"/>
+  </c:chart>
+  <c:txPr>
+    <a:bodyPr/>
+    <a:lstStyle/>
+    <a:p>
+      <a:pPr>
+        <a:defRPr sz="1800"/>
+      </a:pPr>
+      <a:endParaRPr lang="en-US"/>
+    </a:p>
+  </c:txPr>
+  <c:externalData r:id="rId1">
+    <c:autoUpdate val="0"/>
+  </c:externalData>
+</c:chartSpace>
+</file>
+
+<file path=ppt/charts/chart26.xml><?xml version="1.0" encoding="utf-8"?>
+<c:chartSpace xmlns:c="http://schemas.openxmlformats.org/drawingml/2006/chart" xmlns:a="http://schemas.openxmlformats.org/drawingml/2006/main" xmlns:r="http://schemas.openxmlformats.org/officeDocument/2006/relationships">
+  <c:date1904 val="0"/>
+  <c:chart>
+    <c:autoTitleDeleted val="0"/>
+    <c:plotArea>
+      <c:barChart>
+        <c:barDir val="col"/>
+        <c:grouping val="clustered"/>
+        <c:ser>
+          <c:idx val="0"/>
+          <c:order val="0"/>
+          <c:tx>
+            <c:strRef>
+              <c:f>Sheet1!$B$1</c:f>
+              <c:strCache>
+                <c:ptCount val="1"/>
+                <c:pt idx="0">
+                  <c:v>Revenue</c:v>
+                </c:pt>
+              </c:strCache>
+            </c:strRef>
+          </c:tx>
+          <c:cat>
+            <c:strRef>
+              <c:f>Sheet1!$A$2:$A$3</c:f>
+              <c:strCache>
+                <c:ptCount val="2"/>
+                <c:pt idx="0">
+                  <c:v>2025</c:v>
+                </c:pt>
+                <c:pt idx="1">
+                  <c:v>2027 Forecast</c:v>
+                </c:pt>
+              </c:strCache>
+            </c:strRef>
+          </c:cat>
+          <c:val>
+            <c:numRef>
+              <c:f>Sheet1!$B$2:$B$3</c:f>
+              <c:numCache>
+                <c:formatCode>General</c:formatCode>
+                <c:ptCount val="2"/>
+                <c:pt idx="0">
+                  <c:v>2700000</c:v>
+                </c:pt>
+                <c:pt idx="1">
+                  <c:v>2835000</c:v>
+                </c:pt>
+              </c:numCache>
+            </c:numRef>
+          </c:val>
+        </c:ser>
+        <c:ser>
+          <c:idx val="1"/>
+          <c:order val="1"/>
+          <c:tx>
+            <c:strRef>
+              <c:f>Sheet1!$C$1</c:f>
+              <c:strCache>
+                <c:ptCount val="1"/>
+                <c:pt idx="0">
+                  <c:v>Expenses</c:v>
+                </c:pt>
+              </c:strCache>
+            </c:strRef>
+          </c:tx>
+          <c:cat>
+            <c:strRef>
+              <c:f>Sheet1!$A$2:$A$3</c:f>
+              <c:strCache>
+                <c:ptCount val="2"/>
+                <c:pt idx="0">
+                  <c:v>2025</c:v>
+                </c:pt>
+                <c:pt idx="1">
+                  <c:v>2027 Forecast</c:v>
+                </c:pt>
+              </c:strCache>
+            </c:strRef>
+          </c:cat>
+          <c:val>
+            <c:numRef>
+              <c:f>Sheet1!$C$2:$C$3</c:f>
+              <c:numCache>
+                <c:formatCode>General</c:formatCode>
+                <c:ptCount val="2"/>
+                <c:pt idx="0">
+                  <c:v>-1570000</c:v>
+                </c:pt>
+                <c:pt idx="1">
+                  <c:v>-1648500</c:v>
+                </c:pt>
+              </c:numCache>
+            </c:numRef>
+          </c:val>
+        </c:ser>
+        <c:ser>
+          <c:idx val="2"/>
+          <c:order val="2"/>
+          <c:tx>
+            <c:strRef>
+              <c:f>Sheet1!$D$1</c:f>
+              <c:strCache>
+                <c:ptCount val="1"/>
+                <c:pt idx="0">
+                  <c:v>Profit</c:v>
+                </c:pt>
+              </c:strCache>
+            </c:strRef>
+          </c:tx>
+          <c:cat>
+            <c:strRef>
+              <c:f>Sheet1!$A$2:$A$3</c:f>
+              <c:strCache>
+                <c:ptCount val="2"/>
+                <c:pt idx="0">
+                  <c:v>2025</c:v>
+                </c:pt>
+                <c:pt idx="1">
+                  <c:v>2027 Forecast</c:v>
+                </c:pt>
+              </c:strCache>
+            </c:strRef>
+          </c:cat>
+          <c:val>
+            <c:numRef>
+              <c:f>Sheet1!$D$2:$D$3</c:f>
+              <c:numCache>
+                <c:formatCode>General</c:formatCode>
+                <c:ptCount val="2"/>
+                <c:pt idx="0">
+                  <c:v>4270000</c:v>
+                </c:pt>
+                <c:pt idx="1">
+                  <c:v>4483500</c:v>
+                </c:pt>
+              </c:numCache>
+            </c:numRef>
+          </c:val>
+        </c:ser>
+        <c:axId val="-2068027336"/>
+        <c:axId val="-2113994440"/>
+      </c:barChart>
+      <c:catAx>
+        <c:axId val="-2068027336"/>
+        <c:scaling>
+          <c:orientation val="minMax"/>
+        </c:scaling>
+        <c:delete val="0"/>
+        <c:axPos val="b"/>
+        <c:majorTickMark val="out"/>
+        <c:minorTickMark val="none"/>
+        <c:tickLblPos val="nextTo"/>
+        <c:crossAx val="-2113994440"/>
+        <c:crosses val="autoZero"/>
+        <c:auto val="1"/>
+        <c:lblAlgn val="ctr"/>
+        <c:lblOffset val="100"/>
+        <c:noMultiLvlLbl val="0"/>
+      </c:catAx>
+      <c:valAx>
+        <c:axId val="-2113994440"/>
+        <c:scaling/>
+        <c:delete val="0"/>
+        <c:axPos val="l"/>
+        <c:majorGridlines/>
+        <c:majorTickMark val="out"/>
+        <c:minorTickMark val="none"/>
+        <c:tickLblPos val="nextTo"/>
+        <c:crossAx val="-2068027336"/>
+        <c:crosses val="autoZero"/>
+      </c:valAx>
+    </c:plotArea>
+    <c:dispBlanksAs val="gap"/>
+  </c:chart>
+  <c:txPr>
+    <a:bodyPr/>
+    <a:lstStyle/>
+    <a:p>
+      <a:pPr>
+        <a:defRPr sz="1800"/>
+      </a:pPr>
+      <a:endParaRPr lang="en-US"/>
+    </a:p>
+  </c:txPr>
+  <c:externalData r:id="rId1">
+    <c:autoUpdate val="0"/>
+  </c:externalData>
+</c:chartSpace>
+</file>
+
+<file path=ppt/charts/chart27.xml><?xml version="1.0" encoding="utf-8"?>
+<c:chartSpace xmlns:c="http://schemas.openxmlformats.org/drawingml/2006/chart" xmlns:a="http://schemas.openxmlformats.org/drawingml/2006/main" xmlns:r="http://schemas.openxmlformats.org/officeDocument/2006/relationships">
+  <c:date1904 val="0"/>
+  <c:chart>
+    <c:autoTitleDeleted val="0"/>
+    <c:plotArea>
+      <c:barChart>
+        <c:barDir val="col"/>
+        <c:grouping val="clustered"/>
+        <c:ser>
+          <c:idx val="0"/>
+          <c:order val="0"/>
+          <c:tx>
+            <c:strRef>
+              <c:f>Sheet1!$B$1</c:f>
+              <c:strCache>
+                <c:ptCount val="1"/>
+                <c:pt idx="0">
+                  <c:v>Actual Expense</c:v>
+                </c:pt>
+              </c:strCache>
+            </c:strRef>
+          </c:tx>
+          <c:spPr>
+            <a:solidFill>
+              <a:srgbClr val="5B9BD5"/>
+            </a:solidFill>
+          </c:spPr>
+          <c:dLbls>
+            <c:numFmt formatCode="#,##0" sourceLinked="0"/>
+            <c:showLegendKey val="0"/>
+            <c:showVal val="0"/>
+            <c:showCatName val="0"/>
+            <c:showSerName val="0"/>
+            <c:showPercent val="0"/>
+            <c:showBubbleSize val="0"/>
+            <c:showLeaderLines val="1"/>
+          </c:dLbls>
+          <c:cat>
+            <c:strRef>
+              <c:f>Sheet1!$A$2:$A$10</c:f>
+              <c:strCache>
+                <c:ptCount val="9"/>
+                <c:pt idx="0">
+                  <c:v>1 - Marketing</c:v>
+                </c:pt>
+                <c:pt idx="1">
+                  <c:v>2 - Marketing</c:v>
+                </c:pt>
+                <c:pt idx="2">
+                  <c:v>3 - Marketing</c:v>
+                </c:pt>
+                <c:pt idx="3">
+                  <c:v>1 - Rent</c:v>
+                </c:pt>
+                <c:pt idx="4">
+                  <c:v>2 - Rent</c:v>
+                </c:pt>
+                <c:pt idx="5">
+                  <c:v>3 - Rent</c:v>
+                </c:pt>
+                <c:pt idx="6">
+                  <c:v>1 - Salaries</c:v>
+                </c:pt>
+                <c:pt idx="7">
+                  <c:v>2 - Salaries</c:v>
+                </c:pt>
+                <c:pt idx="8">
+                  <c:v>3 - Salaries</c:v>
+                </c:pt>
+              </c:strCache>
+            </c:strRef>
+          </c:cat>
+          <c:val>
+            <c:numRef>
+              <c:f>Sheet1!$B$2:$B$10</c:f>
+              <c:numCache>
+                <c:formatCode>General</c:formatCode>
+                <c:ptCount val="9"/>
+                <c:pt idx="0">
+                  <c:v>120000</c:v>
+                </c:pt>
+                <c:pt idx="1">
+                  <c:v>120000</c:v>
+                </c:pt>
+                <c:pt idx="2">
+                  <c:v>140000</c:v>
+                </c:pt>
+                <c:pt idx="3">
+                  <c:v>80000</c:v>
+                </c:pt>
+                <c:pt idx="4">
+                  <c:v>80000</c:v>
+                </c:pt>
+                <c:pt idx="5">
+                  <c:v>80000</c:v>
+                </c:pt>
+                <c:pt idx="6">
+                  <c:v>300000</c:v>
+                </c:pt>
+                <c:pt idx="7">
+                  <c:v>310000</c:v>
+                </c:pt>
+                <c:pt idx="8">
+                  <c:v>320000</c:v>
+                </c:pt>
+              </c:numCache>
+            </c:numRef>
+          </c:val>
+        </c:ser>
+        <c:ser>
+          <c:idx val="1"/>
+          <c:order val="1"/>
+          <c:tx>
+            <c:strRef>
+              <c:f>Sheet1!$C$1</c:f>
+              <c:strCache>
+                <c:ptCount val="1"/>
+                <c:pt idx="0">
+                  <c:v>Monthly Variance</c:v>
+                </c:pt>
+              </c:strCache>
+            </c:strRef>
+          </c:tx>
+          <c:spPr>
+            <a:solidFill>
+              <a:srgbClr val="ED7D31"/>
+            </a:solidFill>
+          </c:spPr>
+          <c:dLbls>
+            <c:numFmt formatCode="#,##0" sourceLinked="0"/>
+            <c:showLegendKey val="0"/>
+            <c:showVal val="0"/>
+            <c:showCatName val="0"/>
+            <c:showSerName val="0"/>
+            <c:showPercent val="0"/>
+            <c:showBubbleSize val="0"/>
+            <c:showLeaderLines val="1"/>
+          </c:dLbls>
+          <c:cat>
+            <c:strRef>
+              <c:f>Sheet1!$A$2:$A$10</c:f>
+              <c:strCache>
+                <c:ptCount val="9"/>
+                <c:pt idx="0">
+                  <c:v>1 - Marketing</c:v>
+                </c:pt>
+                <c:pt idx="1">
+                  <c:v>2 - Marketing</c:v>
+                </c:pt>
+                <c:pt idx="2">
+                  <c:v>3 - Marketing</c:v>
+                </c:pt>
+                <c:pt idx="3">
+                  <c:v>1 - Rent</c:v>
+                </c:pt>
+                <c:pt idx="4">
+                  <c:v>2 - Rent</c:v>
+                </c:pt>
+                <c:pt idx="5">
+                  <c:v>3 - Rent</c:v>
+                </c:pt>
+                <c:pt idx="6">
+                  <c:v>1 - Salaries</c:v>
+                </c:pt>
+                <c:pt idx="7">
+                  <c:v>2 - Salaries</c:v>
+                </c:pt>
+                <c:pt idx="8">
+                  <c:v>3 - Salaries</c:v>
+                </c:pt>
+              </c:strCache>
+            </c:strRef>
+          </c:cat>
+          <c:val>
+            <c:numRef>
+              <c:f>Sheet1!$C$2:$C$10</c:f>
+              <c:numCache>
+                <c:formatCode>General</c:formatCode>
+                <c:ptCount val="9"/>
+                <c:pt idx="0">
+                  <c:v>0.0</c:v>
+                </c:pt>
+                <c:pt idx="1">
+                  <c:v>0.0</c:v>
+                </c:pt>
+                <c:pt idx="2">
+                  <c:v>20000.0</c:v>
+                </c:pt>
+                <c:pt idx="3">
+                  <c:v>0.0</c:v>
+                </c:pt>
+                <c:pt idx="4">
+                  <c:v>0.0</c:v>
+                </c:pt>
+                <c:pt idx="5">
+                  <c:v>0.0</c:v>
+                </c:pt>
+                <c:pt idx="6">
+                  <c:v>0.0</c:v>
+                </c:pt>
+                <c:pt idx="7">
+                  <c:v>10000.0</c:v>
+                </c:pt>
+                <c:pt idx="8">
+                  <c:v>10000.0</c:v>
+                </c:pt>
+              </c:numCache>
+            </c:numRef>
+          </c:val>
+        </c:ser>
+        <c:axId val="-2068027336"/>
+        <c:axId val="-2113994440"/>
+      </c:barChart>
+      <c:catAx>
+        <c:axId val="-2068027336"/>
+        <c:scaling>
+          <c:orientation val="minMax"/>
+        </c:scaling>
+        <c:delete val="0"/>
+        <c:axPos val="b"/>
+        <c:majorTickMark val="out"/>
+        <c:minorTickMark val="none"/>
+        <c:tickLblPos val="nextTo"/>
+        <c:crossAx val="-2113994440"/>
+        <c:crosses val="autoZero"/>
+        <c:auto val="1"/>
+        <c:lblAlgn val="ctr"/>
+        <c:lblOffset val="100"/>
+        <c:noMultiLvlLbl val="0"/>
+      </c:catAx>
+      <c:valAx>
+        <c:axId val="-2113994440"/>
+        <c:scaling/>
+        <c:delete val="0"/>
+        <c:axPos val="l"/>
+        <c:majorGridlines/>
+        <c:majorTickMark val="out"/>
+        <c:minorTickMark val="none"/>
+        <c:tickLblPos val="nextTo"/>
+        <c:crossAx val="-2068027336"/>
+        <c:crosses val="autoZero"/>
+      </c:valAx>
+    </c:plotArea>
+    <c:legend>
+      <c:overlay val="0"/>
+    </c:legend>
+    <c:dispBlanksAs val="gap"/>
+  </c:chart>
+  <c:txPr>
+    <a:bodyPr/>
+    <a:lstStyle/>
+    <a:p>
+      <a:pPr>
+        <a:defRPr sz="1800"/>
+      </a:pPr>
+      <a:endParaRPr lang="en-US"/>
+    </a:p>
+  </c:txPr>
+  <c:externalData r:id="rId1">
+    <c:autoUpdate val="0"/>
+  </c:externalData>
+</c:chartSpace>
+</file>
+
+<file path=ppt/charts/chart28.xml><?xml version="1.0" encoding="utf-8"?>
+<c:chartSpace xmlns:c="http://schemas.openxmlformats.org/drawingml/2006/chart" xmlns:a="http://schemas.openxmlformats.org/drawingml/2006/main" xmlns:r="http://schemas.openxmlformats.org/officeDocument/2006/relationships">
+  <c:date1904 val="0"/>
+  <c:chart>
+    <c:autoTitleDeleted val="0"/>
+    <c:plotArea>
+      <c:lineChart>
+        <c:grouping val="standard"/>
+        <c:varyColors val="0"/>
+        <c:ser>
+          <c:idx val="0"/>
+          <c:order val="0"/>
+          <c:tx>
+            <c:strRef>
+              <c:f>Sheet1!$B$1</c:f>
+              <c:strCache>
+                <c:ptCount val="1"/>
+                <c:pt idx="0">
+                  <c:v>Monthly Total Expense</c:v>
+                </c:pt>
+              </c:strCache>
+            </c:strRef>
+          </c:tx>
+          <c:spPr>
+            <a:ln w="45720">
+              <a:solidFill>
+                <a:srgbClr val="4472C4"/>
+              </a:solidFill>
+            </a:ln>
+          </c:spPr>
+          <c:marker>
+            <c:symbol val="diamond"/>
+            <c:size val="7"/>
+          </c:marker>
+          <c:dLbls>
+            <c:numFmt formatCode="#,##0" sourceLinked="0"/>
+            <c:txPr>
+              <a:bodyPr/>
+              <a:lstStyle/>
+              <a:p>
+                <a:pPr>
+                  <a:defRPr sz="864"/>
+                </a:pPr>
+              </a:p>
+            </c:txPr>
+            <c:showLegendKey val="0"/>
+            <c:showVal val="0"/>
+            <c:showCatName val="0"/>
+            <c:showSerName val="0"/>
+            <c:showPercent val="0"/>
+            <c:showBubbleSize val="0"/>
+            <c:showLeaderLines val="1"/>
+          </c:dLbls>
+          <c:cat>
+            <c:strRef>
+              <c:f>Sheet1!$A$2:$A$4</c:f>
+              <c:strCache>
+                <c:ptCount val="3"/>
+                <c:pt idx="0">
+                  <c:v>1</c:v>
+                </c:pt>
+                <c:pt idx="1">
+                  <c:v>2</c:v>
+                </c:pt>
+                <c:pt idx="2">
+                  <c:v>3</c:v>
+                </c:pt>
+              </c:strCache>
+            </c:strRef>
+          </c:cat>
+          <c:val>
+            <c:numRef>
+              <c:f>Sheet1!$B$2:$B$4</c:f>
+              <c:numCache>
+                <c:formatCode>General</c:formatCode>
+                <c:ptCount val="3"/>
+                <c:pt idx="0">
+                  <c:v>500000</c:v>
+                </c:pt>
+                <c:pt idx="1">
+                  <c:v>510000</c:v>
+                </c:pt>
+                <c:pt idx="2">
+                  <c:v>540000</c:v>
+                </c:pt>
+              </c:numCache>
+            </c:numRef>
+          </c:val>
+          <c:smooth val="0"/>
+        </c:ser>
+        <c:marker val="1"/>
+        <c:smooth val="0"/>
+        <c:axId val="2118791784"/>
+        <c:axId val="2140495176"/>
+      </c:lineChart>
+      <c:catAx>
+        <c:axId val="2118791784"/>
+        <c:scaling>
+          <c:orientation val="minMax"/>
+        </c:scaling>
+        <c:delete val="0"/>
+        <c:axPos val="b"/>
+        <c:majorTickMark val="out"/>
+        <c:minorTickMark val="none"/>
+        <c:tickLblPos val="nextTo"/>
+        <c:crossAx val="2140495176"/>
+        <c:crosses val="autoZero"/>
+        <c:auto val="1"/>
+        <c:lblAlgn val="ctr"/>
+        <c:lblOffset val="100"/>
+        <c:noMultiLvlLbl val="0"/>
+      </c:catAx>
+      <c:valAx>
+        <c:axId val="2140495176"/>
+        <c:scaling/>
+        <c:delete val="0"/>
+        <c:axPos val="l"/>
+        <c:majorGridlines/>
+        <c:majorTickMark val="out"/>
+        <c:minorTickMark val="none"/>
+        <c:tickLblPos val="nextTo"/>
+        <c:crossAx val="2118791784"/>
+        <c:crosses val="autoZero"/>
+      </c:valAx>
+    </c:plotArea>
+    <c:legend>
+      <c:legendPos val="r"/>
+      <c:layout/>
+      <c:overlay val="0"/>
+    </c:legend>
+    <c:plotVisOnly val="1"/>
+    <c:dispBlanksAs val="gap"/>
+    <c:showDLblsOverMax val="0"/>
+  </c:chart>
+  <c:txPr>
+    <a:bodyPr/>
+    <a:lstStyle/>
+    <a:p>
+      <a:pPr>
+        <a:defRPr sz="1800"/>
+      </a:pPr>
+      <a:endParaRPr lang="en-US"/>
+    </a:p>
+  </c:txPr>
+  <c:externalData r:id="rId1">
+    <c:autoUpdate val="0"/>
+  </c:externalData>
+</c:chartSpace>
+</file>
+
+<file path=ppt/charts/chart29.xml><?xml version="1.0" encoding="utf-8"?>
+<c:chartSpace xmlns:c="http://schemas.openxmlformats.org/drawingml/2006/chart" xmlns:a="http://schemas.openxmlformats.org/drawingml/2006/main" xmlns:r="http://schemas.openxmlformats.org/officeDocument/2006/relationships">
+  <c:date1904 val="0"/>
+  <c:chart>
+    <c:autoTitleDeleted val="0"/>
+    <c:plotArea>
+      <c:barChart>
+        <c:barDir val="col"/>
+        <c:grouping val="clustered"/>
+        <c:ser>
+          <c:idx val="0"/>
+          <c:order val="0"/>
+          <c:tx>
+            <c:strRef>
+              <c:f>Sheet1!$B$1</c:f>
+              <c:strCache>
+                <c:ptCount val="1"/>
+                <c:pt idx="0">
+                  <c:v>System Entries (Normal)</c:v>
+                </c:pt>
+              </c:strCache>
+            </c:strRef>
+          </c:tx>
+          <c:spPr>
+            <a:solidFill>
+              <a:srgbClr val="A5A5A5"/>
+            </a:solidFill>
+          </c:spPr>
+          <c:dLbls>
+            <c:txPr>
+              <a:bodyPr/>
+              <a:lstStyle/>
+              <a:p>
+                <a:pPr>
+                  <a:defRPr sz="800"/>
+                </a:pPr>
+              </a:p>
+            </c:txPr>
+            <c:dLblPos val="inEnd"/>
+            <c:showLegendKey val="0"/>
+            <c:showVal val="0"/>
+            <c:showCatName val="0"/>
+            <c:showSerName val="0"/>
+            <c:showPercent val="0"/>
+            <c:showBubbleSize val="0"/>
+            <c:showLeaderLines val="1"/>
+          </c:dLbls>
+          <c:cat>
+            <c:strRef>
+              <c:f>Sheet1!$A$2:$A$4</c:f>
+              <c:strCache>
+                <c:ptCount val="3"/>
+                <c:pt idx="0">
+                  <c:v>1</c:v>
+                </c:pt>
+                <c:pt idx="1">
+                  <c:v>2</c:v>
+                </c:pt>
+                <c:pt idx="2">
+                  <c:v>3</c:v>
+                </c:pt>
+              </c:strCache>
+            </c:strRef>
+          </c:cat>
+          <c:val>
+            <c:numRef>
+              <c:f>Sheet1!$B$2:$B$4</c:f>
+              <c:numCache>
+                <c:formatCode>General</c:formatCode>
+                <c:ptCount val="3"/>
+                <c:pt idx="0">
+                  <c:v>500000.0</c:v>
+                </c:pt>
+                <c:pt idx="1">
+                  <c:v>490000.0</c:v>
+                </c:pt>
+                <c:pt idx="2">
+                  <c:v>540000.0</c:v>
+                </c:pt>
+              </c:numCache>
+            </c:numRef>
+          </c:val>
+        </c:ser>
+        <c:ser>
+          <c:idx val="1"/>
+          <c:order val="1"/>
+          <c:tx>
+            <c:strRef>
+              <c:f>Sheet1!$C$1</c:f>
+              <c:strCache>
+                <c:ptCount val="1"/>
+                <c:pt idx="0">
+                  <c:v>Total Incl. Journals</c:v>
+                </c:pt>
+              </c:strCache>
+            </c:strRef>
+          </c:tx>
+          <c:spPr>
+            <a:solidFill>
+              <a:srgbClr val="5B9BD5"/>
+            </a:solidFill>
+          </c:spPr>
+          <c:dLbls>
+            <c:txPr>
+              <a:bodyPr/>
+              <a:lstStyle/>
+              <a:p>
+                <a:pPr>
+                  <a:defRPr sz="800"/>
+                </a:pPr>
+              </a:p>
+            </c:txPr>
+            <c:dLblPos val="inEnd"/>
+            <c:showLegendKey val="0"/>
+            <c:showVal val="0"/>
+            <c:showCatName val="0"/>
+            <c:showSerName val="0"/>
+            <c:showPercent val="0"/>
+            <c:showBubbleSize val="0"/>
+            <c:showLeaderLines val="1"/>
+          </c:dLbls>
+          <c:cat>
+            <c:strRef>
+              <c:f>Sheet1!$A$2:$A$4</c:f>
+              <c:strCache>
+                <c:ptCount val="3"/>
+                <c:pt idx="0">
+                  <c:v>1</c:v>
+                </c:pt>
+                <c:pt idx="1">
+                  <c:v>2</c:v>
+                </c:pt>
+                <c:pt idx="2">
+                  <c:v>3</c:v>
+                </c:pt>
+              </c:strCache>
+            </c:strRef>
+          </c:cat>
+          <c:val>
+            <c:numRef>
+              <c:f>Sheet1!$C$2:$C$4</c:f>
+              <c:numCache>
+                <c:formatCode>General</c:formatCode>
+                <c:ptCount val="3"/>
+                <c:pt idx="0">
+                  <c:v>500000.0</c:v>
+                </c:pt>
+                <c:pt idx="1">
+                  <c:v>510000.0</c:v>
+                </c:pt>
+                <c:pt idx="2">
+                  <c:v>540000.0</c:v>
+                </c:pt>
+              </c:numCache>
+            </c:numRef>
+          </c:val>
+        </c:ser>
+        <c:ser>
+          <c:idx val="2"/>
+          <c:order val="2"/>
+          <c:tx>
+            <c:strRef>
+              <c:f>Sheet1!$D$1</c:f>
+              <c:strCache>
+                <c:ptCount val="1"/>
+                <c:pt idx="0">
+                  <c:v>Adjustment Impact</c:v>
+                </c:pt>
+              </c:strCache>
+            </c:strRef>
+          </c:tx>
+          <c:spPr>
+            <a:solidFill>
+              <a:srgbClr val="FFC000"/>
+            </a:solidFill>
+          </c:spPr>
+          <c:dLbls>
+            <c:txPr>
+              <a:bodyPr/>
+              <a:lstStyle/>
+              <a:p>
+                <a:pPr>
+                  <a:defRPr sz="800"/>
+                </a:pPr>
+              </a:p>
+            </c:txPr>
+            <c:dLblPos val="inEnd"/>
+            <c:showLegendKey val="0"/>
+            <c:showVal val="0"/>
+            <c:showCatName val="0"/>
+            <c:showSerName val="0"/>
+            <c:showPercent val="0"/>
+            <c:showBubbleSize val="0"/>
+            <c:showLeaderLines val="1"/>
+          </c:dLbls>
+          <c:cat>
+            <c:strRef>
+              <c:f>Sheet1!$A$2:$A$4</c:f>
+              <c:strCache>
+                <c:ptCount val="3"/>
+                <c:pt idx="0">
+                  <c:v>1</c:v>
+                </c:pt>
+                <c:pt idx="1">
+                  <c:v>2</c:v>
+                </c:pt>
+                <c:pt idx="2">
+                  <c:v>3</c:v>
+                </c:pt>
+              </c:strCache>
+            </c:strRef>
+          </c:cat>
+          <c:val>
+            <c:numRef>
+              <c:f>Sheet1!$D$2:$D$4</c:f>
+              <c:numCache>
+                <c:formatCode>General</c:formatCode>
+                <c:ptCount val="3"/>
+                <c:pt idx="0">
+                  <c:v>0.0</c:v>
+                </c:pt>
+                <c:pt idx="1">
+                  <c:v>20000.0</c:v>
+                </c:pt>
+                <c:pt idx="2">
+                  <c:v>0.0</c:v>
+                </c:pt>
+              </c:numCache>
+            </c:numRef>
+          </c:val>
+        </c:ser>
+        <c:axId val="-2068027336"/>
+        <c:axId val="-2113994440"/>
+      </c:barChart>
+      <c:catAx>
+        <c:axId val="-2068027336"/>
+        <c:scaling>
+          <c:orientation val="minMax"/>
+        </c:scaling>
+        <c:delete val="0"/>
+        <c:axPos val="b"/>
+        <c:majorTickMark val="out"/>
+        <c:minorTickMark val="none"/>
+        <c:tickLblPos val="nextTo"/>
+        <c:crossAx val="-2113994440"/>
+        <c:crosses val="autoZero"/>
+        <c:auto val="1"/>
+        <c:lblAlgn val="ctr"/>
+        <c:lblOffset val="100"/>
+        <c:noMultiLvlLbl val="0"/>
+      </c:catAx>
+      <c:valAx>
+        <c:axId val="-2113994440"/>
+        <c:scaling/>
+        <c:delete val="0"/>
+        <c:axPos val="l"/>
+        <c:majorGridlines/>
+        <c:majorTickMark val="out"/>
+        <c:minorTickMark val="none"/>
+        <c:tickLblPos val="nextTo"/>
+        <c:crossAx val="-2068027336"/>
+        <c:crosses val="autoZero"/>
+      </c:valAx>
+    </c:plotArea>
+    <c:legend/>
+    <c:dispBlanksAs val="gap"/>
+  </c:chart>
+  <c:txPr>
+    <a:bodyPr/>
+    <a:lstStyle/>
+    <a:p>
+      <a:pPr>
+        <a:defRPr sz="1800"/>
+      </a:pPr>
+      <a:endParaRPr lang="en-US"/>
+    </a:p>
+  </c:txPr>
+  <c:externalData r:id="rId1">
+    <c:autoUpdate val="0"/>
+  </c:externalData>
+</c:chartSpace>
+</file>
+
+<file path=ppt/charts/chart3.xml><?xml version="1.0" encoding="utf-8"?>
+<c:chartSpace xmlns:c="http://schemas.openxmlformats.org/drawingml/2006/chart" xmlns:a="http://schemas.openxmlformats.org/drawingml/2006/main" xmlns:r="http://schemas.openxmlformats.org/officeDocument/2006/relationships">
+  <c:date1904 val="0"/>
+  <c:chart>
+    <c:autoTitleDeleted val="0"/>
+    <c:plotArea>
+      <c:barChart>
+        <c:barDir val="col"/>
+        <c:grouping val="clustered"/>
+        <c:ser>
+          <c:idx val="0"/>
+          <c:order val="0"/>
+          <c:tx>
+            <c:strRef>
+              <c:f>Sheet1!$B$1</c:f>
+              <c:strCache>
+                <c:ptCount val="1"/>
+                <c:pt idx="0">
+                  <c:v>Actual</c:v>
+                </c:pt>
+              </c:strCache>
+            </c:strRef>
+          </c:tx>
+          <c:cat>
+            <c:strRef>
+              <c:f>Sheet1!$A$2:$A$17</c:f>
+              <c:strCache>
+                <c:ptCount val="16"/>
+                <c:pt idx="0">
+                  <c:v>Revenue</c:v>
+                </c:pt>
+                <c:pt idx="1">
+                  <c:v>Tax</c:v>
+                </c:pt>
+                <c:pt idx="2">
+                  <c:v>Opex</c:v>
+                </c:pt>
+                <c:pt idx="3">
+                  <c:v>Depreciation</c:v>
+                </c:pt>
+                <c:pt idx="4">
+                  <c:v>Depreciation</c:v>
+                </c:pt>
+                <c:pt idx="5">
+                  <c:v>Tax</c:v>
+                </c:pt>
+                <c:pt idx="6">
+                  <c:v>Revenue</c:v>
+                </c:pt>
+                <c:pt idx="7">
+                  <c:v>Opex</c:v>
+                </c:pt>
+                <c:pt idx="8">
+                  <c:v>Opex</c:v>
+                </c:pt>
+                <c:pt idx="9">
+                  <c:v>Depreciation</c:v>
+                </c:pt>
+                <c:pt idx="10">
+                  <c:v>Tax</c:v>
+                </c:pt>
+                <c:pt idx="11">
+                  <c:v>Revenue</c:v>
+                </c:pt>
+                <c:pt idx="12">
+                  <c:v>Depreciation</c:v>
+                </c:pt>
+                <c:pt idx="13">
+                  <c:v>Opex</c:v>
+                </c:pt>
+                <c:pt idx="14">
+                  <c:v>Revenue</c:v>
+                </c:pt>
+                <c:pt idx="15">
+                  <c:v>Tax</c:v>
+                </c:pt>
+              </c:strCache>
+            </c:strRef>
+          </c:cat>
+          <c:val>
+            <c:numRef>
+              <c:f>Sheet1!$B$2:$B$17</c:f>
+              <c:numCache>
+                <c:formatCode>General</c:formatCode>
+                <c:ptCount val="16"/>
+                <c:pt idx="0">
+                  <c:v>1000000</c:v>
+                </c:pt>
+                <c:pt idx="1">
+                  <c:v>-90000</c:v>
+                </c:pt>
+                <c:pt idx="2">
+                  <c:v>-500000</c:v>
+                </c:pt>
+                <c:pt idx="3">
+                  <c:v>-50000</c:v>
+                </c:pt>
+                <c:pt idx="4">
+                  <c:v>-52000</c:v>
+                </c:pt>
+                <c:pt idx="5">
+                  <c:v>-95000</c:v>
+                </c:pt>
+                <c:pt idx="6">
+                  <c:v>1100000</c:v>
+                </c:pt>
+                <c:pt idx="7">
+                  <c:v>-535000</c:v>
+                </c:pt>
+                <c:pt idx="8">
+                  <c:v>-590000</c:v>
+                </c:pt>
+                <c:pt idx="9">
+                  <c:v>-60000</c:v>
+                </c:pt>
+                <c:pt idx="10">
+                  <c:v>-110000</c:v>
+                </c:pt>
+                <c:pt idx="11">
+                  <c:v>1300000</c:v>
+                </c:pt>
+                <c:pt idx="12">
+                  <c:v>-65000</c:v>
+                </c:pt>
+                <c:pt idx="13">
+                  <c:v>-625000</c:v>
+                </c:pt>
+                <c:pt idx="14">
+                  <c:v>1400000</c:v>
+                </c:pt>
+                <c:pt idx="15">
+                  <c:v>-120000</c:v>
+                </c:pt>
+              </c:numCache>
+            </c:numRef>
+          </c:val>
+        </c:ser>
+        <c:ser>
+          <c:idx val="1"/>
+          <c:order val="1"/>
+          <c:tx>
+            <c:strRef>
+              <c:f>Sheet1!$C$1</c:f>
+              <c:strCache>
+                <c:ptCount val="1"/>
+                <c:pt idx="0">
+                  <c:v>Budget</c:v>
+                </c:pt>
+              </c:strCache>
+            </c:strRef>
+          </c:tx>
+          <c:cat>
+            <c:strRef>
+              <c:f>Sheet1!$A$2:$A$17</c:f>
+              <c:strCache>
+                <c:ptCount val="16"/>
+                <c:pt idx="0">
+                  <c:v>Revenue</c:v>
+                </c:pt>
+                <c:pt idx="1">
+                  <c:v>Tax</c:v>
+                </c:pt>
+                <c:pt idx="2">
+                  <c:v>Opex</c:v>
+                </c:pt>
+                <c:pt idx="3">
+                  <c:v>Depreciation</c:v>
+                </c:pt>
+                <c:pt idx="4">
+                  <c:v>Depreciation</c:v>
+                </c:pt>
+                <c:pt idx="5">
+                  <c:v>Tax</c:v>
+                </c:pt>
+                <c:pt idx="6">
+                  <c:v>Revenue</c:v>
+                </c:pt>
+                <c:pt idx="7">
+                  <c:v>Opex</c:v>
+                </c:pt>
+                <c:pt idx="8">
+                  <c:v>Opex</c:v>
+                </c:pt>
+                <c:pt idx="9">
+                  <c:v>Depreciation</c:v>
+                </c:pt>
+                <c:pt idx="10">
+                  <c:v>Tax</c:v>
+                </c:pt>
+                <c:pt idx="11">
+                  <c:v>Revenue</c:v>
+                </c:pt>
+                <c:pt idx="12">
+                  <c:v>Depreciation</c:v>
+                </c:pt>
+                <c:pt idx="13">
+                  <c:v>Opex</c:v>
+                </c:pt>
+                <c:pt idx="14">
+                  <c:v>Revenue</c:v>
+                </c:pt>
+                <c:pt idx="15">
+                  <c:v>Tax</c:v>
+                </c:pt>
+              </c:strCache>
+            </c:strRef>
+          </c:cat>
+          <c:val>
+            <c:numRef>
+              <c:f>Sheet1!$C$2:$C$17</c:f>
+              <c:numCache>
+                <c:formatCode>General</c:formatCode>
+                <c:ptCount val="16"/>
+                <c:pt idx="0">
+                  <c:v>0.0</c:v>
+                </c:pt>
+                <c:pt idx="1">
+                  <c:v>0.0</c:v>
+                </c:pt>
+                <c:pt idx="2">
+                  <c:v>0.0</c:v>
+                </c:pt>
+                <c:pt idx="3">
+                  <c:v>0.0</c:v>
+                </c:pt>
+                <c:pt idx="4">
+                  <c:v>0.0</c:v>
+                </c:pt>
+                <c:pt idx="5">
+                  <c:v>0.0</c:v>
+                </c:pt>
+                <c:pt idx="6">
+                  <c:v>0.0</c:v>
+                </c:pt>
+                <c:pt idx="7">
+                  <c:v>0.0</c:v>
+                </c:pt>
+                <c:pt idx="8">
+                  <c:v>-565000.0</c:v>
+                </c:pt>
+                <c:pt idx="9">
+                  <c:v>-58000.0</c:v>
+                </c:pt>
+                <c:pt idx="10">
+                  <c:v>-105000.0</c:v>
+                </c:pt>
+                <c:pt idx="11">
+                  <c:v>1250000.0</c:v>
+                </c:pt>
+                <c:pt idx="12">
+                  <c:v>0.0</c:v>
+                </c:pt>
+                <c:pt idx="13">
+                  <c:v>0.0</c:v>
+                </c:pt>
+                <c:pt idx="14">
+                  <c:v>0.0</c:v>
+                </c:pt>
+                <c:pt idx="15">
+                  <c:v>0.0</c:v>
+                </c:pt>
+              </c:numCache>
+            </c:numRef>
+          </c:val>
+        </c:ser>
+        <c:axId val="-2068027336"/>
+        <c:axId val="-2113994440"/>
+      </c:barChart>
+      <c:catAx>
+        <c:axId val="-2068027336"/>
+        <c:scaling>
+          <c:orientation val="minMax"/>
+        </c:scaling>
+        <c:delete val="0"/>
+        <c:axPos val="b"/>
+        <c:majorTickMark val="out"/>
+        <c:minorTickMark val="none"/>
+        <c:tickLblPos val="nextTo"/>
+        <c:crossAx val="-2113994440"/>
+        <c:crosses val="autoZero"/>
+        <c:auto val="1"/>
+        <c:lblAlgn val="ctr"/>
+        <c:lblOffset val="100"/>
+        <c:noMultiLvlLbl val="0"/>
+      </c:catAx>
+      <c:valAx>
+        <c:axId val="-2113994440"/>
+        <c:scaling/>
+        <c:delete val="0"/>
+        <c:axPos val="l"/>
+        <c:majorGridlines/>
+        <c:majorTickMark val="out"/>
+        <c:minorTickMark val="none"/>
+        <c:tickLblPos val="nextTo"/>
+        <c:crossAx val="-2068027336"/>
+        <c:crosses val="autoZero"/>
+      </c:valAx>
+    </c:plotArea>
+    <c:dispBlanksAs val="gap"/>
+  </c:chart>
+  <c:txPr>
+    <a:bodyPr/>
+    <a:lstStyle/>
+    <a:p>
+      <a:pPr>
+        <a:defRPr sz="1800"/>
+      </a:pPr>
+      <a:endParaRPr lang="en-US"/>
+    </a:p>
+  </c:txPr>
+  <c:externalData r:id="rId1">
+    <c:autoUpdate val="0"/>
+  </c:externalData>
+</c:chartSpace>
+</file>
+
+<file path=ppt/charts/chart30.xml><?xml version="1.0" encoding="utf-8"?>
+<c:chartSpace xmlns:c="http://schemas.openxmlformats.org/drawingml/2006/chart" xmlns:a="http://schemas.openxmlformats.org/drawingml/2006/main" xmlns:r="http://schemas.openxmlformats.org/officeDocument/2006/relationships">
+  <c:date1904 val="0"/>
+  <c:chart>
+    <c:autoTitleDeleted val="0"/>
+    <c:plotArea>
+      <c:barChart>
+        <c:barDir val="col"/>
+        <c:grouping val="stacked"/>
+        <c:ser>
+          <c:idx val="0"/>
+          <c:order val="0"/>
+          <c:tx>
+            <c:strRef>
+              <c:f>Sheet1!$B$1</c:f>
+              <c:strCache>
+                <c:ptCount val="1"/>
+                <c:pt idx="0">
+                  <c:v>Building</c:v>
+                </c:pt>
+              </c:strCache>
+            </c:strRef>
+          </c:tx>
+          <c:dLbls>
+            <c:numFmt formatCode="#,##0" sourceLinked="0"/>
+            <c:txPr>
+              <a:bodyPr/>
+              <a:lstStyle/>
+              <a:p>
+                <a:pPr>
+                  <a:defRPr sz="800"/>
+                </a:pPr>
+              </a:p>
+            </c:txPr>
+            <c:dLblPos val="ctr"/>
+            <c:showLegendKey val="0"/>
+            <c:showVal val="0"/>
+            <c:showCatName val="0"/>
+            <c:showSerName val="0"/>
+            <c:showPercent val="0"/>
+            <c:showBubbleSize val="0"/>
+            <c:showLeaderLines val="1"/>
+          </c:dLbls>
+          <c:cat>
+            <c:strRef>
+              <c:f>Sheet1!$A$2:$A$13</c:f>
+              <c:strCache>
+                <c:ptCount val="12"/>
+                <c:pt idx="0">
+                  <c:v>2026-03-01</c:v>
+                </c:pt>
+                <c:pt idx="1">
+                  <c:v>2026-04-01</c:v>
+                </c:pt>
+                <c:pt idx="2">
+                  <c:v>2026-05-01</c:v>
+                </c:pt>
+                <c:pt idx="3">
+                  <c:v>2026-06-01</c:v>
+                </c:pt>
+                <c:pt idx="4">
+                  <c:v>2026-07-01</c:v>
+                </c:pt>
+                <c:pt idx="5">
+                  <c:v>2026-08-01</c:v>
+                </c:pt>
+                <c:pt idx="6">
+                  <c:v>2026-09-01</c:v>
+                </c:pt>
+                <c:pt idx="7">
+                  <c:v>2026-10-01</c:v>
+                </c:pt>
+                <c:pt idx="8">
+                  <c:v>2026-11-01</c:v>
+                </c:pt>
+                <c:pt idx="9">
+                  <c:v>2026-12-01</c:v>
+                </c:pt>
+                <c:pt idx="10">
+                  <c:v>2027-01-01</c:v>
+                </c:pt>
+                <c:pt idx="11">
+                  <c:v>2027-02-01</c:v>
+                </c:pt>
+              </c:strCache>
+            </c:strRef>
+          </c:cat>
+          <c:val>
+            <c:numRef>
+              <c:f>Sheet1!$B$2:$B$13</c:f>
+              <c:numCache>
+                <c:formatCode>General</c:formatCode>
+                <c:ptCount val="12"/>
+                <c:pt idx="0">
+                  <c:v>0.0</c:v>
+                </c:pt>
+                <c:pt idx="1">
+                  <c:v>0.0</c:v>
+                </c:pt>
+                <c:pt idx="2">
+                  <c:v>0.0</c:v>
+                </c:pt>
+                <c:pt idx="3">
+                  <c:v>0.0</c:v>
+                </c:pt>
+                <c:pt idx="4">
+                  <c:v>10000.0</c:v>
+                </c:pt>
+                <c:pt idx="5">
+                  <c:v>10000.0</c:v>
+                </c:pt>
+                <c:pt idx="6">
+                  <c:v>10000.0</c:v>
+                </c:pt>
+                <c:pt idx="7">
+                  <c:v>10000.0</c:v>
+                </c:pt>
+                <c:pt idx="8">
+                  <c:v>10000.0</c:v>
+                </c:pt>
+                <c:pt idx="9">
+                  <c:v>10000.0</c:v>
+                </c:pt>
+                <c:pt idx="10">
+                  <c:v>10000.0</c:v>
+                </c:pt>
+                <c:pt idx="11">
+                  <c:v>10000.0</c:v>
+                </c:pt>
+              </c:numCache>
+            </c:numRef>
+          </c:val>
+        </c:ser>
+        <c:ser>
+          <c:idx val="1"/>
+          <c:order val="1"/>
+          <c:tx>
+            <c:strRef>
+              <c:f>Sheet1!$C$1</c:f>
+              <c:strCache>
+                <c:ptCount val="1"/>
+                <c:pt idx="0">
+                  <c:v>Furniture</c:v>
+                </c:pt>
+              </c:strCache>
+            </c:strRef>
+          </c:tx>
+          <c:dLbls>
+            <c:numFmt formatCode="#,##0" sourceLinked="0"/>
+            <c:txPr>
+              <a:bodyPr/>
+              <a:lstStyle/>
+              <a:p>
+                <a:pPr>
+                  <a:defRPr sz="800"/>
+                </a:pPr>
+              </a:p>
+            </c:txPr>
+            <c:dLblPos val="ctr"/>
+            <c:showLegendKey val="0"/>
+            <c:showVal val="0"/>
+            <c:showCatName val="0"/>
+            <c:showSerName val="0"/>
+            <c:showPercent val="0"/>
+            <c:showBubbleSize val="0"/>
+            <c:showLeaderLines val="1"/>
+          </c:dLbls>
+          <c:cat>
+            <c:strRef>
+              <c:f>Sheet1!$A$2:$A$13</c:f>
+              <c:strCache>
+                <c:ptCount val="12"/>
+                <c:pt idx="0">
+                  <c:v>2026-03-01</c:v>
+                </c:pt>
+                <c:pt idx="1">
+                  <c:v>2026-04-01</c:v>
+                </c:pt>
+                <c:pt idx="2">
+                  <c:v>2026-05-01</c:v>
+                </c:pt>
+                <c:pt idx="3">
+                  <c:v>2026-06-01</c:v>
+                </c:pt>
+                <c:pt idx="4">
+                  <c:v>2026-07-01</c:v>
+                </c:pt>
+                <c:pt idx="5">
+                  <c:v>2026-08-01</c:v>
+                </c:pt>
+                <c:pt idx="6">
+                  <c:v>2026-09-01</c:v>
+                </c:pt>
+                <c:pt idx="7">
+                  <c:v>2026-10-01</c:v>
+                </c:pt>
+                <c:pt idx="8">
+                  <c:v>2026-11-01</c:v>
+                </c:pt>
+                <c:pt idx="9">
+                  <c:v>2026-12-01</c:v>
+                </c:pt>
+                <c:pt idx="10">
+                  <c:v>2027-01-01</c:v>
+                </c:pt>
+                <c:pt idx="11">
+                  <c:v>2027-02-01</c:v>
+                </c:pt>
+              </c:strCache>
+            </c:strRef>
+          </c:cat>
+          <c:val>
+            <c:numRef>
+              <c:f>Sheet1!$C$2:$C$13</c:f>
+              <c:numCache>
+                <c:formatCode>General</c:formatCode>
+                <c:ptCount val="12"/>
+                <c:pt idx="0">
+                  <c:v>4166.666666666666</c:v>
+                </c:pt>
+                <c:pt idx="1">
+                  <c:v>4166.666666666666</c:v>
+                </c:pt>
+                <c:pt idx="2">
+                  <c:v>4166.666666666666</c:v>
+                </c:pt>
+                <c:pt idx="3">
+                  <c:v>4166.666666666666</c:v>
+                </c:pt>
+                <c:pt idx="4">
+                  <c:v>4166.666666666666</c:v>
+                </c:pt>
+                <c:pt idx="5">
+                  <c:v>4166.666666666666</c:v>
+                </c:pt>
+                <c:pt idx="6">
+                  <c:v>4166.666666666666</c:v>
+                </c:pt>
+                <c:pt idx="7">
+                  <c:v>4166.666666666666</c:v>
+                </c:pt>
+                <c:pt idx="8">
+                  <c:v>4166.666666666666</c:v>
+                </c:pt>
+                <c:pt idx="9">
+                  <c:v>4166.666666666666</c:v>
+                </c:pt>
+                <c:pt idx="10">
+                  <c:v>4166.666666666666</c:v>
+                </c:pt>
+                <c:pt idx="11">
+                  <c:v>4166.666666666666</c:v>
+                </c:pt>
+              </c:numCache>
+            </c:numRef>
+          </c:val>
+        </c:ser>
+        <c:ser>
+          <c:idx val="2"/>
+          <c:order val="2"/>
+          <c:tx>
+            <c:strRef>
+              <c:f>Sheet1!$D$1</c:f>
+              <c:strCache>
+                <c:ptCount val="1"/>
+                <c:pt idx="0">
+                  <c:v>IT</c:v>
+                </c:pt>
+              </c:strCache>
+            </c:strRef>
+          </c:tx>
+          <c:dLbls>
+            <c:numFmt formatCode="#,##0" sourceLinked="0"/>
+            <c:txPr>
+              <a:bodyPr/>
+              <a:lstStyle/>
+              <a:p>
+                <a:pPr>
+                  <a:defRPr sz="800"/>
+                </a:pPr>
+              </a:p>
+            </c:txPr>
+            <c:dLblPos val="ctr"/>
+            <c:showLegendKey val="0"/>
+            <c:showVal val="0"/>
+            <c:showCatName val="0"/>
+            <c:showSerName val="0"/>
+            <c:showPercent val="0"/>
+            <c:showBubbleSize val="0"/>
+            <c:showLeaderLines val="1"/>
+          </c:dLbls>
+          <c:cat>
+            <c:strRef>
+              <c:f>Sheet1!$A$2:$A$13</c:f>
+              <c:strCache>
+                <c:ptCount val="12"/>
+                <c:pt idx="0">
+                  <c:v>2026-03-01</c:v>
+                </c:pt>
+                <c:pt idx="1">
+                  <c:v>2026-04-01</c:v>
+                </c:pt>
+                <c:pt idx="2">
+                  <c:v>2026-05-01</c:v>
+                </c:pt>
+                <c:pt idx="3">
+                  <c:v>2026-06-01</c:v>
+                </c:pt>
+                <c:pt idx="4">
+                  <c:v>2026-07-01</c:v>
+                </c:pt>
+                <c:pt idx="5">
+                  <c:v>2026-08-01</c:v>
+                </c:pt>
+                <c:pt idx="6">
+                  <c:v>2026-09-01</c:v>
+                </c:pt>
+                <c:pt idx="7">
+                  <c:v>2026-10-01</c:v>
+                </c:pt>
+                <c:pt idx="8">
+                  <c:v>2026-11-01</c:v>
+                </c:pt>
+                <c:pt idx="9">
+                  <c:v>2026-12-01</c:v>
+                </c:pt>
+                <c:pt idx="10">
+                  <c:v>2027-01-01</c:v>
+                </c:pt>
+                <c:pt idx="11">
+                  <c:v>2027-02-01</c:v>
+                </c:pt>
+              </c:strCache>
+            </c:strRef>
+          </c:cat>
+          <c:val>
+            <c:numRef>
+              <c:f>Sheet1!$D$2:$D$13</c:f>
+              <c:numCache>
+                <c:formatCode>General</c:formatCode>
+                <c:ptCount val="12"/>
+                <c:pt idx="0">
+                  <c:v>23333.333333333332</c:v>
+                </c:pt>
+                <c:pt idx="1">
+                  <c:v>23333.333333333332</c:v>
+                </c:pt>
+                <c:pt idx="2">
+                  <c:v>33750.0</c:v>
+                </c:pt>
+                <c:pt idx="3">
+                  <c:v>33750.0</c:v>
+                </c:pt>
+                <c:pt idx="4">
+                  <c:v>33750.0</c:v>
+                </c:pt>
+                <c:pt idx="5">
+                  <c:v>33750.0</c:v>
+                </c:pt>
+                <c:pt idx="6">
+                  <c:v>33750.0</c:v>
+                </c:pt>
+                <c:pt idx="7">
+                  <c:v>33750.0</c:v>
+                </c:pt>
+                <c:pt idx="8">
+                  <c:v>33750.0</c:v>
+                </c:pt>
+                <c:pt idx="9">
+                  <c:v>33750.0</c:v>
+                </c:pt>
+                <c:pt idx="10">
+                  <c:v>25416.666666666664</c:v>
+                </c:pt>
+                <c:pt idx="11">
+                  <c:v>25416.666666666664</c:v>
+                </c:pt>
+              </c:numCache>
+            </c:numRef>
+          </c:val>
+        </c:ser>
+        <c:ser>
+          <c:idx val="3"/>
+          <c:order val="3"/>
+          <c:tx>
+            <c:strRef>
+              <c:f>Sheet1!$E$1</c:f>
+              <c:strCache>
+                <c:ptCount val="1"/>
+                <c:pt idx="0">
+                  <c:v>Transport</c:v>
+                </c:pt>
+              </c:strCache>
+            </c:strRef>
+          </c:tx>
+          <c:dLbls>
+            <c:numFmt formatCode="#,##0" sourceLinked="0"/>
+            <c:txPr>
+              <a:bodyPr/>
+              <a:lstStyle/>
+              <a:p>
+                <a:pPr>
+                  <a:defRPr sz="800"/>
+                </a:pPr>
+              </a:p>
+            </c:txPr>
+            <c:dLblPos val="ctr"/>
+            <c:showLegendKey val="0"/>
+            <c:showVal val="0"/>
+            <c:showCatName val="0"/>
+            <c:showSerName val="0"/>
+            <c:showPercent val="0"/>
+            <c:showBubbleSize val="0"/>
+            <c:showLeaderLines val="1"/>
+          </c:dLbls>
+          <c:cat>
+            <c:strRef>
+              <c:f>Sheet1!$A$2:$A$13</c:f>
+              <c:strCache>
+                <c:ptCount val="12"/>
+                <c:pt idx="0">
+                  <c:v>2026-03-01</c:v>
+                </c:pt>
+                <c:pt idx="1">
+                  <c:v>2026-04-01</c:v>
+                </c:pt>
+                <c:pt idx="2">
+                  <c:v>2026-05-01</c:v>
+                </c:pt>
+                <c:pt idx="3">
+                  <c:v>2026-06-01</c:v>
+                </c:pt>
+                <c:pt idx="4">
+                  <c:v>2026-07-01</c:v>
+                </c:pt>
+                <c:pt idx="5">
+                  <c:v>2026-08-01</c:v>
+                </c:pt>
+                <c:pt idx="6">
+                  <c:v>2026-09-01</c:v>
+                </c:pt>
+                <c:pt idx="7">
+                  <c:v>2026-10-01</c:v>
+                </c:pt>
+                <c:pt idx="8">
+                  <c:v>2026-11-01</c:v>
+                </c:pt>
+                <c:pt idx="9">
+                  <c:v>2026-12-01</c:v>
+                </c:pt>
+                <c:pt idx="10">
+                  <c:v>2027-01-01</c:v>
+                </c:pt>
+                <c:pt idx="11">
+                  <c:v>2027-02-01</c:v>
+                </c:pt>
+              </c:strCache>
+            </c:strRef>
+          </c:cat>
+          <c:val>
+            <c:numRef>
+              <c:f>Sheet1!$E$2:$E$13</c:f>
+              <c:numCache>
+                <c:formatCode>General</c:formatCode>
+                <c:ptCount val="12"/>
+                <c:pt idx="0">
+                  <c:v>41666.666666666664</c:v>
+                </c:pt>
+                <c:pt idx="1">
+                  <c:v>41666.666666666664</c:v>
+                </c:pt>
+                <c:pt idx="2">
+                  <c:v>41666.666666666664</c:v>
+                </c:pt>
+                <c:pt idx="3">
+                  <c:v>41666.666666666664</c:v>
+                </c:pt>
+                <c:pt idx="4">
+                  <c:v>41666.666666666664</c:v>
+                </c:pt>
+                <c:pt idx="5">
+                  <c:v>41666.666666666664</c:v>
+                </c:pt>
+                <c:pt idx="6">
+                  <c:v>41666.666666666664</c:v>
+                </c:pt>
+                <c:pt idx="7">
+                  <c:v>41666.666666666664</c:v>
+                </c:pt>
+                <c:pt idx="8">
+                  <c:v>41666.666666666664</c:v>
+                </c:pt>
+                <c:pt idx="9">
+                  <c:v>41666.666666666664</c:v>
+                </c:pt>
+                <c:pt idx="10">
+                  <c:v>41666.666666666664</c:v>
+                </c:pt>
+                <c:pt idx="11">
+                  <c:v>41666.666666666664</c:v>
+                </c:pt>
+              </c:numCache>
+            </c:numRef>
+          </c:val>
+        </c:ser>
+        <c:overlap val="100"/>
+        <c:axId val="-2068027336"/>
+        <c:axId val="-2113994440"/>
+      </c:barChart>
+      <c:catAx>
+        <c:axId val="-2068027336"/>
+        <c:scaling>
+          <c:orientation val="minMax"/>
+        </c:scaling>
+        <c:delete val="0"/>
+        <c:axPos val="b"/>
+        <c:majorTickMark val="out"/>
+        <c:minorTickMark val="none"/>
+        <c:tickLblPos val="nextTo"/>
+        <c:crossAx val="-2113994440"/>
+        <c:crosses val="autoZero"/>
+        <c:auto val="1"/>
+        <c:lblAlgn val="ctr"/>
+        <c:lblOffset val="100"/>
+        <c:noMultiLvlLbl val="0"/>
+      </c:catAx>
+      <c:valAx>
+        <c:axId val="-2113994440"/>
+        <c:scaling/>
+        <c:delete val="0"/>
+        <c:axPos val="l"/>
+        <c:majorGridlines/>
+        <c:majorTickMark val="out"/>
+        <c:minorTickMark val="none"/>
+        <c:tickLblPos val="nextTo"/>
+        <c:crossAx val="-2068027336"/>
+        <c:crosses val="autoZero"/>
+      </c:valAx>
+    </c:plotArea>
+    <c:legend/>
+    <c:dispBlanksAs val="gap"/>
+  </c:chart>
+  <c:txPr>
+    <a:bodyPr/>
+    <a:lstStyle/>
+    <a:p>
+      <a:pPr>
+        <a:defRPr sz="1800"/>
+      </a:pPr>
+      <a:endParaRPr lang="en-US"/>
+    </a:p>
+  </c:txPr>
+  <c:externalData r:id="rId1">
+    <c:autoUpdate val="0"/>
+  </c:externalData>
+</c:chartSpace>
+</file>
+
+<file path=ppt/charts/chart31.xml><?xml version="1.0" encoding="utf-8"?>
+<c:chartSpace xmlns:c="http://schemas.openxmlformats.org/drawingml/2006/chart" xmlns:a="http://schemas.openxmlformats.org/drawingml/2006/main" xmlns:r="http://schemas.openxmlformats.org/officeDocument/2006/relationships">
+  <c:chart>
+    <c:autoTitleDeleted val="0"/>
+    <c:plotArea>
+      <c:pieChart>
+        <c:varyColors val="1"/>
+        <c:ser>
+          <c:idx val="0"/>
+          <c:order val="0"/>
+          <c:tx>
+            <c:strRef>
+              <c:f>Sheet1!$B$1</c:f>
+              <c:strCache>
+                <c:ptCount val="1"/>
+                <c:pt idx="0">
+                  <c:v>CWIP Amount</c:v>
+                </c:pt>
+              </c:strCache>
+            </c:strRef>
+          </c:tx>
+          <c:dLbls>
+            <c:txPr>
+              <a:bodyPr/>
+              <a:lstStyle/>
+              <a:p>
+                <a:pPr>
+                  <a:defRPr sz="1000"/>
+                </a:pPr>
+              </a:p>
+            </c:txPr>
+            <c:dLblPos val="outEnd"/>
+            <c:showLegendKey val="0"/>
+            <c:showVal val="0"/>
+            <c:showCatName val="0"/>
+            <c:showSerName val="0"/>
+            <c:showPercent val="1"/>
+            <c:showBubbleSize val="0"/>
+            <c:showLeaderLines val="1"/>
+          </c:dLbls>
+          <c:cat>
+            <c:strRef>
+              <c:f>Sheet1!$A$2:$A$3</c:f>
+              <c:strCache>
+                <c:ptCount val="2"/>
+                <c:pt idx="0">
+                  <c:v>IT</c:v>
+                </c:pt>
+                <c:pt idx="1">
+                  <c:v>Building</c:v>
+                </c:pt>
+              </c:strCache>
+            </c:strRef>
+          </c:cat>
+          <c:val>
+            <c:numRef>
+              <c:f>Sheet1!$B$2:$B$3</c:f>
+              <c:numCache>
+                <c:formatCode>General</c:formatCode>
+                <c:ptCount val="2"/>
+                <c:pt idx="0">
+                  <c:v>500000.0</c:v>
+                </c:pt>
+                <c:pt idx="1">
+                  <c:v>1200000.0</c:v>
+                </c:pt>
+              </c:numCache>
+            </c:numRef>
+          </c:val>
+        </c:ser>
+      </c:pieChart>
+    </c:plotArea>
+    <c:legend/>
     <c:dispBlanksAs val="gap"/>
   </c:chart>
   <c:txPr>
@@ -1434,6 +5603,128 @@
                 </c:pt>
                 <c:pt idx="3">
                   <c:v>33.33</c:v>
+                </c:pt>
+              </c:numCache>
+            </c:numRef>
+          </c:val>
+        </c:ser>
+        <c:axId val="-2068027336"/>
+        <c:axId val="-2113994440"/>
+      </c:barChart>
+      <c:catAx>
+        <c:axId val="-2068027336"/>
+        <c:scaling>
+          <c:orientation val="minMax"/>
+        </c:scaling>
+        <c:delete val="0"/>
+        <c:axPos val="b"/>
+        <c:majorTickMark val="out"/>
+        <c:minorTickMark val="none"/>
+        <c:tickLblPos val="nextTo"/>
+        <c:crossAx val="-2113994440"/>
+        <c:crosses val="autoZero"/>
+        <c:auto val="1"/>
+        <c:lblAlgn val="ctr"/>
+        <c:lblOffset val="100"/>
+        <c:noMultiLvlLbl val="0"/>
+      </c:catAx>
+      <c:valAx>
+        <c:axId val="-2113994440"/>
+        <c:scaling/>
+        <c:delete val="0"/>
+        <c:axPos val="l"/>
+        <c:majorGridlines/>
+        <c:majorTickMark val="out"/>
+        <c:minorTickMark val="none"/>
+        <c:tickLblPos val="nextTo"/>
+        <c:crossAx val="-2068027336"/>
+        <c:crosses val="autoZero"/>
+      </c:valAx>
+    </c:plotArea>
+    <c:dispBlanksAs val="gap"/>
+  </c:chart>
+  <c:txPr>
+    <a:bodyPr/>
+    <a:lstStyle/>
+    <a:p>
+      <a:pPr>
+        <a:defRPr sz="1800"/>
+      </a:pPr>
+      <a:endParaRPr lang="en-US"/>
+    </a:p>
+  </c:txPr>
+  <c:externalData r:id="rId1">
+    <c:autoUpdate val="0"/>
+  </c:externalData>
+</c:chartSpace>
+</file>
+
+<file path=ppt/charts/chart9.xml><?xml version="1.0" encoding="utf-8"?>
+<c:chartSpace xmlns:c="http://schemas.openxmlformats.org/drawingml/2006/chart" xmlns:a="http://schemas.openxmlformats.org/drawingml/2006/main" xmlns:r="http://schemas.openxmlformats.org/officeDocument/2006/relationships">
+  <c:date1904 val="0"/>
+  <c:chart>
+    <c:autoTitleDeleted val="0"/>
+    <c:plotArea>
+      <c:barChart>
+        <c:barDir val="col"/>
+        <c:grouping val="clustered"/>
+        <c:ser>
+          <c:idx val="0"/>
+          <c:order val="0"/>
+          <c:tx>
+            <c:strRef>
+              <c:f>Sheet1!$B$1</c:f>
+              <c:strCache>
+                <c:ptCount val="1"/>
+                <c:pt idx="0">
+                  <c:v>Total Spend</c:v>
+                </c:pt>
+              </c:strCache>
+            </c:strRef>
+          </c:tx>
+          <c:cat>
+            <c:strRef>
+              <c:f>Sheet1!$A$2:$A$6</c:f>
+              <c:strCache>
+                <c:ptCount val="5"/>
+                <c:pt idx="0">
+                  <c:v>Supplier C</c:v>
+                </c:pt>
+                <c:pt idx="1">
+                  <c:v>Supplier A</c:v>
+                </c:pt>
+                <c:pt idx="2">
+                  <c:v>Supplier E</c:v>
+                </c:pt>
+                <c:pt idx="3">
+                  <c:v>Supplier D</c:v>
+                </c:pt>
+                <c:pt idx="4">
+                  <c:v>Supplier B</c:v>
+                </c:pt>
+              </c:strCache>
+            </c:strRef>
+          </c:cat>
+          <c:val>
+            <c:numRef>
+              <c:f>Sheet1!$B$2:$B$6</c:f>
+              <c:numCache>
+                <c:formatCode>General</c:formatCode>
+                <c:ptCount val="5"/>
+                <c:pt idx="0">
+                  <c:v>115000</c:v>
+                </c:pt>
+                <c:pt idx="1">
+                  <c:v>100000</c:v>
+                </c:pt>
+                <c:pt idx="2">
+                  <c:v>100000</c:v>
+                </c:pt>
+                <c:pt idx="3">
+                  <c:v>80000</c:v>
+                </c:pt>
+                <c:pt idx="4">
+                  <c:v>75000</c:v>
                 </c:pt>
               </c:numCache>
             </c:numRef>
@@ -4565,7 +8856,11 @@
             <a:spAutoFit/>
           </a:bodyPr>
           <a:lstStyle/>
-          <a:p/>
+          <a:p>
+            <a:r>
+              <a:t>Product YOY Revenue Growth % - 2025</a:t>
+            </a:r>
+          </a:p>
         </p:txBody>
       </p:sp>
       <p:graphicFrame>
@@ -4594,7 +8889,7 @@
 </p:sld>
 </file>
 
-<file path=ppt/slides/slide2.xml><?xml version="1.0" encoding="utf-8"?>
+<file path=ppt/slides/slide11.xml><?xml version="1.0" encoding="utf-8"?>
 <p:sld xmlns:a="http://schemas.openxmlformats.org/drawingml/2006/main" xmlns:p="http://schemas.openxmlformats.org/presentationml/2006/main" xmlns:r="http://schemas.openxmlformats.org/officeDocument/2006/relationships">
   <p:cSld>
     <p:spTree>
@@ -4644,7 +8939,7 @@
           <a:lstStyle/>
           <a:p>
             <a:r>
-              <a:t>Revenue &amp; Profit Trend</a:t>
+              <a:t>Top 5 Suppliers - 5 Year Advertising Spend</a:t>
             </a:r>
           </a:p>
         </p:txBody>
@@ -4675,7 +8970,7 @@
 </p:sld>
 </file>
 
-<file path=ppt/slides/slide3.xml><?xml version="1.0" encoding="utf-8"?>
+<file path=ppt/slides/slide12.xml><?xml version="1.0" encoding="utf-8"?>
 <p:sld xmlns:a="http://schemas.openxmlformats.org/drawingml/2006/main" xmlns:p="http://schemas.openxmlformats.org/presentationml/2006/main" xmlns:r="http://schemas.openxmlformats.org/officeDocument/2006/relationships">
   <p:cSld>
     <p:spTree>
@@ -4725,7 +9020,98 @@
           <a:lstStyle/>
           <a:p>
             <a:r>
-              <a:t>Year Over Year Growth %</a:t>
+              <a:t>Total Advertising Expenditure</a:t>
+            </a:r>
+          </a:p>
+        </p:txBody>
+      </p:sp>
+      <p:sp>
+        <p:nvSpPr>
+          <p:cNvPr id="4" name="TextBox 3"/>
+          <p:cNvSpPr txBox="1"/>
+          <p:nvPr/>
+        </p:nvSpPr>
+        <p:spPr>
+          <a:xfrm>
+            <a:off x="1828800" y="1828800"/>
+            <a:ext cx="5486400" cy="2743200"/>
+          </a:xfrm>
+          <a:prstGeom prst="rect">
+            <a:avLst/>
+          </a:prstGeom>
+          <a:noFill/>
+        </p:spPr>
+        <p:txBody>
+          <a:bodyPr wrap="none">
+            <a:spAutoFit/>
+          </a:bodyPr>
+          <a:lstStyle/>
+          <a:p>
+            <a:r>
+              <a:t>Total 5-Year Advertising Spend: 470,000.00</a:t>
+            </a:r>
+          </a:p>
+        </p:txBody>
+      </p:sp>
+    </p:spTree>
+  </p:cSld>
+  <p:clrMapOvr>
+    <a:masterClrMapping/>
+  </p:clrMapOvr>
+</p:sld>
+</file>
+
+<file path=ppt/slides/slide13.xml><?xml version="1.0" encoding="utf-8"?>
+<p:sld xmlns:a="http://schemas.openxmlformats.org/drawingml/2006/main" xmlns:p="http://schemas.openxmlformats.org/presentationml/2006/main" xmlns:r="http://schemas.openxmlformats.org/officeDocument/2006/relationships">
+  <p:cSld>
+    <p:spTree>
+      <p:nvGrpSpPr>
+        <p:cNvPr id="1" name=""/>
+        <p:cNvGrpSpPr/>
+        <p:nvPr/>
+      </p:nvGrpSpPr>
+      <p:grpSpPr/>
+      <p:sp>
+        <p:nvSpPr>
+          <p:cNvPr id="2" name="Title 1"/>
+          <p:cNvSpPr>
+            <a:spLocks noGrp="1"/>
+          </p:cNvSpPr>
+          <p:nvPr>
+            <p:ph type="title"/>
+          </p:nvPr>
+        </p:nvSpPr>
+        <p:spPr/>
+        <p:txBody>
+          <a:bodyPr/>
+          <a:lstStyle/>
+          <a:p/>
+        </p:txBody>
+      </p:sp>
+      <p:sp>
+        <p:nvSpPr>
+          <p:cNvPr id="3" name="TextBox 2"/>
+          <p:cNvSpPr txBox="1"/>
+          <p:nvPr/>
+        </p:nvSpPr>
+        <p:spPr>
+          <a:xfrm>
+            <a:off x="457200" y="182880"/>
+            <a:ext cx="8229600" cy="457200"/>
+          </a:xfrm>
+          <a:prstGeom prst="rect">
+            <a:avLst/>
+          </a:prstGeom>
+          <a:noFill/>
+        </p:spPr>
+        <p:txBody>
+          <a:bodyPr wrap="none">
+            <a:spAutoFit/>
+          </a:bodyPr>
+          <a:lstStyle/>
+          <a:p>
+            <a:r>
+              <a:t>Monthly Advertising Trend</a:t>
             </a:r>
           </a:p>
         </p:txBody>
@@ -4741,6 +9127,1802 @@
         <p:xfrm>
           <a:off x="914400" y="914400"/>
           <a:ext cx="7315200" cy="4114800"/>
+        </p:xfrm>
+        <a:graphic>
+          <a:graphicData uri="http://schemas.openxmlformats.org/drawingml/2006/chart">
+            <c:chart xmlns:c="http://schemas.openxmlformats.org/drawingml/2006/chart" r:id="rId2"/>
+          </a:graphicData>
+        </a:graphic>
+      </p:graphicFrame>
+    </p:spTree>
+  </p:cSld>
+  <p:clrMapOvr>
+    <a:masterClrMapping/>
+  </p:clrMapOvr>
+</p:sld>
+</file>
+
+<file path=ppt/slides/slide14.xml><?xml version="1.0" encoding="utf-8"?>
+<p:sld xmlns:a="http://schemas.openxmlformats.org/drawingml/2006/main" xmlns:p="http://schemas.openxmlformats.org/presentationml/2006/main" xmlns:r="http://schemas.openxmlformats.org/officeDocument/2006/relationships">
+  <p:cSld>
+    <p:spTree>
+      <p:nvGrpSpPr>
+        <p:cNvPr id="1" name=""/>
+        <p:cNvGrpSpPr/>
+        <p:nvPr/>
+      </p:nvGrpSpPr>
+      <p:grpSpPr/>
+      <p:sp>
+        <p:nvSpPr>
+          <p:cNvPr id="2" name="Title 1"/>
+          <p:cNvSpPr>
+            <a:spLocks noGrp="1"/>
+          </p:cNvSpPr>
+          <p:nvPr>
+            <p:ph type="title"/>
+          </p:nvPr>
+        </p:nvSpPr>
+        <p:spPr/>
+        <p:txBody>
+          <a:bodyPr/>
+          <a:lstStyle/>
+          <a:p/>
+        </p:txBody>
+      </p:sp>
+      <p:sp>
+        <p:nvSpPr>
+          <p:cNvPr id="3" name="TextBox 2"/>
+          <p:cNvSpPr txBox="1"/>
+          <p:nvPr/>
+        </p:nvSpPr>
+        <p:spPr>
+          <a:xfrm>
+            <a:off x="457200" y="182880"/>
+            <a:ext cx="8229600" cy="457200"/>
+          </a:xfrm>
+          <a:prstGeom prst="rect">
+            <a:avLst/>
+          </a:prstGeom>
+          <a:noFill/>
+        </p:spPr>
+        <p:txBody>
+          <a:bodyPr wrap="none">
+            <a:spAutoFit/>
+          </a:bodyPr>
+          <a:lstStyle/>
+          <a:p>
+            <a:r>
+              <a:t>Quarterly Advertising Trend</a:t>
+            </a:r>
+          </a:p>
+        </p:txBody>
+      </p:sp>
+      <p:graphicFrame>
+        <p:nvGraphicFramePr>
+          <p:cNvPr id="4" name="Chart 3"/>
+          <p:cNvGraphicFramePr>
+            <a:graphicFrameLocks noGrp="1"/>
+          </p:cNvGraphicFramePr>
+          <p:nvPr/>
+        </p:nvGraphicFramePr>
+        <p:xfrm>
+          <a:off x="914400" y="914400"/>
+          <a:ext cx="7315200" cy="4114800"/>
+        </p:xfrm>
+        <a:graphic>
+          <a:graphicData uri="http://schemas.openxmlformats.org/drawingml/2006/chart">
+            <c:chart xmlns:c="http://schemas.openxmlformats.org/drawingml/2006/chart" r:id="rId2"/>
+          </a:graphicData>
+        </a:graphic>
+      </p:graphicFrame>
+    </p:spTree>
+  </p:cSld>
+  <p:clrMapOvr>
+    <a:masterClrMapping/>
+  </p:clrMapOvr>
+</p:sld>
+</file>
+
+<file path=ppt/slides/slide15.xml><?xml version="1.0" encoding="utf-8"?>
+<p:sld xmlns:a="http://schemas.openxmlformats.org/drawingml/2006/main" xmlns:p="http://schemas.openxmlformats.org/presentationml/2006/main" xmlns:r="http://schemas.openxmlformats.org/officeDocument/2006/relationships">
+  <p:cSld>
+    <p:spTree>
+      <p:nvGrpSpPr>
+        <p:cNvPr id="1" name=""/>
+        <p:cNvGrpSpPr/>
+        <p:nvPr/>
+      </p:nvGrpSpPr>
+      <p:grpSpPr/>
+      <p:sp>
+        <p:nvSpPr>
+          <p:cNvPr id="2" name="Title 1"/>
+          <p:cNvSpPr>
+            <a:spLocks noGrp="1"/>
+          </p:cNvSpPr>
+          <p:nvPr>
+            <p:ph type="title"/>
+          </p:nvPr>
+        </p:nvSpPr>
+        <p:spPr/>
+        <p:txBody>
+          <a:bodyPr/>
+          <a:lstStyle/>
+          <a:p/>
+        </p:txBody>
+      </p:sp>
+      <p:sp>
+        <p:nvSpPr>
+          <p:cNvPr id="3" name="TextBox 2"/>
+          <p:cNvSpPr txBox="1"/>
+          <p:nvPr/>
+        </p:nvSpPr>
+        <p:spPr>
+          <a:xfrm>
+            <a:off x="457200" y="182880"/>
+            <a:ext cx="8229600" cy="457200"/>
+          </a:xfrm>
+          <a:prstGeom prst="rect">
+            <a:avLst/>
+          </a:prstGeom>
+          <a:noFill/>
+        </p:spPr>
+        <p:txBody>
+          <a:bodyPr wrap="none">
+            <a:spAutoFit/>
+          </a:bodyPr>
+          <a:lstStyle/>
+          <a:p>
+            <a:r>
+              <a:t>Supplier Contribution %</a:t>
+            </a:r>
+          </a:p>
+        </p:txBody>
+      </p:sp>
+      <p:graphicFrame>
+        <p:nvGraphicFramePr>
+          <p:cNvPr id="4" name="Chart 3"/>
+          <p:cNvGraphicFramePr>
+            <a:graphicFrameLocks noGrp="1"/>
+          </p:cNvGraphicFramePr>
+          <p:nvPr/>
+        </p:nvGraphicFramePr>
+        <p:xfrm>
+          <a:off x="1828800" y="914400"/>
+          <a:ext cx="5486400" cy="4572000"/>
+        </p:xfrm>
+        <a:graphic>
+          <a:graphicData uri="http://schemas.openxmlformats.org/drawingml/2006/chart">
+            <c:chart xmlns:c="http://schemas.openxmlformats.org/drawingml/2006/chart" r:id="rId2"/>
+          </a:graphicData>
+        </a:graphic>
+      </p:graphicFrame>
+    </p:spTree>
+  </p:cSld>
+  <p:clrMapOvr>
+    <a:masterClrMapping/>
+  </p:clrMapOvr>
+</p:sld>
+</file>
+
+<file path=ppt/slides/slide16.xml><?xml version="1.0" encoding="utf-8"?>
+<p:sld xmlns:a="http://schemas.openxmlformats.org/drawingml/2006/main" xmlns:p="http://schemas.openxmlformats.org/presentationml/2006/main" xmlns:r="http://schemas.openxmlformats.org/officeDocument/2006/relationships">
+  <p:cSld>
+    <p:spTree>
+      <p:nvGrpSpPr>
+        <p:cNvPr id="1" name=""/>
+        <p:cNvGrpSpPr/>
+        <p:nvPr/>
+      </p:nvGrpSpPr>
+      <p:grpSpPr/>
+      <p:sp>
+        <p:nvSpPr>
+          <p:cNvPr id="2" name="Title 1"/>
+          <p:cNvSpPr>
+            <a:spLocks noGrp="1"/>
+          </p:cNvSpPr>
+          <p:nvPr>
+            <p:ph type="title"/>
+          </p:nvPr>
+        </p:nvSpPr>
+        <p:spPr/>
+        <p:txBody>
+          <a:bodyPr/>
+          <a:lstStyle/>
+          <a:p>
+            <a:r>
+              <a:t>Full Year 2025 Variance</a:t>
+            </a:r>
+          </a:p>
+        </p:txBody>
+      </p:sp>
+      <p:graphicFrame>
+        <p:nvGraphicFramePr>
+          <p:cNvPr id="3" name="Chart 2"/>
+          <p:cNvGraphicFramePr>
+            <a:graphicFrameLocks noGrp="1"/>
+          </p:cNvGraphicFramePr>
+          <p:nvPr/>
+        </p:nvGraphicFramePr>
+        <p:xfrm>
+          <a:off x="914400" y="1371600"/>
+          <a:ext cx="7315200" cy="4114800"/>
+        </p:xfrm>
+        <a:graphic>
+          <a:graphicData uri="http://schemas.openxmlformats.org/drawingml/2006/chart">
+            <c:chart xmlns:c="http://schemas.openxmlformats.org/drawingml/2006/chart" r:id="rId2"/>
+          </a:graphicData>
+        </a:graphic>
+      </p:graphicFrame>
+    </p:spTree>
+  </p:cSld>
+  <p:clrMapOvr>
+    <a:masterClrMapping/>
+  </p:clrMapOvr>
+</p:sld>
+</file>
+
+<file path=ppt/slides/slide17.xml><?xml version="1.0" encoding="utf-8"?>
+<p:sld xmlns:a="http://schemas.openxmlformats.org/drawingml/2006/main" xmlns:p="http://schemas.openxmlformats.org/presentationml/2006/main" xmlns:r="http://schemas.openxmlformats.org/officeDocument/2006/relationships">
+  <p:cSld>
+    <p:spTree>
+      <p:nvGrpSpPr>
+        <p:cNvPr id="1" name=""/>
+        <p:cNvGrpSpPr/>
+        <p:nvPr/>
+      </p:nvGrpSpPr>
+      <p:grpSpPr/>
+      <p:sp>
+        <p:nvSpPr>
+          <p:cNvPr id="2" name="Title 1"/>
+          <p:cNvSpPr>
+            <a:spLocks noGrp="1"/>
+          </p:cNvSpPr>
+          <p:nvPr>
+            <p:ph type="title"/>
+          </p:nvPr>
+        </p:nvSpPr>
+        <p:spPr/>
+        <p:txBody>
+          <a:bodyPr/>
+          <a:lstStyle/>
+          <a:p>
+            <a:r>
+              <a:t>Q1 2025 Variance Waterfall</a:t>
+            </a:r>
+          </a:p>
+        </p:txBody>
+      </p:sp>
+      <p:graphicFrame>
+        <p:nvGraphicFramePr>
+          <p:cNvPr id="3" name="Chart 2"/>
+          <p:cNvGraphicFramePr>
+            <a:graphicFrameLocks noGrp="1"/>
+          </p:cNvGraphicFramePr>
+          <p:nvPr/>
+        </p:nvGraphicFramePr>
+        <p:xfrm>
+          <a:off x="914400" y="1371600"/>
+          <a:ext cx="7315200" cy="4114800"/>
+        </p:xfrm>
+        <a:graphic>
+          <a:graphicData uri="http://schemas.openxmlformats.org/drawingml/2006/chart">
+            <c:chart xmlns:c="http://schemas.openxmlformats.org/drawingml/2006/chart" r:id="rId2"/>
+          </a:graphicData>
+        </a:graphic>
+      </p:graphicFrame>
+    </p:spTree>
+  </p:cSld>
+  <p:clrMapOvr>
+    <a:masterClrMapping/>
+  </p:clrMapOvr>
+</p:sld>
+</file>
+
+<file path=ppt/slides/slide18.xml><?xml version="1.0" encoding="utf-8"?>
+<p:sld xmlns:a="http://schemas.openxmlformats.org/drawingml/2006/main" xmlns:p="http://schemas.openxmlformats.org/presentationml/2006/main" xmlns:r="http://schemas.openxmlformats.org/officeDocument/2006/relationships">
+  <p:cSld>
+    <p:spTree>
+      <p:nvGrpSpPr>
+        <p:cNvPr id="1" name=""/>
+        <p:cNvGrpSpPr/>
+        <p:nvPr/>
+      </p:nvGrpSpPr>
+      <p:grpSpPr/>
+      <p:sp>
+        <p:nvSpPr>
+          <p:cNvPr id="2" name="Title 1"/>
+          <p:cNvSpPr>
+            <a:spLocks noGrp="1"/>
+          </p:cNvSpPr>
+          <p:nvPr>
+            <p:ph type="title"/>
+          </p:nvPr>
+        </p:nvSpPr>
+        <p:spPr/>
+        <p:txBody>
+          <a:bodyPr/>
+          <a:lstStyle/>
+          <a:p/>
+        </p:txBody>
+      </p:sp>
+      <p:sp>
+        <p:nvSpPr>
+          <p:cNvPr id="3" name="TextBox 2"/>
+          <p:cNvSpPr txBox="1"/>
+          <p:nvPr/>
+        </p:nvSpPr>
+        <p:spPr>
+          <a:xfrm>
+            <a:off x="457200" y="182880"/>
+            <a:ext cx="8229600" cy="457200"/>
+          </a:xfrm>
+          <a:prstGeom prst="rect">
+            <a:avLst/>
+          </a:prstGeom>
+          <a:noFill/>
+        </p:spPr>
+        <p:txBody>
+          <a:bodyPr wrap="none">
+            <a:spAutoFit/>
+          </a:bodyPr>
+          <a:lstStyle/>
+          <a:p>
+            <a:r>
+              <a:t>Accrual Report</a:t>
+            </a:r>
+          </a:p>
+        </p:txBody>
+      </p:sp>
+      <p:sp>
+        <p:nvSpPr>
+          <p:cNvPr id="4" name="TextBox 3"/>
+          <p:cNvSpPr txBox="1"/>
+          <p:nvPr/>
+        </p:nvSpPr>
+        <p:spPr>
+          <a:xfrm>
+            <a:off x="914400" y="914400"/>
+            <a:ext cx="7315200" cy="2286000"/>
+          </a:xfrm>
+          <a:prstGeom prst="rect">
+            <a:avLst/>
+          </a:prstGeom>
+          <a:noFill/>
+        </p:spPr>
+        <p:txBody>
+          <a:bodyPr wrap="none">
+            <a:spAutoFit/>
+          </a:bodyPr>
+          <a:lstStyle/>
+          <a:p>
+            <a:r>
+              <a:t>Total Accrual Amount: 65,000</a:t>
+            </a:r>
+          </a:p>
+          <a:p>
+            <a:r>
+              <a:t>Total Expense Amount: 470,000</a:t>
+            </a:r>
+          </a:p>
+          <a:p>
+            <a:r>
+              <a:t>Accrual % of Total Expense: 13.83%</a:t>
+            </a:r>
+          </a:p>
+          <a:p>
+            <a:r>
+              <a:t>Top 5 Suppliers by Accrual:</a:t>
+            </a:r>
+          </a:p>
+          <a:p>
+            <a:r>
+              <a:t>Mobitel: 20,000</a:t>
+            </a:r>
+          </a:p>
+          <a:p>
+            <a:r>
+              <a:t>Dialog Telecom: 15,000</a:t>
+            </a:r>
+          </a:p>
+          <a:p>
+            <a:r>
+              <a:t>Hutch Telecom: 12,000</a:t>
+            </a:r>
+          </a:p>
+          <a:p>
+            <a:r>
+              <a:t>SLT Broadband: 10,000</a:t>
+            </a:r>
+          </a:p>
+          <a:p>
+            <a:r>
+              <a:t>Etisalat: 8,000</a:t>
+            </a:r>
+          </a:p>
+        </p:txBody>
+      </p:sp>
+    </p:spTree>
+  </p:cSld>
+  <p:clrMapOvr>
+    <a:masterClrMapping/>
+  </p:clrMapOvr>
+</p:sld>
+</file>
+
+<file path=ppt/slides/slide19.xml><?xml version="1.0" encoding="utf-8"?>
+<p:sld xmlns:a="http://schemas.openxmlformats.org/drawingml/2006/main" xmlns:p="http://schemas.openxmlformats.org/presentationml/2006/main" xmlns:r="http://schemas.openxmlformats.org/officeDocument/2006/relationships">
+  <p:cSld>
+    <p:spTree>
+      <p:nvGrpSpPr>
+        <p:cNvPr id="1" name=""/>
+        <p:cNvGrpSpPr/>
+        <p:nvPr/>
+      </p:nvGrpSpPr>
+      <p:grpSpPr/>
+      <p:sp>
+        <p:nvSpPr>
+          <p:cNvPr id="2" name="Title 1"/>
+          <p:cNvSpPr>
+            <a:spLocks noGrp="1"/>
+          </p:cNvSpPr>
+          <p:nvPr>
+            <p:ph type="title"/>
+          </p:nvPr>
+        </p:nvSpPr>
+        <p:spPr/>
+        <p:txBody>
+          <a:bodyPr/>
+          <a:lstStyle/>
+          <a:p/>
+        </p:txBody>
+      </p:sp>
+      <p:sp>
+        <p:nvSpPr>
+          <p:cNvPr id="3" name="TextBox 2"/>
+          <p:cNvSpPr txBox="1"/>
+          <p:nvPr/>
+        </p:nvSpPr>
+        <p:spPr>
+          <a:xfrm>
+            <a:off x="457200" y="182880"/>
+            <a:ext cx="8229600" cy="457200"/>
+          </a:xfrm>
+          <a:prstGeom prst="rect">
+            <a:avLst/>
+          </a:prstGeom>
+          <a:noFill/>
+        </p:spPr>
+        <p:txBody>
+          <a:bodyPr wrap="none">
+            <a:spAutoFit/>
+          </a:bodyPr>
+          <a:lstStyle/>
+          <a:p>
+            <a:r>
+              <a:t>Accrual / Circuit Report</a:t>
+            </a:r>
+          </a:p>
+        </p:txBody>
+      </p:sp>
+      <p:sp>
+        <p:nvSpPr>
+          <p:cNvPr id="4" name="TextBox 3"/>
+          <p:cNvSpPr txBox="1"/>
+          <p:nvPr/>
+        </p:nvSpPr>
+        <p:spPr>
+          <a:xfrm>
+            <a:off x="914400" y="914400"/>
+            <a:ext cx="7315200" cy="1828800"/>
+          </a:xfrm>
+          <a:prstGeom prst="rect">
+            <a:avLst/>
+          </a:prstGeom>
+          <a:noFill/>
+        </p:spPr>
+        <p:txBody>
+          <a:bodyPr wrap="none">
+            <a:spAutoFit/>
+          </a:bodyPr>
+          <a:lstStyle/>
+          <a:p>
+            <a:r>
+              <a:t>Total Accrual: 65,000</a:t>
+            </a:r>
+          </a:p>
+          <a:p>
+            <a:r>
+              <a:t>Total Circuit Amount: 65,000</a:t>
+            </a:r>
+          </a:p>
+          <a:p>
+            <a:r>
+              <a:t>Accrual %: 13.83%</a:t>
+            </a:r>
+          </a:p>
+        </p:txBody>
+      </p:sp>
+      <p:graphicFrame>
+        <p:nvGraphicFramePr>
+          <p:cNvPr id="5" name="Chart 4"/>
+          <p:cNvGraphicFramePr>
+            <a:graphicFrameLocks noGrp="1"/>
+          </p:cNvGraphicFramePr>
+          <p:nvPr/>
+        </p:nvGraphicFramePr>
+        <p:xfrm>
+          <a:off x="914400" y="2743200"/>
+          <a:ext cx="3657600" cy="3200400"/>
+        </p:xfrm>
+        <a:graphic>
+          <a:graphicData uri="http://schemas.openxmlformats.org/drawingml/2006/chart">
+            <c:chart xmlns:c="http://schemas.openxmlformats.org/drawingml/2006/chart" r:id="rId2"/>
+          </a:graphicData>
+        </a:graphic>
+      </p:graphicFrame>
+      <p:graphicFrame>
+        <p:nvGraphicFramePr>
+          <p:cNvPr id="6" name="Chart 5"/>
+          <p:cNvGraphicFramePr>
+            <a:graphicFrameLocks noGrp="1"/>
+          </p:cNvGraphicFramePr>
+          <p:nvPr/>
+        </p:nvGraphicFramePr>
+        <p:xfrm>
+          <a:off x="4572000" y="2743200"/>
+          <a:ext cx="3657600" cy="3200400"/>
+        </p:xfrm>
+        <a:graphic>
+          <a:graphicData uri="http://schemas.openxmlformats.org/drawingml/2006/chart">
+            <c:chart xmlns:c="http://schemas.openxmlformats.org/drawingml/2006/chart" r:id="rId3"/>
+          </a:graphicData>
+        </a:graphic>
+      </p:graphicFrame>
+    </p:spTree>
+  </p:cSld>
+  <p:clrMapOvr>
+    <a:masterClrMapping/>
+  </p:clrMapOvr>
+</p:sld>
+</file>
+
+<file path=ppt/slides/slide2.xml><?xml version="1.0" encoding="utf-8"?>
+<p:sld xmlns:a="http://schemas.openxmlformats.org/drawingml/2006/main" xmlns:p="http://schemas.openxmlformats.org/presentationml/2006/main" xmlns:r="http://schemas.openxmlformats.org/officeDocument/2006/relationships">
+  <p:cSld>
+    <p:spTree>
+      <p:nvGrpSpPr>
+        <p:cNvPr id="1" name=""/>
+        <p:cNvGrpSpPr/>
+        <p:nvPr/>
+      </p:nvGrpSpPr>
+      <p:grpSpPr/>
+      <p:sp>
+        <p:nvSpPr>
+          <p:cNvPr id="2" name="Title 1"/>
+          <p:cNvSpPr>
+            <a:spLocks noGrp="1"/>
+          </p:cNvSpPr>
+          <p:nvPr>
+            <p:ph type="title"/>
+          </p:nvPr>
+        </p:nvSpPr>
+        <p:spPr/>
+        <p:txBody>
+          <a:bodyPr/>
+          <a:lstStyle/>
+          <a:p/>
+        </p:txBody>
+      </p:sp>
+      <p:sp>
+        <p:nvSpPr>
+          <p:cNvPr id="3" name="TextBox 2"/>
+          <p:cNvSpPr txBox="1"/>
+          <p:nvPr/>
+        </p:nvSpPr>
+        <p:spPr>
+          <a:xfrm>
+            <a:off x="457200" y="182880"/>
+            <a:ext cx="8229600" cy="457200"/>
+          </a:xfrm>
+          <a:prstGeom prst="rect">
+            <a:avLst/>
+          </a:prstGeom>
+          <a:noFill/>
+        </p:spPr>
+        <p:txBody>
+          <a:bodyPr wrap="none">
+            <a:spAutoFit/>
+          </a:bodyPr>
+          <a:lstStyle/>
+          <a:p>
+            <a:r>
+              <a:t>Revenue &amp; Profit Trend</a:t>
+            </a:r>
+          </a:p>
+        </p:txBody>
+      </p:sp>
+      <p:graphicFrame>
+        <p:nvGraphicFramePr>
+          <p:cNvPr id="4" name="Chart 3"/>
+          <p:cNvGraphicFramePr>
+            <a:graphicFrameLocks noGrp="1"/>
+          </p:cNvGraphicFramePr>
+          <p:nvPr/>
+        </p:nvGraphicFramePr>
+        <p:xfrm>
+          <a:off x="914400" y="914400"/>
+          <a:ext cx="7315200" cy="4114800"/>
+        </p:xfrm>
+        <a:graphic>
+          <a:graphicData uri="http://schemas.openxmlformats.org/drawingml/2006/chart">
+            <c:chart xmlns:c="http://schemas.openxmlformats.org/drawingml/2006/chart" r:id="rId2"/>
+          </a:graphicData>
+        </a:graphic>
+      </p:graphicFrame>
+    </p:spTree>
+  </p:cSld>
+  <p:clrMapOvr>
+    <a:masterClrMapping/>
+  </p:clrMapOvr>
+</p:sld>
+</file>
+
+<file path=ppt/slides/slide20.xml><?xml version="1.0" encoding="utf-8"?>
+<p:sld xmlns:a="http://schemas.openxmlformats.org/drawingml/2006/main" xmlns:p="http://schemas.openxmlformats.org/presentationml/2006/main" xmlns:r="http://schemas.openxmlformats.org/officeDocument/2006/relationships">
+  <p:cSld>
+    <p:spTree>
+      <p:nvGrpSpPr>
+        <p:cNvPr id="1" name=""/>
+        <p:cNvGrpSpPr/>
+        <p:nvPr/>
+      </p:nvGrpSpPr>
+      <p:grpSpPr/>
+      <p:sp>
+        <p:nvSpPr>
+          <p:cNvPr id="2" name="Title 1"/>
+          <p:cNvSpPr>
+            <a:spLocks noGrp="1"/>
+          </p:cNvSpPr>
+          <p:nvPr>
+            <p:ph type="title"/>
+          </p:nvPr>
+        </p:nvSpPr>
+        <p:spPr/>
+        <p:txBody>
+          <a:bodyPr/>
+          <a:lstStyle/>
+          <a:p/>
+        </p:txBody>
+      </p:sp>
+      <p:sp>
+        <p:nvSpPr>
+          <p:cNvPr id="3" name="TextBox 2"/>
+          <p:cNvSpPr txBox="1"/>
+          <p:nvPr/>
+        </p:nvSpPr>
+        <p:spPr>
+          <a:xfrm>
+            <a:off x="457200" y="182880"/>
+            <a:ext cx="8229600" cy="457200"/>
+          </a:xfrm>
+          <a:prstGeom prst="rect">
+            <a:avLst/>
+          </a:prstGeom>
+          <a:noFill/>
+        </p:spPr>
+        <p:txBody>
+          <a:bodyPr wrap="none">
+            <a:spAutoFit/>
+          </a:bodyPr>
+          <a:lstStyle/>
+          <a:p>
+            <a:r>
+              <a:t>FX Revaluation Report</a:t>
+            </a:r>
+          </a:p>
+        </p:txBody>
+      </p:sp>
+      <p:sp>
+        <p:nvSpPr>
+          <p:cNvPr id="4" name="TextBox 3"/>
+          <p:cNvSpPr txBox="1"/>
+          <p:nvPr/>
+        </p:nvSpPr>
+        <p:spPr>
+          <a:xfrm>
+            <a:off x="731520" y="914400"/>
+            <a:ext cx="7315200" cy="1828800"/>
+          </a:xfrm>
+          <a:prstGeom prst="rect">
+            <a:avLst/>
+          </a:prstGeom>
+          <a:noFill/>
+        </p:spPr>
+        <p:txBody>
+          <a:bodyPr wrap="none">
+            <a:spAutoFit/>
+          </a:bodyPr>
+          <a:lstStyle/>
+          <a:p>
+            <a:r>
+              <a:t>Total Balance (LKR): 178,927,800</a:t>
+            </a:r>
+          </a:p>
+          <a:p>
+            <a:r>
+              <a:t>Total FX Revaluation Gain/Loss: 23,715,800</a:t>
+            </a:r>
+          </a:p>
+          <a:p>
+            <a:r>
+              <a:t>Top 5 Suppliers by FX Gain/Loss:</a:t>
+            </a:r>
+          </a:p>
+          <a:p>
+            <a:r>
+              <a:t>Supplier C: 6,726,150</a:t>
+            </a:r>
+          </a:p>
+          <a:p>
+            <a:r>
+              <a:t>Supplier E: 4,844,000</a:t>
+            </a:r>
+          </a:p>
+          <a:p>
+            <a:r>
+              <a:t>Supplier D: 4,360,800</a:t>
+            </a:r>
+          </a:p>
+          <a:p>
+            <a:r>
+              <a:t>Supplier A: 4,317,250</a:t>
+            </a:r>
+          </a:p>
+          <a:p>
+            <a:r>
+              <a:t>Supplier B: 3,467,600</a:t>
+            </a:r>
+          </a:p>
+        </p:txBody>
+      </p:sp>
+      <p:graphicFrame>
+        <p:nvGraphicFramePr>
+          <p:cNvPr id="5" name="Chart 4"/>
+          <p:cNvGraphicFramePr>
+            <a:graphicFrameLocks noGrp="1"/>
+          </p:cNvGraphicFramePr>
+          <p:nvPr/>
+        </p:nvGraphicFramePr>
+        <p:xfrm>
+          <a:off x="731520" y="3200400"/>
+          <a:ext cx="3840480" cy="2743200"/>
+        </p:xfrm>
+        <a:graphic>
+          <a:graphicData uri="http://schemas.openxmlformats.org/drawingml/2006/chart">
+            <c:chart xmlns:c="http://schemas.openxmlformats.org/drawingml/2006/chart" r:id="rId2"/>
+          </a:graphicData>
+        </a:graphic>
+      </p:graphicFrame>
+      <p:graphicFrame>
+        <p:nvGraphicFramePr>
+          <p:cNvPr id="6" name="Chart 5"/>
+          <p:cNvGraphicFramePr>
+            <a:graphicFrameLocks noGrp="1"/>
+          </p:cNvGraphicFramePr>
+          <p:nvPr/>
+        </p:nvGraphicFramePr>
+        <p:xfrm>
+          <a:off x="4754880" y="3200400"/>
+          <a:ext cx="3840480" cy="2743200"/>
+        </p:xfrm>
+        <a:graphic>
+          <a:graphicData uri="http://schemas.openxmlformats.org/drawingml/2006/chart">
+            <c:chart xmlns:c="http://schemas.openxmlformats.org/drawingml/2006/chart" r:id="rId3"/>
+          </a:graphicData>
+        </a:graphic>
+      </p:graphicFrame>
+    </p:spTree>
+  </p:cSld>
+  <p:clrMapOvr>
+    <a:masterClrMapping/>
+  </p:clrMapOvr>
+</p:sld>
+</file>
+
+<file path=ppt/slides/slide21.xml><?xml version="1.0" encoding="utf-8"?>
+<p:sld xmlns:a="http://schemas.openxmlformats.org/drawingml/2006/main" xmlns:p="http://schemas.openxmlformats.org/presentationml/2006/main" xmlns:r="http://schemas.openxmlformats.org/officeDocument/2006/relationships">
+  <p:cSld>
+    <p:spTree>
+      <p:nvGrpSpPr>
+        <p:cNvPr id="1" name=""/>
+        <p:cNvGrpSpPr/>
+        <p:nvPr/>
+      </p:nvGrpSpPr>
+      <p:grpSpPr/>
+      <p:sp>
+        <p:nvSpPr>
+          <p:cNvPr id="2" name="Title 1"/>
+          <p:cNvSpPr>
+            <a:spLocks noGrp="1"/>
+          </p:cNvSpPr>
+          <p:nvPr>
+            <p:ph type="title"/>
+          </p:nvPr>
+        </p:nvSpPr>
+        <p:spPr/>
+        <p:txBody>
+          <a:bodyPr/>
+          <a:lstStyle/>
+          <a:p/>
+        </p:txBody>
+      </p:sp>
+      <p:sp>
+        <p:nvSpPr>
+          <p:cNvPr id="3" name="TextBox 2"/>
+          <p:cNvSpPr txBox="1"/>
+          <p:nvPr/>
+        </p:nvSpPr>
+        <p:spPr>
+          <a:xfrm>
+            <a:off x="457200" y="182880"/>
+            <a:ext cx="8229600" cy="457200"/>
+          </a:xfrm>
+          <a:prstGeom prst="rect">
+            <a:avLst/>
+          </a:prstGeom>
+          <a:noFill/>
+        </p:spPr>
+        <p:txBody>
+          <a:bodyPr wrap="none">
+            <a:spAutoFit/>
+          </a:bodyPr>
+          <a:lstStyle/>
+          <a:p>
+            <a:r>
+              <a:t>Net Debtor Aging Report</a:t>
+            </a:r>
+          </a:p>
+        </p:txBody>
+      </p:sp>
+      <p:sp>
+        <p:nvSpPr>
+          <p:cNvPr id="4" name="TextBox 3"/>
+          <p:cNvSpPr txBox="1"/>
+          <p:nvPr/>
+        </p:nvSpPr>
+        <p:spPr>
+          <a:xfrm>
+            <a:off x="914400" y="914400"/>
+            <a:ext cx="7315200" cy="1828800"/>
+          </a:xfrm>
+          <a:prstGeom prst="rect">
+            <a:avLst/>
+          </a:prstGeom>
+          <a:noFill/>
+        </p:spPr>
+        <p:txBody>
+          <a:bodyPr wrap="none">
+            <a:spAutoFit/>
+          </a:bodyPr>
+          <a:lstStyle/>
+          <a:p>
+            <a:r>
+              <a:t>Debtor Aging Summary per Operator</a:t>
+            </a:r>
+          </a:p>
+          <a:p>
+            <a:r>
+              <a:t>Airtel: 0-30 Days: 0, 31-60 Days: 0, 61-90 Days: 0, 90+ Days: -2,000</a:t>
+            </a:r>
+          </a:p>
+          <a:p>
+            <a:r>
+              <a:t>Dialog: 0-30 Days: 0, 31-60 Days: 0, 61-90 Days: 0, 90+ Days: 7,000</a:t>
+            </a:r>
+          </a:p>
+          <a:p>
+            <a:r>
+              <a:t>Mobitel: 0-30 Days: 0, 31-60 Days: 0, 61-90 Days: 0, 90+ Days: 10,000</a:t>
+            </a:r>
+          </a:p>
+        </p:txBody>
+      </p:sp>
+      <p:graphicFrame>
+        <p:nvGraphicFramePr>
+          <p:cNvPr id="5" name="Chart 4"/>
+          <p:cNvGraphicFramePr>
+            <a:graphicFrameLocks noGrp="1"/>
+          </p:cNvGraphicFramePr>
+          <p:nvPr/>
+        </p:nvGraphicFramePr>
+        <p:xfrm>
+          <a:off x="914400" y="2743200"/>
+          <a:ext cx="7315200" cy="4114800"/>
+        </p:xfrm>
+        <a:graphic>
+          <a:graphicData uri="http://schemas.openxmlformats.org/drawingml/2006/chart">
+            <c:chart xmlns:c="http://schemas.openxmlformats.org/drawingml/2006/chart" r:id="rId2"/>
+          </a:graphicData>
+        </a:graphic>
+      </p:graphicFrame>
+    </p:spTree>
+  </p:cSld>
+  <p:clrMapOvr>
+    <a:masterClrMapping/>
+  </p:clrMapOvr>
+</p:sld>
+</file>
+
+<file path=ppt/slides/slide22.xml><?xml version="1.0" encoding="utf-8"?>
+<p:sld xmlns:a="http://schemas.openxmlformats.org/drawingml/2006/main" xmlns:p="http://schemas.openxmlformats.org/presentationml/2006/main" xmlns:r="http://schemas.openxmlformats.org/officeDocument/2006/relationships">
+  <p:cSld>
+    <p:spTree>
+      <p:nvGrpSpPr>
+        <p:cNvPr id="1" name=""/>
+        <p:cNvGrpSpPr/>
+        <p:nvPr/>
+      </p:nvGrpSpPr>
+      <p:grpSpPr/>
+      <p:sp>
+        <p:nvSpPr>
+          <p:cNvPr id="2" name="Title 1"/>
+          <p:cNvSpPr>
+            <a:spLocks noGrp="1"/>
+          </p:cNvSpPr>
+          <p:nvPr>
+            <p:ph type="title"/>
+          </p:nvPr>
+        </p:nvSpPr>
+        <p:spPr/>
+        <p:txBody>
+          <a:bodyPr/>
+          <a:lstStyle/>
+          <a:p>
+            <a:r>
+              <a:t>Asset Capitalization by Asset Group</a:t>
+            </a:r>
+          </a:p>
+        </p:txBody>
+      </p:sp>
+      <p:graphicFrame>
+        <p:nvGraphicFramePr>
+          <p:cNvPr id="3" name="Chart 2"/>
+          <p:cNvGraphicFramePr>
+            <a:graphicFrameLocks noGrp="1"/>
+          </p:cNvGraphicFramePr>
+          <p:nvPr/>
+        </p:nvGraphicFramePr>
+        <p:xfrm>
+          <a:off x="914400" y="1371600"/>
+          <a:ext cx="7315200" cy="3657600"/>
+        </p:xfrm>
+        <a:graphic>
+          <a:graphicData uri="http://schemas.openxmlformats.org/drawingml/2006/chart">
+            <c:chart xmlns:c="http://schemas.openxmlformats.org/drawingml/2006/chart" r:id="rId2"/>
+          </a:graphicData>
+        </a:graphic>
+      </p:graphicFrame>
+    </p:spTree>
+  </p:cSld>
+  <p:clrMapOvr>
+    <a:masterClrMapping/>
+  </p:clrMapOvr>
+</p:sld>
+</file>
+
+<file path=ppt/slides/slide23.xml><?xml version="1.0" encoding="utf-8"?>
+<p:sld xmlns:a="http://schemas.openxmlformats.org/drawingml/2006/main" xmlns:p="http://schemas.openxmlformats.org/presentationml/2006/main" xmlns:r="http://schemas.openxmlformats.org/officeDocument/2006/relationships">
+  <p:cSld>
+    <p:spTree>
+      <p:nvGrpSpPr>
+        <p:cNvPr id="1" name=""/>
+        <p:cNvGrpSpPr/>
+        <p:nvPr/>
+      </p:nvGrpSpPr>
+      <p:grpSpPr/>
+      <p:sp>
+        <p:nvSpPr>
+          <p:cNvPr id="2" name="Title 1"/>
+          <p:cNvSpPr>
+            <a:spLocks noGrp="1"/>
+          </p:cNvSpPr>
+          <p:nvPr>
+            <p:ph type="title"/>
+          </p:nvPr>
+        </p:nvSpPr>
+        <p:spPr/>
+        <p:txBody>
+          <a:bodyPr/>
+          <a:lstStyle/>
+          <a:p>
+            <a:r>
+              <a:t>Total Assets by Asset Group</a:t>
+            </a:r>
+          </a:p>
+        </p:txBody>
+      </p:sp>
+      <p:graphicFrame>
+        <p:nvGraphicFramePr>
+          <p:cNvPr id="3" name="Chart 2"/>
+          <p:cNvGraphicFramePr>
+            <a:graphicFrameLocks noGrp="1"/>
+          </p:cNvGraphicFramePr>
+          <p:nvPr/>
+        </p:nvGraphicFramePr>
+        <p:xfrm>
+          <a:off x="914400" y="1371600"/>
+          <a:ext cx="7315200" cy="3657600"/>
+        </p:xfrm>
+        <a:graphic>
+          <a:graphicData uri="http://schemas.openxmlformats.org/drawingml/2006/chart">
+            <c:chart xmlns:c="http://schemas.openxmlformats.org/drawingml/2006/chart" r:id="rId2"/>
+          </a:graphicData>
+        </a:graphic>
+      </p:graphicFrame>
+    </p:spTree>
+  </p:cSld>
+  <p:clrMapOvr>
+    <a:masterClrMapping/>
+  </p:clrMapOvr>
+</p:sld>
+</file>
+
+<file path=ppt/slides/slide24.xml><?xml version="1.0" encoding="utf-8"?>
+<p:sld xmlns:a="http://schemas.openxmlformats.org/drawingml/2006/main" xmlns:p="http://schemas.openxmlformats.org/presentationml/2006/main" xmlns:r="http://schemas.openxmlformats.org/officeDocument/2006/relationships">
+  <p:cSld>
+    <p:spTree>
+      <p:nvGrpSpPr>
+        <p:cNvPr id="1" name=""/>
+        <p:cNvGrpSpPr/>
+        <p:nvPr/>
+      </p:nvGrpSpPr>
+      <p:grpSpPr/>
+      <p:sp>
+        <p:nvSpPr>
+          <p:cNvPr id="2" name="Title 1"/>
+          <p:cNvSpPr>
+            <a:spLocks noGrp="1"/>
+          </p:cNvSpPr>
+          <p:nvPr>
+            <p:ph type="title"/>
+          </p:nvPr>
+        </p:nvSpPr>
+        <p:spPr/>
+        <p:txBody>
+          <a:bodyPr/>
+          <a:lstStyle/>
+          <a:p>
+            <a:r>
+              <a:t>Annual Depreciation per Asset</a:t>
+            </a:r>
+          </a:p>
+        </p:txBody>
+      </p:sp>
+      <p:graphicFrame>
+        <p:nvGraphicFramePr>
+          <p:cNvPr id="3" name="Chart 2"/>
+          <p:cNvGraphicFramePr>
+            <a:graphicFrameLocks noGrp="1"/>
+          </p:cNvGraphicFramePr>
+          <p:nvPr/>
+        </p:nvGraphicFramePr>
+        <p:xfrm>
+          <a:off x="914400" y="1371600"/>
+          <a:ext cx="7315200" cy="3657600"/>
+        </p:xfrm>
+        <a:graphic>
+          <a:graphicData uri="http://schemas.openxmlformats.org/drawingml/2006/chart">
+            <c:chart xmlns:c="http://schemas.openxmlformats.org/drawingml/2006/chart" r:id="rId2"/>
+          </a:graphicData>
+        </a:graphic>
+      </p:graphicFrame>
+    </p:spTree>
+  </p:cSld>
+  <p:clrMapOvr>
+    <a:masterClrMapping/>
+  </p:clrMapOvr>
+</p:sld>
+</file>
+
+<file path=ppt/slides/slide25.xml><?xml version="1.0" encoding="utf-8"?>
+<p:sld xmlns:a="http://schemas.openxmlformats.org/drawingml/2006/main" xmlns:p="http://schemas.openxmlformats.org/presentationml/2006/main" xmlns:r="http://schemas.openxmlformats.org/officeDocument/2006/relationships">
+  <p:cSld>
+    <p:spTree>
+      <p:nvGrpSpPr>
+        <p:cNvPr id="1" name=""/>
+        <p:cNvGrpSpPr/>
+        <p:nvPr/>
+      </p:nvGrpSpPr>
+      <p:grpSpPr/>
+      <p:sp>
+        <p:nvSpPr>
+          <p:cNvPr id="2" name="Title 1"/>
+          <p:cNvSpPr>
+            <a:spLocks noGrp="1"/>
+          </p:cNvSpPr>
+          <p:nvPr>
+            <p:ph type="title"/>
+          </p:nvPr>
+        </p:nvSpPr>
+        <p:spPr/>
+        <p:txBody>
+          <a:bodyPr/>
+          <a:lstStyle/>
+          <a:p>
+            <a:r>
+              <a:t>Actuals Comparison (2025 vs 2026)</a:t>
+            </a:r>
+          </a:p>
+        </p:txBody>
+      </p:sp>
+      <p:graphicFrame>
+        <p:nvGraphicFramePr>
+          <p:cNvPr id="3" name="Chart 2"/>
+          <p:cNvGraphicFramePr>
+            <a:graphicFrameLocks noGrp="1"/>
+          </p:cNvGraphicFramePr>
+          <p:nvPr/>
+        </p:nvGraphicFramePr>
+        <p:xfrm>
+          <a:off x="914400" y="1371600"/>
+          <a:ext cx="7315200" cy="3657600"/>
+        </p:xfrm>
+        <a:graphic>
+          <a:graphicData uri="http://schemas.openxmlformats.org/drawingml/2006/chart">
+            <c:chart xmlns:c="http://schemas.openxmlformats.org/drawingml/2006/chart" r:id="rId2"/>
+          </a:graphicData>
+        </a:graphic>
+      </p:graphicFrame>
+    </p:spTree>
+  </p:cSld>
+  <p:clrMapOvr>
+    <a:masterClrMapping/>
+  </p:clrMapOvr>
+</p:sld>
+</file>
+
+<file path=ppt/slides/slide26.xml><?xml version="1.0" encoding="utf-8"?>
+<p:sld xmlns:a="http://schemas.openxmlformats.org/drawingml/2006/main" xmlns:p="http://schemas.openxmlformats.org/presentationml/2006/main" xmlns:r="http://schemas.openxmlformats.org/officeDocument/2006/relationships">
+  <p:cSld>
+    <p:spTree>
+      <p:nvGrpSpPr>
+        <p:cNvPr id="1" name=""/>
+        <p:cNvGrpSpPr/>
+        <p:nvPr/>
+      </p:nvGrpSpPr>
+      <p:grpSpPr/>
+      <p:sp>
+        <p:nvSpPr>
+          <p:cNvPr id="2" name="Title 1"/>
+          <p:cNvSpPr>
+            <a:spLocks noGrp="1"/>
+          </p:cNvSpPr>
+          <p:nvPr>
+            <p:ph type="title"/>
+          </p:nvPr>
+        </p:nvSpPr>
+        <p:spPr/>
+        <p:txBody>
+          <a:bodyPr/>
+          <a:lstStyle/>
+          <a:p>
+            <a:r>
+              <a:t>Growth Trend Analysis</a:t>
+            </a:r>
+          </a:p>
+        </p:txBody>
+      </p:sp>
+      <p:graphicFrame>
+        <p:nvGraphicFramePr>
+          <p:cNvPr id="3" name="Chart 2"/>
+          <p:cNvGraphicFramePr>
+            <a:graphicFrameLocks noGrp="1"/>
+          </p:cNvGraphicFramePr>
+          <p:nvPr/>
+        </p:nvGraphicFramePr>
+        <p:xfrm>
+          <a:off x="914400" y="1371600"/>
+          <a:ext cx="7315200" cy="3657600"/>
+        </p:xfrm>
+        <a:graphic>
+          <a:graphicData uri="http://schemas.openxmlformats.org/drawingml/2006/chart">
+            <c:chart xmlns:c="http://schemas.openxmlformats.org/drawingml/2006/chart" r:id="rId2"/>
+          </a:graphicData>
+        </a:graphic>
+      </p:graphicFrame>
+    </p:spTree>
+  </p:cSld>
+  <p:clrMapOvr>
+    <a:masterClrMapping/>
+  </p:clrMapOvr>
+</p:sld>
+</file>
+
+<file path=ppt/slides/slide27.xml><?xml version="1.0" encoding="utf-8"?>
+<p:sld xmlns:a="http://schemas.openxmlformats.org/drawingml/2006/main" xmlns:p="http://schemas.openxmlformats.org/presentationml/2006/main" xmlns:r="http://schemas.openxmlformats.org/officeDocument/2006/relationships">
+  <p:cSld>
+    <p:spTree>
+      <p:nvGrpSpPr>
+        <p:cNvPr id="1" name=""/>
+        <p:cNvGrpSpPr/>
+        <p:nvPr/>
+      </p:nvGrpSpPr>
+      <p:grpSpPr/>
+      <p:sp>
+        <p:nvSpPr>
+          <p:cNvPr id="2" name="Title 1"/>
+          <p:cNvSpPr>
+            <a:spLocks noGrp="1"/>
+          </p:cNvSpPr>
+          <p:nvPr>
+            <p:ph type="title"/>
+          </p:nvPr>
+        </p:nvSpPr>
+        <p:spPr/>
+        <p:txBody>
+          <a:bodyPr/>
+          <a:lstStyle/>
+          <a:p>
+            <a:r>
+              <a:t>Budget Forecast 2027</a:t>
+            </a:r>
+          </a:p>
+        </p:txBody>
+      </p:sp>
+      <p:graphicFrame>
+        <p:nvGraphicFramePr>
+          <p:cNvPr id="3" name="Chart 2"/>
+          <p:cNvGraphicFramePr>
+            <a:graphicFrameLocks noGrp="1"/>
+          </p:cNvGraphicFramePr>
+          <p:nvPr/>
+        </p:nvGraphicFramePr>
+        <p:xfrm>
+          <a:off x="914400" y="1371600"/>
+          <a:ext cx="7315200" cy="3657600"/>
+        </p:xfrm>
+        <a:graphic>
+          <a:graphicData uri="http://schemas.openxmlformats.org/drawingml/2006/chart">
+            <c:chart xmlns:c="http://schemas.openxmlformats.org/drawingml/2006/chart" r:id="rId2"/>
+          </a:graphicData>
+        </a:graphic>
+      </p:graphicFrame>
+    </p:spTree>
+  </p:cSld>
+  <p:clrMapOvr>
+    <a:masterClrMapping/>
+  </p:clrMapOvr>
+</p:sld>
+</file>
+
+<file path=ppt/slides/slide28.xml><?xml version="1.0" encoding="utf-8"?>
+<p:sld xmlns:a="http://schemas.openxmlformats.org/drawingml/2006/main" xmlns:p="http://schemas.openxmlformats.org/presentationml/2006/main" xmlns:r="http://schemas.openxmlformats.org/officeDocument/2006/relationships">
+  <p:cSld>
+    <p:spTree>
+      <p:nvGrpSpPr>
+        <p:cNvPr id="1" name=""/>
+        <p:cNvGrpSpPr/>
+        <p:nvPr/>
+      </p:nvGrpSpPr>
+      <p:grpSpPr/>
+      <p:sp>
+        <p:nvSpPr>
+          <p:cNvPr id="2" name="Title 1"/>
+          <p:cNvSpPr>
+            <a:spLocks noGrp="1"/>
+          </p:cNvSpPr>
+          <p:nvPr>
+            <p:ph type="title"/>
+          </p:nvPr>
+        </p:nvSpPr>
+        <p:spPr/>
+        <p:txBody>
+          <a:bodyPr/>
+          <a:lstStyle/>
+          <a:p>
+            <a:r>
+              <a:t>Revenue vs Expense vs Profit Trend</a:t>
+            </a:r>
+          </a:p>
+        </p:txBody>
+      </p:sp>
+      <p:graphicFrame>
+        <p:nvGraphicFramePr>
+          <p:cNvPr id="3" name="Chart 2"/>
+          <p:cNvGraphicFramePr>
+            <a:graphicFrameLocks noGrp="1"/>
+          </p:cNvGraphicFramePr>
+          <p:nvPr/>
+        </p:nvGraphicFramePr>
+        <p:xfrm>
+          <a:off x="914400" y="1371600"/>
+          <a:ext cx="7315200" cy="3657600"/>
+        </p:xfrm>
+        <a:graphic>
+          <a:graphicData uri="http://schemas.openxmlformats.org/drawingml/2006/chart">
+            <c:chart xmlns:c="http://schemas.openxmlformats.org/drawingml/2006/chart" r:id="rId2"/>
+          </a:graphicData>
+        </a:graphic>
+      </p:graphicFrame>
+    </p:spTree>
+  </p:cSld>
+  <p:clrMapOvr>
+    <a:masterClrMapping/>
+  </p:clrMapOvr>
+</p:sld>
+</file>
+
+<file path=ppt/slides/slide29.xml><?xml version="1.0" encoding="utf-8"?>
+<p:sld xmlns:a="http://schemas.openxmlformats.org/drawingml/2006/main" xmlns:p="http://schemas.openxmlformats.org/presentationml/2006/main" xmlns:r="http://schemas.openxmlformats.org/officeDocument/2006/relationships">
+  <p:cSld>
+    <p:spTree>
+      <p:nvGrpSpPr>
+        <p:cNvPr id="1" name=""/>
+        <p:cNvGrpSpPr/>
+        <p:nvPr/>
+      </p:nvGrpSpPr>
+      <p:grpSpPr/>
+      <p:sp>
+        <p:nvSpPr>
+          <p:cNvPr id="2" name="Title 1"/>
+          <p:cNvSpPr>
+            <a:spLocks noGrp="1"/>
+          </p:cNvSpPr>
+          <p:nvPr>
+            <p:ph type="title"/>
+          </p:nvPr>
+        </p:nvSpPr>
+        <p:spPr/>
+        <p:txBody>
+          <a:bodyPr/>
+          <a:lstStyle/>
+          <a:p/>
+        </p:txBody>
+      </p:sp>
+      <p:sp>
+        <p:nvSpPr>
+          <p:cNvPr id="3" name="TextBox 2"/>
+          <p:cNvSpPr txBox="1"/>
+          <p:nvPr/>
+        </p:nvSpPr>
+        <p:spPr>
+          <a:xfrm>
+            <a:off x="457200" y="182880"/>
+            <a:ext cx="8229600" cy="457200"/>
+          </a:xfrm>
+          <a:prstGeom prst="rect">
+            <a:avLst/>
+          </a:prstGeom>
+          <a:noFill/>
+        </p:spPr>
+        <p:txBody>
+          <a:bodyPr wrap="none">
+            <a:spAutoFit/>
+          </a:bodyPr>
+          <a:lstStyle/>
+          <a:p>
+            <a:r>
+              <a:t>Monthly Expense Variance by Account</a:t>
+            </a:r>
+          </a:p>
+        </p:txBody>
+      </p:sp>
+      <p:graphicFrame>
+        <p:nvGraphicFramePr>
+          <p:cNvPr id="4" name="Chart 3"/>
+          <p:cNvGraphicFramePr>
+            <a:graphicFrameLocks noGrp="1"/>
+          </p:cNvGraphicFramePr>
+          <p:nvPr/>
+        </p:nvGraphicFramePr>
+        <p:xfrm>
+          <a:off x="457200" y="1097280"/>
+          <a:ext cx="8229600" cy="4572000"/>
+        </p:xfrm>
+        <a:graphic>
+          <a:graphicData uri="http://schemas.openxmlformats.org/drawingml/2006/chart">
+            <c:chart xmlns:c="http://schemas.openxmlformats.org/drawingml/2006/chart" r:id="rId2"/>
+          </a:graphicData>
+        </a:graphic>
+      </p:graphicFrame>
+    </p:spTree>
+  </p:cSld>
+  <p:clrMapOvr>
+    <a:masterClrMapping/>
+  </p:clrMapOvr>
+</p:sld>
+</file>
+
+<file path=ppt/slides/slide3.xml><?xml version="1.0" encoding="utf-8"?>
+<p:sld xmlns:a="http://schemas.openxmlformats.org/drawingml/2006/main" xmlns:p="http://schemas.openxmlformats.org/presentationml/2006/main" xmlns:r="http://schemas.openxmlformats.org/officeDocument/2006/relationships">
+  <p:cSld>
+    <p:spTree>
+      <p:nvGrpSpPr>
+        <p:cNvPr id="1" name=""/>
+        <p:cNvGrpSpPr/>
+        <p:nvPr/>
+      </p:nvGrpSpPr>
+      <p:grpSpPr/>
+      <p:sp>
+        <p:nvSpPr>
+          <p:cNvPr id="2" name="Title 1"/>
+          <p:cNvSpPr>
+            <a:spLocks noGrp="1"/>
+          </p:cNvSpPr>
+          <p:nvPr>
+            <p:ph type="title"/>
+          </p:nvPr>
+        </p:nvSpPr>
+        <p:spPr/>
+        <p:txBody>
+          <a:bodyPr/>
+          <a:lstStyle/>
+          <a:p/>
+        </p:txBody>
+      </p:sp>
+      <p:sp>
+        <p:nvSpPr>
+          <p:cNvPr id="3" name="TextBox 2"/>
+          <p:cNvSpPr txBox="1"/>
+          <p:nvPr/>
+        </p:nvSpPr>
+        <p:spPr>
+          <a:xfrm>
+            <a:off x="457200" y="182880"/>
+            <a:ext cx="8229600" cy="457200"/>
+          </a:xfrm>
+          <a:prstGeom prst="rect">
+            <a:avLst/>
+          </a:prstGeom>
+          <a:noFill/>
+        </p:spPr>
+        <p:txBody>
+          <a:bodyPr wrap="none">
+            <a:spAutoFit/>
+          </a:bodyPr>
+          <a:lstStyle/>
+          <a:p>
+            <a:r>
+              <a:t>Year Over Year Growth %</a:t>
+            </a:r>
+          </a:p>
+        </p:txBody>
+      </p:sp>
+      <p:graphicFrame>
+        <p:nvGraphicFramePr>
+          <p:cNvPr id="4" name="Chart 3"/>
+          <p:cNvGraphicFramePr>
+            <a:graphicFrameLocks noGrp="1"/>
+          </p:cNvGraphicFramePr>
+          <p:nvPr/>
+        </p:nvGraphicFramePr>
+        <p:xfrm>
+          <a:off x="914400" y="914400"/>
+          <a:ext cx="7315200" cy="4114800"/>
+        </p:xfrm>
+        <a:graphic>
+          <a:graphicData uri="http://schemas.openxmlformats.org/drawingml/2006/chart">
+            <c:chart xmlns:c="http://schemas.openxmlformats.org/drawingml/2006/chart" r:id="rId2"/>
+          </a:graphicData>
+        </a:graphic>
+      </p:graphicFrame>
+    </p:spTree>
+  </p:cSld>
+  <p:clrMapOvr>
+    <a:masterClrMapping/>
+  </p:clrMapOvr>
+</p:sld>
+</file>
+
+<file path=ppt/slides/slide30.xml><?xml version="1.0" encoding="utf-8"?>
+<p:sld xmlns:a="http://schemas.openxmlformats.org/drawingml/2006/main" xmlns:p="http://schemas.openxmlformats.org/presentationml/2006/main" xmlns:r="http://schemas.openxmlformats.org/officeDocument/2006/relationships">
+  <p:cSld>
+    <p:spTree>
+      <p:nvGrpSpPr>
+        <p:cNvPr id="1" name=""/>
+        <p:cNvGrpSpPr/>
+        <p:nvPr/>
+      </p:nvGrpSpPr>
+      <p:grpSpPr/>
+      <p:sp>
+        <p:nvSpPr>
+          <p:cNvPr id="2" name="Title 1"/>
+          <p:cNvSpPr>
+            <a:spLocks noGrp="1"/>
+          </p:cNvSpPr>
+          <p:nvPr>
+            <p:ph type="title"/>
+          </p:nvPr>
+        </p:nvSpPr>
+        <p:spPr/>
+        <p:txBody>
+          <a:bodyPr/>
+          <a:lstStyle/>
+          <a:p/>
+        </p:txBody>
+      </p:sp>
+      <p:sp>
+        <p:nvSpPr>
+          <p:cNvPr id="3" name="TextBox 2"/>
+          <p:cNvSpPr txBox="1"/>
+          <p:nvPr/>
+        </p:nvSpPr>
+        <p:spPr>
+          <a:xfrm>
+            <a:off x="457200" y="182880"/>
+            <a:ext cx="8229600" cy="457200"/>
+          </a:xfrm>
+          <a:prstGeom prst="rect">
+            <a:avLst/>
+          </a:prstGeom>
+          <a:noFill/>
+        </p:spPr>
+        <p:txBody>
+          <a:bodyPr wrap="none">
+            <a:spAutoFit/>
+          </a:bodyPr>
+          <a:lstStyle/>
+          <a:p>
+            <a:r>
+              <a:t>Overall Monthly Expense Trend</a:t>
+            </a:r>
+          </a:p>
+        </p:txBody>
+      </p:sp>
+      <p:graphicFrame>
+        <p:nvGraphicFramePr>
+          <p:cNvPr id="4" name="Chart 3"/>
+          <p:cNvGraphicFramePr>
+            <a:graphicFrameLocks noGrp="1"/>
+          </p:cNvGraphicFramePr>
+          <p:nvPr/>
+        </p:nvGraphicFramePr>
+        <p:xfrm>
+          <a:off x="914400" y="1371600"/>
+          <a:ext cx="7315200" cy="3657600"/>
+        </p:xfrm>
+        <a:graphic>
+          <a:graphicData uri="http://schemas.openxmlformats.org/drawingml/2006/chart">
+            <c:chart xmlns:c="http://schemas.openxmlformats.org/drawingml/2006/chart" r:id="rId2"/>
+          </a:graphicData>
+        </a:graphic>
+      </p:graphicFrame>
+    </p:spTree>
+  </p:cSld>
+  <p:clrMapOvr>
+    <a:masterClrMapping/>
+  </p:clrMapOvr>
+</p:sld>
+</file>
+
+<file path=ppt/slides/slide31.xml><?xml version="1.0" encoding="utf-8"?>
+<p:sld xmlns:a="http://schemas.openxmlformats.org/drawingml/2006/main" xmlns:p="http://schemas.openxmlformats.org/presentationml/2006/main" xmlns:r="http://schemas.openxmlformats.org/officeDocument/2006/relationships">
+  <p:cSld>
+    <p:spTree>
+      <p:nvGrpSpPr>
+        <p:cNvPr id="1" name=""/>
+        <p:cNvGrpSpPr/>
+        <p:nvPr/>
+      </p:nvGrpSpPr>
+      <p:grpSpPr/>
+      <p:sp>
+        <p:nvSpPr>
+          <p:cNvPr id="2" name="Title 1"/>
+          <p:cNvSpPr>
+            <a:spLocks noGrp="1"/>
+          </p:cNvSpPr>
+          <p:nvPr>
+            <p:ph type="title"/>
+          </p:nvPr>
+        </p:nvSpPr>
+        <p:spPr/>
+        <p:txBody>
+          <a:bodyPr/>
+          <a:lstStyle/>
+          <a:p/>
+        </p:txBody>
+      </p:sp>
+      <p:sp>
+        <p:nvSpPr>
+          <p:cNvPr id="3" name="TextBox 2"/>
+          <p:cNvSpPr txBox="1"/>
+          <p:nvPr/>
+        </p:nvSpPr>
+        <p:spPr>
+          <a:xfrm>
+            <a:off x="457200" y="182880"/>
+            <a:ext cx="8229600" cy="457200"/>
+          </a:xfrm>
+          <a:prstGeom prst="rect">
+            <a:avLst/>
+          </a:prstGeom>
+          <a:noFill/>
+        </p:spPr>
+        <p:txBody>
+          <a:bodyPr wrap="none">
+            <a:spAutoFit/>
+          </a:bodyPr>
+          <a:lstStyle/>
+          <a:p>
+            <a:r>
+              <a:t>Journal Entry Impact Analysis</a:t>
+            </a:r>
+          </a:p>
+        </p:txBody>
+      </p:sp>
+      <p:graphicFrame>
+        <p:nvGraphicFramePr>
+          <p:cNvPr id="4" name="Chart 3"/>
+          <p:cNvGraphicFramePr>
+            <a:graphicFrameLocks noGrp="1"/>
+          </p:cNvGraphicFramePr>
+          <p:nvPr/>
+        </p:nvGraphicFramePr>
+        <p:xfrm>
+          <a:off x="457200" y="1371600"/>
+          <a:ext cx="8229600" cy="4114800"/>
+        </p:xfrm>
+        <a:graphic>
+          <a:graphicData uri="http://schemas.openxmlformats.org/drawingml/2006/chart">
+            <c:chart xmlns:c="http://schemas.openxmlformats.org/drawingml/2006/chart" r:id="rId2"/>
+          </a:graphicData>
+        </a:graphic>
+      </p:graphicFrame>
+    </p:spTree>
+  </p:cSld>
+  <p:clrMapOvr>
+    <a:masterClrMapping/>
+  </p:clrMapOvr>
+</p:sld>
+</file>
+
+<file path=ppt/slides/slide32.xml><?xml version="1.0" encoding="utf-8"?>
+<p:sld xmlns:a="http://schemas.openxmlformats.org/drawingml/2006/main" xmlns:p="http://schemas.openxmlformats.org/presentationml/2006/main" xmlns:r="http://schemas.openxmlformats.org/officeDocument/2006/relationships">
+  <p:cSld>
+    <p:spTree>
+      <p:nvGrpSpPr>
+        <p:cNvPr id="1" name=""/>
+        <p:cNvGrpSpPr/>
+        <p:nvPr/>
+      </p:nvGrpSpPr>
+      <p:grpSpPr/>
+      <p:sp>
+        <p:nvSpPr>
+          <p:cNvPr id="2" name="Title 1"/>
+          <p:cNvSpPr>
+            <a:spLocks noGrp="1"/>
+          </p:cNvSpPr>
+          <p:nvPr>
+            <p:ph type="title"/>
+          </p:nvPr>
+        </p:nvSpPr>
+        <p:spPr/>
+        <p:txBody>
+          <a:bodyPr/>
+          <a:lstStyle/>
+          <a:p/>
+        </p:txBody>
+      </p:sp>
+      <p:sp>
+        <p:nvSpPr>
+          <p:cNvPr id="3" name="TextBox 2"/>
+          <p:cNvSpPr txBox="1"/>
+          <p:nvPr/>
+        </p:nvSpPr>
+        <p:spPr>
+          <a:xfrm>
+            <a:off x="457200" y="182880"/>
+            <a:ext cx="8229600" cy="457200"/>
+          </a:xfrm>
+          <a:prstGeom prst="rect">
+            <a:avLst/>
+          </a:prstGeom>
+          <a:noFill/>
+        </p:spPr>
+        <p:txBody>
+          <a:bodyPr wrap="none">
+            <a:spAutoFit/>
+          </a:bodyPr>
+          <a:lstStyle/>
+          <a:p>
+            <a:r>
+              <a:t>Monthly Depreciation Forecast</a:t>
+            </a:r>
+          </a:p>
+        </p:txBody>
+      </p:sp>
+      <p:graphicFrame>
+        <p:nvGraphicFramePr>
+          <p:cNvPr id="4" name="Chart 3"/>
+          <p:cNvGraphicFramePr>
+            <a:graphicFrameLocks noGrp="1"/>
+          </p:cNvGraphicFramePr>
+          <p:nvPr/>
+        </p:nvGraphicFramePr>
+        <p:xfrm>
+          <a:off x="457200" y="1371600"/>
+          <a:ext cx="8229600" cy="4114800"/>
+        </p:xfrm>
+        <a:graphic>
+          <a:graphicData uri="http://schemas.openxmlformats.org/drawingml/2006/chart">
+            <c:chart xmlns:c="http://schemas.openxmlformats.org/drawingml/2006/chart" r:id="rId2"/>
+          </a:graphicData>
+        </a:graphic>
+      </p:graphicFrame>
+    </p:spTree>
+  </p:cSld>
+  <p:clrMapOvr>
+    <a:masterClrMapping/>
+  </p:clrMapOvr>
+</p:sld>
+</file>
+
+<file path=ppt/slides/slide33.xml><?xml version="1.0" encoding="utf-8"?>
+<p:sld xmlns:a="http://schemas.openxmlformats.org/drawingml/2006/main" xmlns:p="http://schemas.openxmlformats.org/presentationml/2006/main" xmlns:r="http://schemas.openxmlformats.org/officeDocument/2006/relationships">
+  <p:cSld>
+    <p:spTree>
+      <p:nvGrpSpPr>
+        <p:cNvPr id="1" name=""/>
+        <p:cNvGrpSpPr/>
+        <p:nvPr/>
+      </p:nvGrpSpPr>
+      <p:grpSpPr/>
+      <p:sp>
+        <p:nvSpPr>
+          <p:cNvPr id="2" name="Title 1"/>
+          <p:cNvSpPr>
+            <a:spLocks noGrp="1"/>
+          </p:cNvSpPr>
+          <p:nvPr>
+            <p:ph type="title"/>
+          </p:nvPr>
+        </p:nvSpPr>
+        <p:spPr/>
+        <p:txBody>
+          <a:bodyPr/>
+          <a:lstStyle/>
+          <a:p/>
+        </p:txBody>
+      </p:sp>
+      <p:sp>
+        <p:nvSpPr>
+          <p:cNvPr id="3" name="TextBox 2"/>
+          <p:cNvSpPr txBox="1"/>
+          <p:nvPr/>
+        </p:nvSpPr>
+        <p:spPr>
+          <a:xfrm>
+            <a:off x="457200" y="182880"/>
+            <a:ext cx="8229600" cy="457200"/>
+          </a:xfrm>
+          <a:prstGeom prst="rect">
+            <a:avLst/>
+          </a:prstGeom>
+          <a:noFill/>
+        </p:spPr>
+        <p:txBody>
+          <a:bodyPr wrap="none">
+            <a:spAutoFit/>
+          </a:bodyPr>
+          <a:lstStyle/>
+          <a:p>
+            <a:r>
+              <a:t>CWIP Value by Asset Group</a:t>
+            </a:r>
+          </a:p>
+        </p:txBody>
+      </p:sp>
+      <p:graphicFrame>
+        <p:nvGraphicFramePr>
+          <p:cNvPr id="4" name="Chart 3"/>
+          <p:cNvGraphicFramePr>
+            <a:graphicFrameLocks noGrp="1"/>
+          </p:cNvGraphicFramePr>
+          <p:nvPr/>
+        </p:nvGraphicFramePr>
+        <p:xfrm>
+          <a:off x="1828800" y="1371600"/>
+          <a:ext cx="5486400" cy="4114800"/>
         </p:xfrm>
         <a:graphic>
           <a:graphicData uri="http://schemas.openxmlformats.org/drawingml/2006/chart">
